--- a/documentation/Refactorización XLST.pptx
+++ b/documentation/Refactorización XLST.pptx
@@ -825,7 +825,7 @@
           <a:p>
             <a:fld id="{93065D2E-367D-4F9D-9E24-4F44260CE426}" type="datetimeFigureOut">
               <a:rPr lang="es-ES" smtClean="0"/>
-              <a:t>06/09/2026</a:t>
+              <a:t>09/09/2026</a:t>
             </a:fld>
             <a:endParaRPr lang="es-ES"/>
           </a:p>
@@ -1023,7 +1023,7 @@
           <a:p>
             <a:fld id="{93065D2E-367D-4F9D-9E24-4F44260CE426}" type="datetimeFigureOut">
               <a:rPr lang="es-ES" smtClean="0"/>
-              <a:t>06/09/2026</a:t>
+              <a:t>09/09/2026</a:t>
             </a:fld>
             <a:endParaRPr lang="es-ES"/>
           </a:p>
@@ -1231,7 +1231,7 @@
           <a:p>
             <a:fld id="{93065D2E-367D-4F9D-9E24-4F44260CE426}" type="datetimeFigureOut">
               <a:rPr lang="es-ES" smtClean="0"/>
-              <a:t>06/09/2026</a:t>
+              <a:t>09/09/2026</a:t>
             </a:fld>
             <a:endParaRPr lang="es-ES"/>
           </a:p>
@@ -1429,7 +1429,7 @@
           <a:p>
             <a:fld id="{93065D2E-367D-4F9D-9E24-4F44260CE426}" type="datetimeFigureOut">
               <a:rPr lang="es-ES" smtClean="0"/>
-              <a:t>06/09/2026</a:t>
+              <a:t>09/09/2026</a:t>
             </a:fld>
             <a:endParaRPr lang="es-ES"/>
           </a:p>
@@ -1704,7 +1704,7 @@
           <a:p>
             <a:fld id="{93065D2E-367D-4F9D-9E24-4F44260CE426}" type="datetimeFigureOut">
               <a:rPr lang="es-ES" smtClean="0"/>
-              <a:t>06/09/2026</a:t>
+              <a:t>09/09/2026</a:t>
             </a:fld>
             <a:endParaRPr lang="es-ES"/>
           </a:p>
@@ -1969,7 +1969,7 @@
           <a:p>
             <a:fld id="{93065D2E-367D-4F9D-9E24-4F44260CE426}" type="datetimeFigureOut">
               <a:rPr lang="es-ES" smtClean="0"/>
-              <a:t>06/09/2026</a:t>
+              <a:t>09/09/2026</a:t>
             </a:fld>
             <a:endParaRPr lang="es-ES"/>
           </a:p>
@@ -2381,7 +2381,7 @@
           <a:p>
             <a:fld id="{93065D2E-367D-4F9D-9E24-4F44260CE426}" type="datetimeFigureOut">
               <a:rPr lang="es-ES" smtClean="0"/>
-              <a:t>06/09/2026</a:t>
+              <a:t>09/09/2026</a:t>
             </a:fld>
             <a:endParaRPr lang="es-ES"/>
           </a:p>
@@ -2522,7 +2522,7 @@
           <a:p>
             <a:fld id="{93065D2E-367D-4F9D-9E24-4F44260CE426}" type="datetimeFigureOut">
               <a:rPr lang="es-ES" smtClean="0"/>
-              <a:t>06/09/2026</a:t>
+              <a:t>09/09/2026</a:t>
             </a:fld>
             <a:endParaRPr lang="es-ES"/>
           </a:p>
@@ -2635,7 +2635,7 @@
           <a:p>
             <a:fld id="{93065D2E-367D-4F9D-9E24-4F44260CE426}" type="datetimeFigureOut">
               <a:rPr lang="es-ES" smtClean="0"/>
-              <a:t>06/09/2026</a:t>
+              <a:t>09/09/2026</a:t>
             </a:fld>
             <a:endParaRPr lang="es-ES"/>
           </a:p>
@@ -2946,7 +2946,7 @@
           <a:p>
             <a:fld id="{93065D2E-367D-4F9D-9E24-4F44260CE426}" type="datetimeFigureOut">
               <a:rPr lang="es-ES" smtClean="0"/>
-              <a:t>06/09/2026</a:t>
+              <a:t>09/09/2026</a:t>
             </a:fld>
             <a:endParaRPr lang="es-ES"/>
           </a:p>
@@ -3234,7 +3234,7 @@
           <a:p>
             <a:fld id="{93065D2E-367D-4F9D-9E24-4F44260CE426}" type="datetimeFigureOut">
               <a:rPr lang="es-ES" smtClean="0"/>
-              <a:t>06/09/2026</a:t>
+              <a:t>09/09/2026</a:t>
             </a:fld>
             <a:endParaRPr lang="es-ES"/>
           </a:p>
@@ -3475,7 +3475,7 @@
           <a:p>
             <a:fld id="{93065D2E-367D-4F9D-9E24-4F44260CE426}" type="datetimeFigureOut">
               <a:rPr lang="es-ES" smtClean="0"/>
-              <a:t>06/09/2026</a:t>
+              <a:t>09/09/2026</a:t>
             </a:fld>
             <a:endParaRPr lang="es-ES"/>
           </a:p>
@@ -7432,6 +7432,1542 @@
           </p:sp>
         </p:grpSp>
       </p:grpSp>
+      <p:grpSp>
+        <p:nvGrpSpPr>
+          <p:cNvPr id="12" name="Grupo 11">
+            <a:extLst>
+              <a:ext uri="{FF2B5EF4-FFF2-40B4-BE49-F238E27FC236}">
+                <a16:creationId xmlns:a16="http://schemas.microsoft.com/office/drawing/2014/main" id="{71C6704D-8145-EC0D-5A9C-A7201169D2A8}"/>
+              </a:ext>
+            </a:extLst>
+          </p:cNvPr>
+          <p:cNvGrpSpPr/>
+          <p:nvPr/>
+        </p:nvGrpSpPr>
+        <p:grpSpPr>
+          <a:xfrm>
+            <a:off x="4120675" y="487474"/>
+            <a:ext cx="3802579" cy="2947600"/>
+            <a:chOff x="4194721" y="3311364"/>
+            <a:chExt cx="3802579" cy="2947600"/>
+          </a:xfrm>
+        </p:grpSpPr>
+        <p:sp>
+          <p:nvSpPr>
+            <p:cNvPr id="13" name="Rectángulo 12">
+              <a:extLst>
+                <a:ext uri="{FF2B5EF4-FFF2-40B4-BE49-F238E27FC236}">
+                  <a16:creationId xmlns:a16="http://schemas.microsoft.com/office/drawing/2014/main" id="{99E0D1B7-16CD-0139-6FDC-4463620E2076}"/>
+                </a:ext>
+              </a:extLst>
+            </p:cNvPr>
+            <p:cNvSpPr/>
+            <p:nvPr/>
+          </p:nvSpPr>
+          <p:spPr>
+            <a:xfrm>
+              <a:off x="6164551" y="3311364"/>
+              <a:ext cx="627126" cy="882387"/>
+            </a:xfrm>
+            <a:prstGeom prst="rect">
+              <a:avLst/>
+            </a:prstGeom>
+            <a:solidFill>
+              <a:schemeClr val="bg2">
+                <a:lumMod val="90000"/>
+              </a:schemeClr>
+            </a:solidFill>
+          </p:spPr>
+          <p:style>
+            <a:lnRef idx="2">
+              <a:schemeClr val="accent1">
+                <a:shade val="15000"/>
+              </a:schemeClr>
+            </a:lnRef>
+            <a:fillRef idx="1">
+              <a:schemeClr val="accent1"/>
+            </a:fillRef>
+            <a:effectRef idx="0">
+              <a:schemeClr val="accent1"/>
+            </a:effectRef>
+            <a:fontRef idx="minor">
+              <a:schemeClr val="lt1"/>
+            </a:fontRef>
+          </p:style>
+          <p:txBody>
+            <a:bodyPr rtlCol="0" anchor="ctr"/>
+            <a:lstStyle/>
+            <a:p>
+              <a:pPr algn="ctr"/>
+              <a:endParaRPr lang="es-ES" dirty="0"/>
+            </a:p>
+          </p:txBody>
+        </p:sp>
+        <p:sp>
+          <p:nvSpPr>
+            <p:cNvPr id="14" name="Rectángulo 13">
+              <a:extLst>
+                <a:ext uri="{FF2B5EF4-FFF2-40B4-BE49-F238E27FC236}">
+                  <a16:creationId xmlns:a16="http://schemas.microsoft.com/office/drawing/2014/main" id="{2ED9F028-B32B-0E36-D660-05D534100D78}"/>
+                </a:ext>
+              </a:extLst>
+            </p:cNvPr>
+            <p:cNvSpPr/>
+            <p:nvPr/>
+          </p:nvSpPr>
+          <p:spPr>
+            <a:xfrm>
+              <a:off x="6017856" y="3425738"/>
+              <a:ext cx="627126" cy="882387"/>
+            </a:xfrm>
+            <a:prstGeom prst="rect">
+              <a:avLst/>
+            </a:prstGeom>
+            <a:solidFill>
+              <a:schemeClr val="bg2">
+                <a:lumMod val="90000"/>
+              </a:schemeClr>
+            </a:solidFill>
+          </p:spPr>
+          <p:style>
+            <a:lnRef idx="2">
+              <a:schemeClr val="accent1">
+                <a:shade val="15000"/>
+              </a:schemeClr>
+            </a:lnRef>
+            <a:fillRef idx="1">
+              <a:schemeClr val="accent1"/>
+            </a:fillRef>
+            <a:effectRef idx="0">
+              <a:schemeClr val="accent1"/>
+            </a:effectRef>
+            <a:fontRef idx="minor">
+              <a:schemeClr val="lt1"/>
+            </a:fontRef>
+          </p:style>
+          <p:txBody>
+            <a:bodyPr rtlCol="0" anchor="ctr"/>
+            <a:lstStyle/>
+            <a:p>
+              <a:pPr algn="ctr"/>
+              <a:endParaRPr lang="es-ES" dirty="0"/>
+            </a:p>
+          </p:txBody>
+        </p:sp>
+        <p:grpSp>
+          <p:nvGrpSpPr>
+            <p:cNvPr id="15" name="Grupo 14">
+              <a:extLst>
+                <a:ext uri="{FF2B5EF4-FFF2-40B4-BE49-F238E27FC236}">
+                  <a16:creationId xmlns:a16="http://schemas.microsoft.com/office/drawing/2014/main" id="{57FA13FF-6079-CE0A-55E8-6828CB04D76F}"/>
+                </a:ext>
+              </a:extLst>
+            </p:cNvPr>
+            <p:cNvGrpSpPr/>
+            <p:nvPr/>
+          </p:nvGrpSpPr>
+          <p:grpSpPr>
+            <a:xfrm>
+              <a:off x="4194721" y="3540112"/>
+              <a:ext cx="3802579" cy="2718852"/>
+              <a:chOff x="789601" y="1307911"/>
+              <a:chExt cx="3802579" cy="2718852"/>
+            </a:xfrm>
+          </p:grpSpPr>
+          <p:grpSp>
+            <p:nvGrpSpPr>
+              <p:cNvPr id="16" name="Grupo 15">
+                <a:extLst>
+                  <a:ext uri="{FF2B5EF4-FFF2-40B4-BE49-F238E27FC236}">
+                    <a16:creationId xmlns:a16="http://schemas.microsoft.com/office/drawing/2014/main" id="{44C95F63-3035-1B49-F872-31C589BEC8E3}"/>
+                  </a:ext>
+                </a:extLst>
+              </p:cNvPr>
+              <p:cNvGrpSpPr/>
+              <p:nvPr/>
+            </p:nvGrpSpPr>
+            <p:grpSpPr>
+              <a:xfrm>
+                <a:off x="2288562" y="1307911"/>
+                <a:ext cx="804605" cy="882387"/>
+                <a:chOff x="2100116" y="1161875"/>
+                <a:chExt cx="1070929" cy="1174458"/>
+              </a:xfrm>
+            </p:grpSpPr>
+            <p:sp>
+              <p:nvSpPr>
+                <p:cNvPr id="18" name="Rectángulo 17">
+                  <a:extLst>
+                    <a:ext uri="{FF2B5EF4-FFF2-40B4-BE49-F238E27FC236}">
+                      <a16:creationId xmlns:a16="http://schemas.microsoft.com/office/drawing/2014/main" id="{B386DAE6-D087-808A-D450-A9E26C1572C7}"/>
+                    </a:ext>
+                  </a:extLst>
+                </p:cNvPr>
+                <p:cNvSpPr/>
+                <p:nvPr/>
+              </p:nvSpPr>
+              <p:spPr>
+                <a:xfrm>
+                  <a:off x="2336341" y="1161875"/>
+                  <a:ext cx="834704" cy="1174458"/>
+                </a:xfrm>
+                <a:prstGeom prst="rect">
+                  <a:avLst/>
+                </a:prstGeom>
+                <a:solidFill>
+                  <a:schemeClr val="bg2">
+                    <a:lumMod val="90000"/>
+                  </a:schemeClr>
+                </a:solidFill>
+              </p:spPr>
+              <p:style>
+                <a:lnRef idx="2">
+                  <a:schemeClr val="accent1">
+                    <a:shade val="15000"/>
+                  </a:schemeClr>
+                </a:lnRef>
+                <a:fillRef idx="1">
+                  <a:schemeClr val="accent1"/>
+                </a:fillRef>
+                <a:effectRef idx="0">
+                  <a:schemeClr val="accent1"/>
+                </a:effectRef>
+                <a:fontRef idx="minor">
+                  <a:schemeClr val="lt1"/>
+                </a:fontRef>
+              </p:style>
+              <p:txBody>
+                <a:bodyPr rtlCol="0" anchor="ctr"/>
+                <a:lstStyle/>
+                <a:p>
+                  <a:pPr algn="ctr"/>
+                  <a:endParaRPr lang="es-ES"/>
+                </a:p>
+              </p:txBody>
+            </p:sp>
+            <p:sp>
+              <p:nvSpPr>
+                <p:cNvPr id="19" name="Elipse 18">
+                  <a:extLst>
+                    <a:ext uri="{FF2B5EF4-FFF2-40B4-BE49-F238E27FC236}">
+                      <a16:creationId xmlns:a16="http://schemas.microsoft.com/office/drawing/2014/main" id="{09443C39-01B2-8BE9-3E60-20C83BC1CB80}"/>
+                    </a:ext>
+                  </a:extLst>
+                </p:cNvPr>
+                <p:cNvSpPr/>
+                <p:nvPr/>
+              </p:nvSpPr>
+              <p:spPr>
+                <a:xfrm>
+                  <a:off x="2100116" y="1305718"/>
+                  <a:ext cx="644427" cy="211459"/>
+                </a:xfrm>
+                <a:prstGeom prst="ellipse">
+                  <a:avLst/>
+                </a:prstGeom>
+                <a:solidFill>
+                  <a:schemeClr val="bg1"/>
+                </a:solidFill>
+              </p:spPr>
+              <p:style>
+                <a:lnRef idx="2">
+                  <a:schemeClr val="accent1">
+                    <a:shade val="15000"/>
+                  </a:schemeClr>
+                </a:lnRef>
+                <a:fillRef idx="1">
+                  <a:schemeClr val="accent1"/>
+                </a:fillRef>
+                <a:effectRef idx="0">
+                  <a:schemeClr val="accent1"/>
+                </a:effectRef>
+                <a:fontRef idx="minor">
+                  <a:schemeClr val="lt1"/>
+                </a:fontRef>
+              </p:style>
+              <p:txBody>
+                <a:bodyPr rtlCol="0" anchor="ctr"/>
+                <a:lstStyle/>
+                <a:p>
+                  <a:pPr algn="ctr"/>
+                  <a:endParaRPr lang="es-ES"/>
+                </a:p>
+              </p:txBody>
+            </p:sp>
+            <p:sp>
+              <p:nvSpPr>
+                <p:cNvPr id="20" name="Rectángulo 19">
+                  <a:extLst>
+                    <a:ext uri="{FF2B5EF4-FFF2-40B4-BE49-F238E27FC236}">
+                      <a16:creationId xmlns:a16="http://schemas.microsoft.com/office/drawing/2014/main" id="{264E60FD-C8DF-5D0B-29E4-84A1AAC7D321}"/>
+                    </a:ext>
+                  </a:extLst>
+                </p:cNvPr>
+                <p:cNvSpPr/>
+                <p:nvPr/>
+              </p:nvSpPr>
+              <p:spPr>
+                <a:xfrm>
+                  <a:off x="2100116" y="1639180"/>
+                  <a:ext cx="644427" cy="211459"/>
+                </a:xfrm>
+                <a:prstGeom prst="rect">
+                  <a:avLst/>
+                </a:prstGeom>
+                <a:solidFill>
+                  <a:schemeClr val="bg1"/>
+                </a:solidFill>
+              </p:spPr>
+              <p:style>
+                <a:lnRef idx="2">
+                  <a:schemeClr val="accent1">
+                    <a:shade val="15000"/>
+                  </a:schemeClr>
+                </a:lnRef>
+                <a:fillRef idx="1">
+                  <a:schemeClr val="accent1"/>
+                </a:fillRef>
+                <a:effectRef idx="0">
+                  <a:schemeClr val="accent1"/>
+                </a:effectRef>
+                <a:fontRef idx="minor">
+                  <a:schemeClr val="lt1"/>
+                </a:fontRef>
+              </p:style>
+              <p:txBody>
+                <a:bodyPr rtlCol="0" anchor="ctr"/>
+                <a:lstStyle/>
+                <a:p>
+                  <a:pPr algn="ctr"/>
+                  <a:endParaRPr lang="es-ES"/>
+                </a:p>
+              </p:txBody>
+            </p:sp>
+            <p:sp>
+              <p:nvSpPr>
+                <p:cNvPr id="21" name="Rectángulo 20">
+                  <a:extLst>
+                    <a:ext uri="{FF2B5EF4-FFF2-40B4-BE49-F238E27FC236}">
+                      <a16:creationId xmlns:a16="http://schemas.microsoft.com/office/drawing/2014/main" id="{BC074D6B-1E0B-C55B-9BB4-C572932FE065}"/>
+                    </a:ext>
+                  </a:extLst>
+                </p:cNvPr>
+                <p:cNvSpPr/>
+                <p:nvPr/>
+              </p:nvSpPr>
+              <p:spPr>
+                <a:xfrm>
+                  <a:off x="2100116" y="1972642"/>
+                  <a:ext cx="644427" cy="211459"/>
+                </a:xfrm>
+                <a:prstGeom prst="rect">
+                  <a:avLst/>
+                </a:prstGeom>
+                <a:solidFill>
+                  <a:schemeClr val="bg1"/>
+                </a:solidFill>
+              </p:spPr>
+              <p:style>
+                <a:lnRef idx="2">
+                  <a:schemeClr val="accent1">
+                    <a:shade val="15000"/>
+                  </a:schemeClr>
+                </a:lnRef>
+                <a:fillRef idx="1">
+                  <a:schemeClr val="accent1"/>
+                </a:fillRef>
+                <a:effectRef idx="0">
+                  <a:schemeClr val="accent1"/>
+                </a:effectRef>
+                <a:fontRef idx="minor">
+                  <a:schemeClr val="lt1"/>
+                </a:fontRef>
+              </p:style>
+              <p:txBody>
+                <a:bodyPr rtlCol="0" anchor="ctr"/>
+                <a:lstStyle/>
+                <a:p>
+                  <a:pPr algn="ctr"/>
+                  <a:endParaRPr lang="es-ES"/>
+                </a:p>
+              </p:txBody>
+            </p:sp>
+          </p:grpSp>
+          <p:sp>
+            <p:nvSpPr>
+              <p:cNvPr id="17" name="CuadroTexto 16">
+                <a:extLst>
+                  <a:ext uri="{FF2B5EF4-FFF2-40B4-BE49-F238E27FC236}">
+                    <a16:creationId xmlns:a16="http://schemas.microsoft.com/office/drawing/2014/main" id="{2B427048-FD0F-8ED3-7FD2-1F83426CCD0C}"/>
+                  </a:ext>
+                </a:extLst>
+              </p:cNvPr>
+              <p:cNvSpPr txBox="1"/>
+              <p:nvPr/>
+            </p:nvSpPr>
+            <p:spPr>
+              <a:xfrm>
+                <a:off x="789601" y="2210881"/>
+                <a:ext cx="3802579" cy="1815882"/>
+              </a:xfrm>
+              <a:prstGeom prst="rect">
+                <a:avLst/>
+              </a:prstGeom>
+              <a:noFill/>
+            </p:spPr>
+            <p:txBody>
+              <a:bodyPr wrap="none" rtlCol="0">
+                <a:spAutoFit/>
+              </a:bodyPr>
+              <a:lstStyle/>
+              <a:p>
+                <a:pPr algn="ctr"/>
+                <a:r>
+                  <a:rPr lang="es-ES" sz="1400" b="1" dirty="0" err="1">
+                    <a:latin typeface="+mj-lt"/>
+                  </a:rPr>
+                  <a:t>core</a:t>
+                </a:r>
+                <a:r>
+                  <a:rPr lang="es-ES" sz="1400" b="1" dirty="0">
+                    <a:latin typeface="+mj-lt"/>
+                  </a:rPr>
+                  <a:t>/properties.xsl</a:t>
+                </a:r>
+              </a:p>
+              <a:p>
+                <a:pPr algn="ctr"/>
+                <a:r>
+                  <a:rPr lang="es-ES" sz="1400" dirty="0" err="1">
+                    <a:latin typeface="+mj-lt"/>
+                  </a:rPr>
+                  <a:t>traceProperty</a:t>
+                </a:r>
+                <a:r>
+                  <a:rPr lang="es-ES" sz="1400" dirty="0">
+                    <a:latin typeface="+mj-lt"/>
+                  </a:rPr>
+                  <a:t> (genera &lt;</a:t>
+                </a:r>
+                <a:r>
+                  <a:rPr lang="es-ES" sz="1400" dirty="0" err="1">
+                    <a:latin typeface="+mj-lt"/>
+                  </a:rPr>
+                  <a:t>ul</a:t>
+                </a:r>
+                <a:r>
+                  <a:rPr lang="es-ES" sz="1400" dirty="0">
+                    <a:latin typeface="+mj-lt"/>
+                  </a:rPr>
+                  <a:t>&gt;)</a:t>
+                </a:r>
+              </a:p>
+              <a:p>
+                <a:pPr algn="ctr"/>
+                <a:r>
+                  <a:rPr lang="es-ES" sz="1400" dirty="0" err="1">
+                    <a:latin typeface="+mj-lt"/>
+                  </a:rPr>
+                  <a:t>traceProperty</a:t>
+                </a:r>
+                <a:r>
+                  <a:rPr lang="es-ES" sz="1400" dirty="0">
+                    <a:latin typeface="+mj-lt"/>
+                  </a:rPr>
+                  <a:t> </a:t>
+                </a:r>
+                <a:r>
+                  <a:rPr lang="es-ES" sz="1400" dirty="0" err="1">
+                    <a:latin typeface="+mj-lt"/>
+                  </a:rPr>
+                  <a:t>mode</a:t>
+                </a:r>
+                <a:r>
+                  <a:rPr lang="es-ES" sz="1400" dirty="0">
+                    <a:latin typeface="+mj-lt"/>
+                  </a:rPr>
+                  <a:t>=“</a:t>
+                </a:r>
+                <a:r>
+                  <a:rPr lang="es-ES" sz="1400" dirty="0" err="1">
+                    <a:latin typeface="+mj-lt"/>
+                  </a:rPr>
+                  <a:t>paragraph</a:t>
+                </a:r>
+                <a:r>
+                  <a:rPr lang="es-ES" sz="1400" dirty="0">
+                    <a:latin typeface="+mj-lt"/>
+                  </a:rPr>
+                  <a:t>” (genera &lt;p&gt;&lt;a&gt;)</a:t>
+                </a:r>
+              </a:p>
+              <a:p>
+                <a:pPr algn="ctr"/>
+                <a:r>
+                  <a:rPr lang="es-ES" sz="1400" dirty="0" err="1">
+                    <a:latin typeface="+mj-lt"/>
+                  </a:rPr>
+                  <a:t>markdownProperty</a:t>
+                </a:r>
+                <a:r>
+                  <a:rPr lang="es-ES" sz="1400" dirty="0">
+                    <a:latin typeface="+mj-lt"/>
+                  </a:rPr>
+                  <a:t> (llama a </a:t>
+                </a:r>
+                <a:r>
+                  <a:rPr lang="es-ES" sz="1400" dirty="0" err="1">
+                    <a:latin typeface="+mj-lt"/>
+                  </a:rPr>
+                  <a:t>generate_markdown</a:t>
+                </a:r>
+                <a:r>
+                  <a:rPr lang="es-ES" sz="1400" dirty="0">
+                    <a:latin typeface="+mj-lt"/>
+                  </a:rPr>
+                  <a:t>)</a:t>
+                </a:r>
+              </a:p>
+              <a:p>
+                <a:pPr algn="ctr"/>
+                <a:r>
+                  <a:rPr lang="es-ES" sz="1400" dirty="0" err="1">
+                    <a:latin typeface="+mj-lt"/>
+                  </a:rPr>
+                  <a:t>urlProperty</a:t>
+                </a:r>
+                <a:endParaRPr lang="es-ES" sz="1400" dirty="0">
+                  <a:latin typeface="+mj-lt"/>
+                </a:endParaRPr>
+              </a:p>
+              <a:p>
+                <a:pPr algn="ctr"/>
+                <a:r>
+                  <a:rPr lang="es-ES" sz="1400" dirty="0" err="1">
+                    <a:latin typeface="+mj-lt"/>
+                  </a:rPr>
+                  <a:t>enumProperty</a:t>
+                </a:r>
+                <a:endParaRPr lang="es-ES" sz="1400" dirty="0">
+                  <a:latin typeface="+mj-lt"/>
+                </a:endParaRPr>
+              </a:p>
+              <a:p>
+                <a:pPr algn="ctr"/>
+                <a:r>
+                  <a:rPr lang="es-ES" sz="1400" dirty="0" err="1">
+                    <a:latin typeface="+mj-lt"/>
+                  </a:rPr>
+                  <a:t>fileProperty</a:t>
+                </a:r>
+                <a:endParaRPr lang="es-ES" sz="1400" dirty="0">
+                  <a:latin typeface="+mj-lt"/>
+                </a:endParaRPr>
+              </a:p>
+              <a:p>
+                <a:pPr algn="ctr"/>
+                <a:r>
+                  <a:rPr lang="es-ES" sz="1400" dirty="0" err="1">
+                    <a:latin typeface="+mj-lt"/>
+                  </a:rPr>
+                  <a:t>traceTypeListProperty</a:t>
+                </a:r>
+                <a:r>
+                  <a:rPr lang="es-ES" sz="1400" dirty="0">
+                    <a:latin typeface="+mj-lt"/>
+                  </a:rPr>
+                  <a:t> (¿dónde se usa?)</a:t>
+                </a:r>
+              </a:p>
+            </p:txBody>
+          </p:sp>
+        </p:grpSp>
+      </p:grpSp>
+      <p:grpSp>
+        <p:nvGrpSpPr>
+          <p:cNvPr id="22" name="Grupo 21">
+            <a:extLst>
+              <a:ext uri="{FF2B5EF4-FFF2-40B4-BE49-F238E27FC236}">
+                <a16:creationId xmlns:a16="http://schemas.microsoft.com/office/drawing/2014/main" id="{78865189-EDDC-0799-325F-6C1E2C8C0B4A}"/>
+              </a:ext>
+            </a:extLst>
+          </p:cNvPr>
+          <p:cNvGrpSpPr/>
+          <p:nvPr/>
+        </p:nvGrpSpPr>
+        <p:grpSpPr>
+          <a:xfrm>
+            <a:off x="8649370" y="495878"/>
+            <a:ext cx="2398990" cy="2516713"/>
+            <a:chOff x="4896515" y="3311364"/>
+            <a:chExt cx="2398990" cy="2516713"/>
+          </a:xfrm>
+        </p:grpSpPr>
+        <p:sp>
+          <p:nvSpPr>
+            <p:cNvPr id="23" name="Rectángulo 22">
+              <a:extLst>
+                <a:ext uri="{FF2B5EF4-FFF2-40B4-BE49-F238E27FC236}">
+                  <a16:creationId xmlns:a16="http://schemas.microsoft.com/office/drawing/2014/main" id="{3498B900-5448-8764-40C1-6D7713223045}"/>
+                </a:ext>
+              </a:extLst>
+            </p:cNvPr>
+            <p:cNvSpPr/>
+            <p:nvPr/>
+          </p:nvSpPr>
+          <p:spPr>
+            <a:xfrm>
+              <a:off x="6164551" y="3311364"/>
+              <a:ext cx="627126" cy="882387"/>
+            </a:xfrm>
+            <a:prstGeom prst="rect">
+              <a:avLst/>
+            </a:prstGeom>
+            <a:solidFill>
+              <a:schemeClr val="bg2">
+                <a:lumMod val="90000"/>
+              </a:schemeClr>
+            </a:solidFill>
+          </p:spPr>
+          <p:style>
+            <a:lnRef idx="2">
+              <a:schemeClr val="accent1">
+                <a:shade val="15000"/>
+              </a:schemeClr>
+            </a:lnRef>
+            <a:fillRef idx="1">
+              <a:schemeClr val="accent1"/>
+            </a:fillRef>
+            <a:effectRef idx="0">
+              <a:schemeClr val="accent1"/>
+            </a:effectRef>
+            <a:fontRef idx="minor">
+              <a:schemeClr val="lt1"/>
+            </a:fontRef>
+          </p:style>
+          <p:txBody>
+            <a:bodyPr rtlCol="0" anchor="ctr"/>
+            <a:lstStyle/>
+            <a:p>
+              <a:pPr algn="ctr"/>
+              <a:endParaRPr lang="es-ES" dirty="0"/>
+            </a:p>
+          </p:txBody>
+        </p:sp>
+        <p:sp>
+          <p:nvSpPr>
+            <p:cNvPr id="24" name="Rectángulo 23">
+              <a:extLst>
+                <a:ext uri="{FF2B5EF4-FFF2-40B4-BE49-F238E27FC236}">
+                  <a16:creationId xmlns:a16="http://schemas.microsoft.com/office/drawing/2014/main" id="{32EE47B3-1655-71B0-F6C1-3B93E028051D}"/>
+                </a:ext>
+              </a:extLst>
+            </p:cNvPr>
+            <p:cNvSpPr/>
+            <p:nvPr/>
+          </p:nvSpPr>
+          <p:spPr>
+            <a:xfrm>
+              <a:off x="6017856" y="3425738"/>
+              <a:ext cx="627126" cy="882387"/>
+            </a:xfrm>
+            <a:prstGeom prst="rect">
+              <a:avLst/>
+            </a:prstGeom>
+            <a:solidFill>
+              <a:schemeClr val="bg2">
+                <a:lumMod val="90000"/>
+              </a:schemeClr>
+            </a:solidFill>
+          </p:spPr>
+          <p:style>
+            <a:lnRef idx="2">
+              <a:schemeClr val="accent1">
+                <a:shade val="15000"/>
+              </a:schemeClr>
+            </a:lnRef>
+            <a:fillRef idx="1">
+              <a:schemeClr val="accent1"/>
+            </a:fillRef>
+            <a:effectRef idx="0">
+              <a:schemeClr val="accent1"/>
+            </a:effectRef>
+            <a:fontRef idx="minor">
+              <a:schemeClr val="lt1"/>
+            </a:fontRef>
+          </p:style>
+          <p:txBody>
+            <a:bodyPr rtlCol="0" anchor="ctr"/>
+            <a:lstStyle/>
+            <a:p>
+              <a:pPr algn="ctr"/>
+              <a:endParaRPr lang="es-ES" dirty="0"/>
+            </a:p>
+          </p:txBody>
+        </p:sp>
+        <p:grpSp>
+          <p:nvGrpSpPr>
+            <p:cNvPr id="25" name="Grupo 24">
+              <a:extLst>
+                <a:ext uri="{FF2B5EF4-FFF2-40B4-BE49-F238E27FC236}">
+                  <a16:creationId xmlns:a16="http://schemas.microsoft.com/office/drawing/2014/main" id="{7A3FE8F8-C012-819C-457B-466B4BFC2291}"/>
+                </a:ext>
+              </a:extLst>
+            </p:cNvPr>
+            <p:cNvGrpSpPr/>
+            <p:nvPr/>
+          </p:nvGrpSpPr>
+          <p:grpSpPr>
+            <a:xfrm>
+              <a:off x="4896515" y="3540112"/>
+              <a:ext cx="2398990" cy="2287965"/>
+              <a:chOff x="1491395" y="1307911"/>
+              <a:chExt cx="2398990" cy="2287965"/>
+            </a:xfrm>
+          </p:grpSpPr>
+          <p:grpSp>
+            <p:nvGrpSpPr>
+              <p:cNvPr id="26" name="Grupo 25">
+                <a:extLst>
+                  <a:ext uri="{FF2B5EF4-FFF2-40B4-BE49-F238E27FC236}">
+                    <a16:creationId xmlns:a16="http://schemas.microsoft.com/office/drawing/2014/main" id="{F22CBD1F-D17D-577D-555C-70AB7387C6DE}"/>
+                  </a:ext>
+                </a:extLst>
+              </p:cNvPr>
+              <p:cNvGrpSpPr/>
+              <p:nvPr/>
+            </p:nvGrpSpPr>
+            <p:grpSpPr>
+              <a:xfrm>
+                <a:off x="2288562" y="1307911"/>
+                <a:ext cx="804605" cy="882387"/>
+                <a:chOff x="2100116" y="1161875"/>
+                <a:chExt cx="1070929" cy="1174458"/>
+              </a:xfrm>
+            </p:grpSpPr>
+            <p:sp>
+              <p:nvSpPr>
+                <p:cNvPr id="28" name="Rectángulo 27">
+                  <a:extLst>
+                    <a:ext uri="{FF2B5EF4-FFF2-40B4-BE49-F238E27FC236}">
+                      <a16:creationId xmlns:a16="http://schemas.microsoft.com/office/drawing/2014/main" id="{E11B37D2-D291-18D2-10FD-1F12A433D948}"/>
+                    </a:ext>
+                  </a:extLst>
+                </p:cNvPr>
+                <p:cNvSpPr/>
+                <p:nvPr/>
+              </p:nvSpPr>
+              <p:spPr>
+                <a:xfrm>
+                  <a:off x="2336341" y="1161875"/>
+                  <a:ext cx="834704" cy="1174458"/>
+                </a:xfrm>
+                <a:prstGeom prst="rect">
+                  <a:avLst/>
+                </a:prstGeom>
+                <a:solidFill>
+                  <a:schemeClr val="bg2">
+                    <a:lumMod val="90000"/>
+                  </a:schemeClr>
+                </a:solidFill>
+              </p:spPr>
+              <p:style>
+                <a:lnRef idx="2">
+                  <a:schemeClr val="accent1">
+                    <a:shade val="15000"/>
+                  </a:schemeClr>
+                </a:lnRef>
+                <a:fillRef idx="1">
+                  <a:schemeClr val="accent1"/>
+                </a:fillRef>
+                <a:effectRef idx="0">
+                  <a:schemeClr val="accent1"/>
+                </a:effectRef>
+                <a:fontRef idx="minor">
+                  <a:schemeClr val="lt1"/>
+                </a:fontRef>
+              </p:style>
+              <p:txBody>
+                <a:bodyPr rtlCol="0" anchor="ctr"/>
+                <a:lstStyle/>
+                <a:p>
+                  <a:pPr algn="ctr"/>
+                  <a:endParaRPr lang="es-ES"/>
+                </a:p>
+              </p:txBody>
+            </p:sp>
+            <p:sp>
+              <p:nvSpPr>
+                <p:cNvPr id="29" name="Elipse 28">
+                  <a:extLst>
+                    <a:ext uri="{FF2B5EF4-FFF2-40B4-BE49-F238E27FC236}">
+                      <a16:creationId xmlns:a16="http://schemas.microsoft.com/office/drawing/2014/main" id="{9DE7B7EA-F573-1F72-9D51-BFAC13C5DC65}"/>
+                    </a:ext>
+                  </a:extLst>
+                </p:cNvPr>
+                <p:cNvSpPr/>
+                <p:nvPr/>
+              </p:nvSpPr>
+              <p:spPr>
+                <a:xfrm>
+                  <a:off x="2100116" y="1305718"/>
+                  <a:ext cx="644427" cy="211459"/>
+                </a:xfrm>
+                <a:prstGeom prst="ellipse">
+                  <a:avLst/>
+                </a:prstGeom>
+                <a:solidFill>
+                  <a:schemeClr val="bg1"/>
+                </a:solidFill>
+              </p:spPr>
+              <p:style>
+                <a:lnRef idx="2">
+                  <a:schemeClr val="accent1">
+                    <a:shade val="15000"/>
+                  </a:schemeClr>
+                </a:lnRef>
+                <a:fillRef idx="1">
+                  <a:schemeClr val="accent1"/>
+                </a:fillRef>
+                <a:effectRef idx="0">
+                  <a:schemeClr val="accent1"/>
+                </a:effectRef>
+                <a:fontRef idx="minor">
+                  <a:schemeClr val="lt1"/>
+                </a:fontRef>
+              </p:style>
+              <p:txBody>
+                <a:bodyPr rtlCol="0" anchor="ctr"/>
+                <a:lstStyle/>
+                <a:p>
+                  <a:pPr algn="ctr"/>
+                  <a:endParaRPr lang="es-ES"/>
+                </a:p>
+              </p:txBody>
+            </p:sp>
+            <p:sp>
+              <p:nvSpPr>
+                <p:cNvPr id="30" name="Rectángulo 29">
+                  <a:extLst>
+                    <a:ext uri="{FF2B5EF4-FFF2-40B4-BE49-F238E27FC236}">
+                      <a16:creationId xmlns:a16="http://schemas.microsoft.com/office/drawing/2014/main" id="{9B5BB0E3-F299-6C52-9863-68B59ECD3014}"/>
+                    </a:ext>
+                  </a:extLst>
+                </p:cNvPr>
+                <p:cNvSpPr/>
+                <p:nvPr/>
+              </p:nvSpPr>
+              <p:spPr>
+                <a:xfrm>
+                  <a:off x="2100116" y="1639180"/>
+                  <a:ext cx="644427" cy="211459"/>
+                </a:xfrm>
+                <a:prstGeom prst="rect">
+                  <a:avLst/>
+                </a:prstGeom>
+                <a:solidFill>
+                  <a:schemeClr val="bg1"/>
+                </a:solidFill>
+              </p:spPr>
+              <p:style>
+                <a:lnRef idx="2">
+                  <a:schemeClr val="accent1">
+                    <a:shade val="15000"/>
+                  </a:schemeClr>
+                </a:lnRef>
+                <a:fillRef idx="1">
+                  <a:schemeClr val="accent1"/>
+                </a:fillRef>
+                <a:effectRef idx="0">
+                  <a:schemeClr val="accent1"/>
+                </a:effectRef>
+                <a:fontRef idx="minor">
+                  <a:schemeClr val="lt1"/>
+                </a:fontRef>
+              </p:style>
+              <p:txBody>
+                <a:bodyPr rtlCol="0" anchor="ctr"/>
+                <a:lstStyle/>
+                <a:p>
+                  <a:pPr algn="ctr"/>
+                  <a:endParaRPr lang="es-ES"/>
+                </a:p>
+              </p:txBody>
+            </p:sp>
+            <p:sp>
+              <p:nvSpPr>
+                <p:cNvPr id="31" name="Rectángulo 30">
+                  <a:extLst>
+                    <a:ext uri="{FF2B5EF4-FFF2-40B4-BE49-F238E27FC236}">
+                      <a16:creationId xmlns:a16="http://schemas.microsoft.com/office/drawing/2014/main" id="{82992725-54C0-012B-A7FF-DFD1978AA737}"/>
+                    </a:ext>
+                  </a:extLst>
+                </p:cNvPr>
+                <p:cNvSpPr/>
+                <p:nvPr/>
+              </p:nvSpPr>
+              <p:spPr>
+                <a:xfrm>
+                  <a:off x="2100116" y="1972642"/>
+                  <a:ext cx="644427" cy="211459"/>
+                </a:xfrm>
+                <a:prstGeom prst="rect">
+                  <a:avLst/>
+                </a:prstGeom>
+                <a:solidFill>
+                  <a:schemeClr val="bg1"/>
+                </a:solidFill>
+              </p:spPr>
+              <p:style>
+                <a:lnRef idx="2">
+                  <a:schemeClr val="accent1">
+                    <a:shade val="15000"/>
+                  </a:schemeClr>
+                </a:lnRef>
+                <a:fillRef idx="1">
+                  <a:schemeClr val="accent1"/>
+                </a:fillRef>
+                <a:effectRef idx="0">
+                  <a:schemeClr val="accent1"/>
+                </a:effectRef>
+                <a:fontRef idx="minor">
+                  <a:schemeClr val="lt1"/>
+                </a:fontRef>
+              </p:style>
+              <p:txBody>
+                <a:bodyPr rtlCol="0" anchor="ctr"/>
+                <a:lstStyle/>
+                <a:p>
+                  <a:pPr algn="ctr"/>
+                  <a:endParaRPr lang="es-ES"/>
+                </a:p>
+              </p:txBody>
+            </p:sp>
+          </p:grpSp>
+          <p:sp>
+            <p:nvSpPr>
+              <p:cNvPr id="27" name="CuadroTexto 26">
+                <a:extLst>
+                  <a:ext uri="{FF2B5EF4-FFF2-40B4-BE49-F238E27FC236}">
+                    <a16:creationId xmlns:a16="http://schemas.microsoft.com/office/drawing/2014/main" id="{3F9DED3D-70C3-4961-F332-0631A7F59BA2}"/>
+                  </a:ext>
+                </a:extLst>
+              </p:cNvPr>
+              <p:cNvSpPr txBox="1"/>
+              <p:nvPr/>
+            </p:nvSpPr>
+            <p:spPr>
+              <a:xfrm>
+                <a:off x="1491395" y="2210881"/>
+                <a:ext cx="2398990" cy="1384995"/>
+              </a:xfrm>
+              <a:prstGeom prst="rect">
+                <a:avLst/>
+              </a:prstGeom>
+              <a:noFill/>
+            </p:spPr>
+            <p:txBody>
+              <a:bodyPr wrap="none" rtlCol="0">
+                <a:spAutoFit/>
+              </a:bodyPr>
+              <a:lstStyle/>
+              <a:p>
+                <a:pPr algn="ctr"/>
+                <a:r>
+                  <a:rPr lang="es-ES" sz="1400" b="1" dirty="0" err="1">
+                    <a:latin typeface="+mj-lt"/>
+                  </a:rPr>
+                  <a:t>core</a:t>
+                </a:r>
+                <a:r>
+                  <a:rPr lang="es-ES" sz="1400" b="1" dirty="0">
+                    <a:latin typeface="+mj-lt"/>
+                  </a:rPr>
+                  <a:t>/document.xsl</a:t>
+                </a:r>
+              </a:p>
+              <a:p>
+                <a:pPr algn="ctr"/>
+                <a:r>
+                  <a:rPr lang="es-ES" sz="1400" dirty="0">
+                    <a:latin typeface="+mj-lt"/>
+                  </a:rPr>
+                  <a:t>match con :Proteus-</a:t>
+                </a:r>
+                <a:r>
+                  <a:rPr lang="es-ES" sz="1400" dirty="0" err="1">
+                    <a:latin typeface="+mj-lt"/>
+                  </a:rPr>
+                  <a:t>document</a:t>
+                </a:r>
+                <a:endParaRPr lang="es-ES" sz="1400" dirty="0">
+                  <a:latin typeface="+mj-lt"/>
+                </a:endParaRPr>
+              </a:p>
+              <a:p>
+                <a:pPr algn="ctr"/>
+                <a:r>
+                  <a:rPr lang="es-ES" sz="1400" dirty="0">
+                    <a:latin typeface="+mj-lt"/>
+                  </a:rPr>
+                  <a:t>Llama a </a:t>
+                </a:r>
+                <a:r>
+                  <a:rPr lang="es-ES" sz="1400" dirty="0" err="1">
+                    <a:latin typeface="+mj-lt"/>
+                  </a:rPr>
+                  <a:t>document_cover</a:t>
+                </a:r>
+                <a:endParaRPr lang="es-ES" sz="1400" dirty="0">
+                  <a:latin typeface="+mj-lt"/>
+                </a:endParaRPr>
+              </a:p>
+              <a:p>
+                <a:pPr algn="ctr"/>
+                <a:r>
+                  <a:rPr lang="es-ES" sz="1400" dirty="0">
+                    <a:latin typeface="+mj-lt"/>
+                  </a:rPr>
+                  <a:t>Genera TOC</a:t>
+                </a:r>
+              </a:p>
+              <a:p>
+                <a:pPr algn="ctr"/>
+                <a:r>
+                  <a:rPr lang="es-ES" sz="1400" dirty="0" err="1">
+                    <a:latin typeface="+mj-lt"/>
+                  </a:rPr>
+                  <a:t>Apply</a:t>
+                </a:r>
+                <a:r>
+                  <a:rPr lang="es-ES" sz="1400" dirty="0">
+                    <a:latin typeface="+mj-lt"/>
+                  </a:rPr>
+                  <a:t> </a:t>
+                </a:r>
+                <a:r>
+                  <a:rPr lang="es-ES" sz="1400" dirty="0" err="1">
+                    <a:latin typeface="+mj-lt"/>
+                  </a:rPr>
+                  <a:t>templates</a:t>
+                </a:r>
+                <a:r>
+                  <a:rPr lang="es-ES" sz="1400" dirty="0">
+                    <a:latin typeface="+mj-lt"/>
+                  </a:rPr>
+                  <a:t> a los </a:t>
+                </a:r>
+                <a:r>
+                  <a:rPr lang="es-ES" sz="1400" dirty="0" err="1">
+                    <a:latin typeface="+mj-lt"/>
+                  </a:rPr>
+                  <a:t>children</a:t>
+                </a:r>
+                <a:endParaRPr lang="es-ES" sz="1400" dirty="0">
+                  <a:latin typeface="+mj-lt"/>
+                </a:endParaRPr>
+              </a:p>
+              <a:p>
+                <a:pPr algn="ctr"/>
+                <a:r>
+                  <a:rPr lang="es-ES" sz="1400" dirty="0">
+                    <a:latin typeface="+mj-lt"/>
+                  </a:rPr>
+                  <a:t>Conecta con Qt</a:t>
+                </a:r>
+              </a:p>
+            </p:txBody>
+          </p:sp>
+        </p:grpSp>
+      </p:grpSp>
+      <p:grpSp>
+        <p:nvGrpSpPr>
+          <p:cNvPr id="32" name="Grupo 31">
+            <a:extLst>
+              <a:ext uri="{FF2B5EF4-FFF2-40B4-BE49-F238E27FC236}">
+                <a16:creationId xmlns:a16="http://schemas.microsoft.com/office/drawing/2014/main" id="{F7BAE703-AEA9-F983-0DD8-92BADEDEDE59}"/>
+              </a:ext>
+            </a:extLst>
+          </p:cNvPr>
+          <p:cNvGrpSpPr/>
+          <p:nvPr/>
+        </p:nvGrpSpPr>
+        <p:grpSpPr>
+          <a:xfrm>
+            <a:off x="8970808" y="3510839"/>
+            <a:ext cx="1933542" cy="2947600"/>
+            <a:chOff x="5129239" y="3311364"/>
+            <a:chExt cx="1933542" cy="2947600"/>
+          </a:xfrm>
+        </p:grpSpPr>
+        <p:sp>
+          <p:nvSpPr>
+            <p:cNvPr id="33" name="Rectángulo 32">
+              <a:extLst>
+                <a:ext uri="{FF2B5EF4-FFF2-40B4-BE49-F238E27FC236}">
+                  <a16:creationId xmlns:a16="http://schemas.microsoft.com/office/drawing/2014/main" id="{536381CC-4E1B-A465-2118-CA218DB15C4B}"/>
+                </a:ext>
+              </a:extLst>
+            </p:cNvPr>
+            <p:cNvSpPr/>
+            <p:nvPr/>
+          </p:nvSpPr>
+          <p:spPr>
+            <a:xfrm>
+              <a:off x="6164551" y="3311364"/>
+              <a:ext cx="627126" cy="882387"/>
+            </a:xfrm>
+            <a:prstGeom prst="rect">
+              <a:avLst/>
+            </a:prstGeom>
+            <a:solidFill>
+              <a:schemeClr val="bg2">
+                <a:lumMod val="90000"/>
+              </a:schemeClr>
+            </a:solidFill>
+          </p:spPr>
+          <p:style>
+            <a:lnRef idx="2">
+              <a:schemeClr val="accent1">
+                <a:shade val="15000"/>
+              </a:schemeClr>
+            </a:lnRef>
+            <a:fillRef idx="1">
+              <a:schemeClr val="accent1"/>
+            </a:fillRef>
+            <a:effectRef idx="0">
+              <a:schemeClr val="accent1"/>
+            </a:effectRef>
+            <a:fontRef idx="minor">
+              <a:schemeClr val="lt1"/>
+            </a:fontRef>
+          </p:style>
+          <p:txBody>
+            <a:bodyPr rtlCol="0" anchor="ctr"/>
+            <a:lstStyle/>
+            <a:p>
+              <a:pPr algn="ctr"/>
+              <a:endParaRPr lang="es-ES" dirty="0"/>
+            </a:p>
+          </p:txBody>
+        </p:sp>
+        <p:sp>
+          <p:nvSpPr>
+            <p:cNvPr id="34" name="Rectángulo 33">
+              <a:extLst>
+                <a:ext uri="{FF2B5EF4-FFF2-40B4-BE49-F238E27FC236}">
+                  <a16:creationId xmlns:a16="http://schemas.microsoft.com/office/drawing/2014/main" id="{59E51134-4D9F-5AF9-3916-38E8F48D3C26}"/>
+                </a:ext>
+              </a:extLst>
+            </p:cNvPr>
+            <p:cNvSpPr/>
+            <p:nvPr/>
+          </p:nvSpPr>
+          <p:spPr>
+            <a:xfrm>
+              <a:off x="6017856" y="3425738"/>
+              <a:ext cx="627126" cy="882387"/>
+            </a:xfrm>
+            <a:prstGeom prst="rect">
+              <a:avLst/>
+            </a:prstGeom>
+            <a:solidFill>
+              <a:schemeClr val="bg2">
+                <a:lumMod val="90000"/>
+              </a:schemeClr>
+            </a:solidFill>
+          </p:spPr>
+          <p:style>
+            <a:lnRef idx="2">
+              <a:schemeClr val="accent1">
+                <a:shade val="15000"/>
+              </a:schemeClr>
+            </a:lnRef>
+            <a:fillRef idx="1">
+              <a:schemeClr val="accent1"/>
+            </a:fillRef>
+            <a:effectRef idx="0">
+              <a:schemeClr val="accent1"/>
+            </a:effectRef>
+            <a:fontRef idx="minor">
+              <a:schemeClr val="lt1"/>
+            </a:fontRef>
+          </p:style>
+          <p:txBody>
+            <a:bodyPr rtlCol="0" anchor="ctr"/>
+            <a:lstStyle/>
+            <a:p>
+              <a:pPr algn="ctr"/>
+              <a:endParaRPr lang="es-ES" dirty="0"/>
+            </a:p>
+          </p:txBody>
+        </p:sp>
+        <p:grpSp>
+          <p:nvGrpSpPr>
+            <p:cNvPr id="35" name="Grupo 34">
+              <a:extLst>
+                <a:ext uri="{FF2B5EF4-FFF2-40B4-BE49-F238E27FC236}">
+                  <a16:creationId xmlns:a16="http://schemas.microsoft.com/office/drawing/2014/main" id="{4E7D6D3E-91F2-AC14-E52F-9C0FD87D024A}"/>
+                </a:ext>
+              </a:extLst>
+            </p:cNvPr>
+            <p:cNvGrpSpPr/>
+            <p:nvPr/>
+          </p:nvGrpSpPr>
+          <p:grpSpPr>
+            <a:xfrm>
+              <a:off x="5129239" y="3540112"/>
+              <a:ext cx="1933542" cy="2718852"/>
+              <a:chOff x="1724119" y="1307911"/>
+              <a:chExt cx="1933542" cy="2718852"/>
+            </a:xfrm>
+          </p:grpSpPr>
+          <p:grpSp>
+            <p:nvGrpSpPr>
+              <p:cNvPr id="36" name="Grupo 35">
+                <a:extLst>
+                  <a:ext uri="{FF2B5EF4-FFF2-40B4-BE49-F238E27FC236}">
+                    <a16:creationId xmlns:a16="http://schemas.microsoft.com/office/drawing/2014/main" id="{1FA6EA50-7E1D-6E46-F82A-4E204503A2E4}"/>
+                  </a:ext>
+                </a:extLst>
+              </p:cNvPr>
+              <p:cNvGrpSpPr/>
+              <p:nvPr/>
+            </p:nvGrpSpPr>
+            <p:grpSpPr>
+              <a:xfrm>
+                <a:off x="2288562" y="1307911"/>
+                <a:ext cx="804605" cy="882387"/>
+                <a:chOff x="2100116" y="1161875"/>
+                <a:chExt cx="1070929" cy="1174458"/>
+              </a:xfrm>
+            </p:grpSpPr>
+            <p:sp>
+              <p:nvSpPr>
+                <p:cNvPr id="38" name="Rectángulo 37">
+                  <a:extLst>
+                    <a:ext uri="{FF2B5EF4-FFF2-40B4-BE49-F238E27FC236}">
+                      <a16:creationId xmlns:a16="http://schemas.microsoft.com/office/drawing/2014/main" id="{C6A0A516-B677-C70C-A310-CB454F1AC6AE}"/>
+                    </a:ext>
+                  </a:extLst>
+                </p:cNvPr>
+                <p:cNvSpPr/>
+                <p:nvPr/>
+              </p:nvSpPr>
+              <p:spPr>
+                <a:xfrm>
+                  <a:off x="2336341" y="1161875"/>
+                  <a:ext cx="834704" cy="1174458"/>
+                </a:xfrm>
+                <a:prstGeom prst="rect">
+                  <a:avLst/>
+                </a:prstGeom>
+                <a:solidFill>
+                  <a:schemeClr val="bg2">
+                    <a:lumMod val="90000"/>
+                  </a:schemeClr>
+                </a:solidFill>
+              </p:spPr>
+              <p:style>
+                <a:lnRef idx="2">
+                  <a:schemeClr val="accent1">
+                    <a:shade val="15000"/>
+                  </a:schemeClr>
+                </a:lnRef>
+                <a:fillRef idx="1">
+                  <a:schemeClr val="accent1"/>
+                </a:fillRef>
+                <a:effectRef idx="0">
+                  <a:schemeClr val="accent1"/>
+                </a:effectRef>
+                <a:fontRef idx="minor">
+                  <a:schemeClr val="lt1"/>
+                </a:fontRef>
+              </p:style>
+              <p:txBody>
+                <a:bodyPr rtlCol="0" anchor="ctr"/>
+                <a:lstStyle/>
+                <a:p>
+                  <a:pPr algn="ctr"/>
+                  <a:endParaRPr lang="es-ES"/>
+                </a:p>
+              </p:txBody>
+            </p:sp>
+            <p:sp>
+              <p:nvSpPr>
+                <p:cNvPr id="39" name="Elipse 38">
+                  <a:extLst>
+                    <a:ext uri="{FF2B5EF4-FFF2-40B4-BE49-F238E27FC236}">
+                      <a16:creationId xmlns:a16="http://schemas.microsoft.com/office/drawing/2014/main" id="{FD36FD05-D054-9AC3-A2DF-33CCFD42EB86}"/>
+                    </a:ext>
+                  </a:extLst>
+                </p:cNvPr>
+                <p:cNvSpPr/>
+                <p:nvPr/>
+              </p:nvSpPr>
+              <p:spPr>
+                <a:xfrm>
+                  <a:off x="2100116" y="1305718"/>
+                  <a:ext cx="644427" cy="211459"/>
+                </a:xfrm>
+                <a:prstGeom prst="ellipse">
+                  <a:avLst/>
+                </a:prstGeom>
+                <a:solidFill>
+                  <a:schemeClr val="bg1"/>
+                </a:solidFill>
+              </p:spPr>
+              <p:style>
+                <a:lnRef idx="2">
+                  <a:schemeClr val="accent1">
+                    <a:shade val="15000"/>
+                  </a:schemeClr>
+                </a:lnRef>
+                <a:fillRef idx="1">
+                  <a:schemeClr val="accent1"/>
+                </a:fillRef>
+                <a:effectRef idx="0">
+                  <a:schemeClr val="accent1"/>
+                </a:effectRef>
+                <a:fontRef idx="minor">
+                  <a:schemeClr val="lt1"/>
+                </a:fontRef>
+              </p:style>
+              <p:txBody>
+                <a:bodyPr rtlCol="0" anchor="ctr"/>
+                <a:lstStyle/>
+                <a:p>
+                  <a:pPr algn="ctr"/>
+                  <a:endParaRPr lang="es-ES"/>
+                </a:p>
+              </p:txBody>
+            </p:sp>
+            <p:sp>
+              <p:nvSpPr>
+                <p:cNvPr id="40" name="Rectángulo 39">
+                  <a:extLst>
+                    <a:ext uri="{FF2B5EF4-FFF2-40B4-BE49-F238E27FC236}">
+                      <a16:creationId xmlns:a16="http://schemas.microsoft.com/office/drawing/2014/main" id="{1E4A09A5-1828-79DF-9B9F-F8E3A091B499}"/>
+                    </a:ext>
+                  </a:extLst>
+                </p:cNvPr>
+                <p:cNvSpPr/>
+                <p:nvPr/>
+              </p:nvSpPr>
+              <p:spPr>
+                <a:xfrm>
+                  <a:off x="2100116" y="1639180"/>
+                  <a:ext cx="644427" cy="211459"/>
+                </a:xfrm>
+                <a:prstGeom prst="rect">
+                  <a:avLst/>
+                </a:prstGeom>
+                <a:solidFill>
+                  <a:schemeClr val="bg1"/>
+                </a:solidFill>
+              </p:spPr>
+              <p:style>
+                <a:lnRef idx="2">
+                  <a:schemeClr val="accent1">
+                    <a:shade val="15000"/>
+                  </a:schemeClr>
+                </a:lnRef>
+                <a:fillRef idx="1">
+                  <a:schemeClr val="accent1"/>
+                </a:fillRef>
+                <a:effectRef idx="0">
+                  <a:schemeClr val="accent1"/>
+                </a:effectRef>
+                <a:fontRef idx="minor">
+                  <a:schemeClr val="lt1"/>
+                </a:fontRef>
+              </p:style>
+              <p:txBody>
+                <a:bodyPr rtlCol="0" anchor="ctr"/>
+                <a:lstStyle/>
+                <a:p>
+                  <a:pPr algn="ctr"/>
+                  <a:endParaRPr lang="es-ES"/>
+                </a:p>
+              </p:txBody>
+            </p:sp>
+            <p:sp>
+              <p:nvSpPr>
+                <p:cNvPr id="41" name="Rectángulo 40">
+                  <a:extLst>
+                    <a:ext uri="{FF2B5EF4-FFF2-40B4-BE49-F238E27FC236}">
+                      <a16:creationId xmlns:a16="http://schemas.microsoft.com/office/drawing/2014/main" id="{097402D0-BD48-2EBD-A207-710E10C2A986}"/>
+                    </a:ext>
+                  </a:extLst>
+                </p:cNvPr>
+                <p:cNvSpPr/>
+                <p:nvPr/>
+              </p:nvSpPr>
+              <p:spPr>
+                <a:xfrm>
+                  <a:off x="2100116" y="1972642"/>
+                  <a:ext cx="644427" cy="211459"/>
+                </a:xfrm>
+                <a:prstGeom prst="rect">
+                  <a:avLst/>
+                </a:prstGeom>
+                <a:solidFill>
+                  <a:schemeClr val="bg1"/>
+                </a:solidFill>
+              </p:spPr>
+              <p:style>
+                <a:lnRef idx="2">
+                  <a:schemeClr val="accent1">
+                    <a:shade val="15000"/>
+                  </a:schemeClr>
+                </a:lnRef>
+                <a:fillRef idx="1">
+                  <a:schemeClr val="accent1"/>
+                </a:fillRef>
+                <a:effectRef idx="0">
+                  <a:schemeClr val="accent1"/>
+                </a:effectRef>
+                <a:fontRef idx="minor">
+                  <a:schemeClr val="lt1"/>
+                </a:fontRef>
+              </p:style>
+              <p:txBody>
+                <a:bodyPr rtlCol="0" anchor="ctr"/>
+                <a:lstStyle/>
+                <a:p>
+                  <a:pPr algn="ctr"/>
+                  <a:endParaRPr lang="es-ES"/>
+                </a:p>
+              </p:txBody>
+            </p:sp>
+          </p:grpSp>
+          <p:sp>
+            <p:nvSpPr>
+              <p:cNvPr id="37" name="CuadroTexto 36">
+                <a:extLst>
+                  <a:ext uri="{FF2B5EF4-FFF2-40B4-BE49-F238E27FC236}">
+                    <a16:creationId xmlns:a16="http://schemas.microsoft.com/office/drawing/2014/main" id="{47CD6D0F-DEC4-9603-41D6-509E0E798D59}"/>
+                  </a:ext>
+                </a:extLst>
+              </p:cNvPr>
+              <p:cNvSpPr txBox="1"/>
+              <p:nvPr/>
+            </p:nvSpPr>
+            <p:spPr>
+              <a:xfrm>
+                <a:off x="1724119" y="2210881"/>
+                <a:ext cx="1933542" cy="1815882"/>
+              </a:xfrm>
+              <a:prstGeom prst="rect">
+                <a:avLst/>
+              </a:prstGeom>
+              <a:noFill/>
+            </p:spPr>
+            <p:txBody>
+              <a:bodyPr wrap="none" rtlCol="0">
+                <a:spAutoFit/>
+              </a:bodyPr>
+              <a:lstStyle/>
+              <a:p>
+                <a:pPr algn="ctr"/>
+                <a:r>
+                  <a:rPr lang="es-ES" sz="1400" b="1" dirty="0" err="1">
+                    <a:latin typeface="+mj-lt"/>
+                  </a:rPr>
+                  <a:t>core</a:t>
+                </a:r>
+                <a:r>
+                  <a:rPr lang="es-ES" sz="1400" b="1" dirty="0">
+                    <a:latin typeface="+mj-lt"/>
+                  </a:rPr>
+                  <a:t>/cover.xsl</a:t>
+                </a:r>
+              </a:p>
+              <a:p>
+                <a:pPr algn="ctr"/>
+                <a:r>
+                  <a:rPr lang="es-ES" sz="1400" dirty="0">
+                    <a:latin typeface="+mj-lt"/>
+                  </a:rPr>
+                  <a:t>Genera portada con:</a:t>
+                </a:r>
+              </a:p>
+              <a:p>
+                <a:pPr marL="285750" indent="-285750">
+                  <a:buFontTx/>
+                  <a:buChar char="-"/>
+                </a:pPr>
+                <a:r>
+                  <a:rPr lang="es-ES" sz="1400" dirty="0">
+                    <a:latin typeface="+mj-lt"/>
+                  </a:rPr>
+                  <a:t>Logo US</a:t>
+                </a:r>
+              </a:p>
+              <a:p>
+                <a:pPr marL="285750" indent="-285750">
+                  <a:buFontTx/>
+                  <a:buChar char="-"/>
+                </a:pPr>
+                <a:r>
+                  <a:rPr lang="es-ES" sz="1400" dirty="0">
+                    <a:latin typeface="+mj-lt"/>
+                  </a:rPr>
+                  <a:t>Nombre documento</a:t>
+                </a:r>
+              </a:p>
+              <a:p>
+                <a:pPr marL="285750" indent="-285750">
+                  <a:buFontTx/>
+                  <a:buChar char="-"/>
+                </a:pPr>
+                <a:r>
+                  <a:rPr lang="es-ES" sz="1400" dirty="0">
+                    <a:latin typeface="+mj-lt"/>
+                  </a:rPr>
+                  <a:t>Versión documento</a:t>
+                </a:r>
+              </a:p>
+              <a:p>
+                <a:pPr marL="285750" indent="-285750">
+                  <a:buFontTx/>
+                  <a:buChar char="-"/>
+                </a:pPr>
+                <a:r>
+                  <a:rPr lang="es-ES" sz="1400" dirty="0">
+                    <a:latin typeface="+mj-lt"/>
+                  </a:rPr>
+                  <a:t>Fecha documento</a:t>
+                </a:r>
+              </a:p>
+              <a:p>
+                <a:pPr marL="285750" indent="-285750">
+                  <a:buFontTx/>
+                  <a:buChar char="-"/>
+                </a:pPr>
+                <a:r>
+                  <a:rPr lang="es-ES" sz="1400" dirty="0">
+                    <a:latin typeface="+mj-lt"/>
+                  </a:rPr>
+                  <a:t>Preparado para</a:t>
+                </a:r>
+              </a:p>
+              <a:p>
+                <a:pPr marL="285750" indent="-285750">
+                  <a:buFontTx/>
+                  <a:buChar char="-"/>
+                </a:pPr>
+                <a:r>
+                  <a:rPr lang="es-ES" sz="1400" dirty="0">
+                    <a:latin typeface="+mj-lt"/>
+                  </a:rPr>
+                  <a:t>Preparado por</a:t>
+                </a:r>
+              </a:p>
+            </p:txBody>
+          </p:sp>
+        </p:grpSp>
+      </p:grpSp>
     </p:spTree>
     <p:extLst>
       <p:ext uri="{BB962C8B-B14F-4D97-AF65-F5344CB8AC3E}">

--- a/documentation/Refactorización XLST.pptx
+++ b/documentation/Refactorización XLST.pptx
@@ -7,9 +7,10 @@
   <p:sldIdLst>
     <p:sldId id="257" r:id="rId2"/>
     <p:sldId id="258" r:id="rId3"/>
+    <p:sldId id="259" r:id="rId4"/>
   </p:sldIdLst>
   <p:sldSz cx="12192000" cy="6858000"/>
-  <p:notesSz cx="6742113" cy="9875838"/>
+  <p:notesSz cx="6797675" cy="9872663"/>
   <p:defaultTextStyle>
     <a:defPPr>
       <a:defRPr lang="es-ES"/>
@@ -6901,10 +6902,10 @@
         </p:nvGrpSpPr>
         <p:grpSpPr>
           <a:xfrm>
-            <a:off x="538521" y="448408"/>
-            <a:ext cx="3557832" cy="3593931"/>
-            <a:chOff x="4317094" y="3311364"/>
-            <a:chExt cx="3557832" cy="3593931"/>
+            <a:off x="498894" y="448408"/>
+            <a:ext cx="3637086" cy="4024818"/>
+            <a:chOff x="4277467" y="3311364"/>
+            <a:chExt cx="3637086" cy="4024818"/>
           </a:xfrm>
         </p:grpSpPr>
         <p:sp>
@@ -7023,10 +7024,10 @@
           </p:nvGrpSpPr>
           <p:grpSpPr>
             <a:xfrm>
-              <a:off x="4317094" y="3540112"/>
-              <a:ext cx="3557832" cy="3365183"/>
-              <a:chOff x="911974" y="1307911"/>
-              <a:chExt cx="3557832" cy="3365183"/>
+              <a:off x="4277467" y="3540112"/>
+              <a:ext cx="3637086" cy="3796070"/>
+              <a:chOff x="872347" y="1307911"/>
+              <a:chExt cx="3637086" cy="3796070"/>
             </a:xfrm>
           </p:grpSpPr>
           <p:grpSp>
@@ -7262,8 +7263,8 @@
             </p:nvSpPr>
             <p:spPr>
               <a:xfrm>
-                <a:off x="911974" y="2210881"/>
-                <a:ext cx="3557832" cy="2462213"/>
+                <a:off x="872347" y="2210881"/>
+                <a:ext cx="3637086" cy="2893100"/>
               </a:xfrm>
               <a:prstGeom prst="rect">
                 <a:avLst/>
@@ -7423,6 +7424,51 @@
                     <a:latin typeface="+mj-lt"/>
                   </a:rPr>
                   <a:t>generate_priority_rows</a:t>
+                </a:r>
+                <a:endParaRPr lang="es-ES" sz="1400" dirty="0">
+                  <a:latin typeface="+mj-lt"/>
+                </a:endParaRPr>
+              </a:p>
+              <a:p>
+                <a:pPr algn="ctr"/>
+                <a:r>
+                  <a:rPr lang="es-ES" sz="1400" b="1" dirty="0">
+                    <a:latin typeface="+mj-lt"/>
+                  </a:rPr>
+                  <a:t>¿</a:t>
+                </a:r>
+                <a:r>
+                  <a:rPr lang="es-ES" sz="1400" b="1" dirty="0" err="1">
+                    <a:latin typeface="+mj-lt"/>
+                  </a:rPr>
+                  <a:t>generate_markdown</a:t>
+                </a:r>
+                <a:r>
+                  <a:rPr lang="es-ES" sz="1400" b="1" dirty="0">
+                    <a:latin typeface="+mj-lt"/>
+                  </a:rPr>
+                  <a:t> generar &lt;</a:t>
+                </a:r>
+                <a:r>
+                  <a:rPr lang="es-ES" sz="1400" b="1" dirty="0" err="1">
+                    <a:latin typeface="+mj-lt"/>
+                  </a:rPr>
+                  <a:t>div</a:t>
+                </a:r>
+                <a:r>
+                  <a:rPr lang="es-ES" sz="1400" b="1" dirty="0">
+                    <a:latin typeface="+mj-lt"/>
+                  </a:rPr>
+                  <a:t>&gt; o &lt;p&gt;? -&gt;</a:t>
+                </a:r>
+              </a:p>
+              <a:p>
+                <a:pPr algn="ctr"/>
+                <a:r>
+                  <a:rPr lang="es-ES" sz="1400" b="1" dirty="0">
+                    <a:latin typeface="+mj-lt"/>
+                  </a:rPr>
+                  <a:t>No, elimina los &lt;p&gt;…&lt;/p&gt;</a:t>
                 </a:r>
                 <a:endParaRPr lang="es-ES" sz="1400" dirty="0">
                   <a:latin typeface="+mj-lt"/>
@@ -8981,6 +9027,1895 @@
 </p:sld>
 </file>
 
+<file path=ppt/slides/slide3.xml><?xml version="1.0" encoding="utf-8"?>
+<p:sld xmlns:a="http://schemas.openxmlformats.org/drawingml/2006/main" xmlns:r="http://schemas.openxmlformats.org/officeDocument/2006/relationships" xmlns:p="http://schemas.openxmlformats.org/presentationml/2006/main">
+  <p:cSld>
+    <p:spTree>
+      <p:nvGrpSpPr>
+        <p:cNvPr id="1" name="">
+          <a:extLst>
+            <a:ext uri="{FF2B5EF4-FFF2-40B4-BE49-F238E27FC236}">
+              <a16:creationId xmlns:a16="http://schemas.microsoft.com/office/drawing/2014/main" id="{409DFF74-A618-F2AC-EC39-B068D773C13E}"/>
+            </a:ext>
+          </a:extLst>
+        </p:cNvPr>
+        <p:cNvGrpSpPr/>
+        <p:nvPr/>
+      </p:nvGrpSpPr>
+      <p:grpSpPr>
+        <a:xfrm>
+          <a:off x="0" y="0"/>
+          <a:ext cx="0" cy="0"/>
+          <a:chOff x="0" y="0"/>
+          <a:chExt cx="0" cy="0"/>
+        </a:xfrm>
+      </p:grpSpPr>
+      <p:grpSp>
+        <p:nvGrpSpPr>
+          <p:cNvPr id="2" name="Grupo 1">
+            <a:extLst>
+              <a:ext uri="{FF2B5EF4-FFF2-40B4-BE49-F238E27FC236}">
+                <a16:creationId xmlns:a16="http://schemas.microsoft.com/office/drawing/2014/main" id="{307B4B32-7AF9-FB6F-9298-8E9E46C01DE0}"/>
+              </a:ext>
+            </a:extLst>
+          </p:cNvPr>
+          <p:cNvGrpSpPr/>
+          <p:nvPr/>
+        </p:nvGrpSpPr>
+        <p:grpSpPr>
+          <a:xfrm>
+            <a:off x="638312" y="452201"/>
+            <a:ext cx="2568204" cy="2085825"/>
+            <a:chOff x="4811908" y="3311364"/>
+            <a:chExt cx="2568204" cy="2085825"/>
+          </a:xfrm>
+        </p:grpSpPr>
+        <p:sp>
+          <p:nvSpPr>
+            <p:cNvPr id="3" name="Rectángulo 2">
+              <a:extLst>
+                <a:ext uri="{FF2B5EF4-FFF2-40B4-BE49-F238E27FC236}">
+                  <a16:creationId xmlns:a16="http://schemas.microsoft.com/office/drawing/2014/main" id="{599C98D6-0396-FC91-1E2E-B3711FB0479D}"/>
+                </a:ext>
+              </a:extLst>
+            </p:cNvPr>
+            <p:cNvSpPr/>
+            <p:nvPr/>
+          </p:nvSpPr>
+          <p:spPr>
+            <a:xfrm>
+              <a:off x="6164551" y="3311364"/>
+              <a:ext cx="627126" cy="882387"/>
+            </a:xfrm>
+            <a:prstGeom prst="rect">
+              <a:avLst/>
+            </a:prstGeom>
+            <a:solidFill>
+              <a:schemeClr val="bg2">
+                <a:lumMod val="90000"/>
+              </a:schemeClr>
+            </a:solidFill>
+          </p:spPr>
+          <p:style>
+            <a:lnRef idx="2">
+              <a:schemeClr val="accent1">
+                <a:shade val="15000"/>
+              </a:schemeClr>
+            </a:lnRef>
+            <a:fillRef idx="1">
+              <a:schemeClr val="accent1"/>
+            </a:fillRef>
+            <a:effectRef idx="0">
+              <a:schemeClr val="accent1"/>
+            </a:effectRef>
+            <a:fontRef idx="minor">
+              <a:schemeClr val="lt1"/>
+            </a:fontRef>
+          </p:style>
+          <p:txBody>
+            <a:bodyPr rtlCol="0" anchor="ctr"/>
+            <a:lstStyle/>
+            <a:p>
+              <a:pPr algn="ctr"/>
+              <a:endParaRPr lang="es-ES" dirty="0"/>
+            </a:p>
+          </p:txBody>
+        </p:sp>
+        <p:sp>
+          <p:nvSpPr>
+            <p:cNvPr id="4" name="Rectángulo 3">
+              <a:extLst>
+                <a:ext uri="{FF2B5EF4-FFF2-40B4-BE49-F238E27FC236}">
+                  <a16:creationId xmlns:a16="http://schemas.microsoft.com/office/drawing/2014/main" id="{55D01282-2CE4-6A03-9F52-F5335C3C84A6}"/>
+                </a:ext>
+              </a:extLst>
+            </p:cNvPr>
+            <p:cNvSpPr/>
+            <p:nvPr/>
+          </p:nvSpPr>
+          <p:spPr>
+            <a:xfrm>
+              <a:off x="6017856" y="3425738"/>
+              <a:ext cx="627126" cy="882387"/>
+            </a:xfrm>
+            <a:prstGeom prst="rect">
+              <a:avLst/>
+            </a:prstGeom>
+            <a:solidFill>
+              <a:schemeClr val="bg2">
+                <a:lumMod val="90000"/>
+              </a:schemeClr>
+            </a:solidFill>
+          </p:spPr>
+          <p:style>
+            <a:lnRef idx="2">
+              <a:schemeClr val="accent1">
+                <a:shade val="15000"/>
+              </a:schemeClr>
+            </a:lnRef>
+            <a:fillRef idx="1">
+              <a:schemeClr val="accent1"/>
+            </a:fillRef>
+            <a:effectRef idx="0">
+              <a:schemeClr val="accent1"/>
+            </a:effectRef>
+            <a:fontRef idx="minor">
+              <a:schemeClr val="lt1"/>
+            </a:fontRef>
+          </p:style>
+          <p:txBody>
+            <a:bodyPr rtlCol="0" anchor="ctr"/>
+            <a:lstStyle/>
+            <a:p>
+              <a:pPr algn="ctr"/>
+              <a:endParaRPr lang="es-ES" dirty="0"/>
+            </a:p>
+          </p:txBody>
+        </p:sp>
+        <p:grpSp>
+          <p:nvGrpSpPr>
+            <p:cNvPr id="5" name="Grupo 4">
+              <a:extLst>
+                <a:ext uri="{FF2B5EF4-FFF2-40B4-BE49-F238E27FC236}">
+                  <a16:creationId xmlns:a16="http://schemas.microsoft.com/office/drawing/2014/main" id="{2FA49B0E-4073-8A18-72D9-D539361EB0ED}"/>
+                </a:ext>
+              </a:extLst>
+            </p:cNvPr>
+            <p:cNvGrpSpPr/>
+            <p:nvPr/>
+          </p:nvGrpSpPr>
+          <p:grpSpPr>
+            <a:xfrm>
+              <a:off x="4811908" y="3540112"/>
+              <a:ext cx="2568204" cy="1857077"/>
+              <a:chOff x="1406788" y="1307911"/>
+              <a:chExt cx="2568204" cy="1857077"/>
+            </a:xfrm>
+          </p:grpSpPr>
+          <p:grpSp>
+            <p:nvGrpSpPr>
+              <p:cNvPr id="6" name="Grupo 5">
+                <a:extLst>
+                  <a:ext uri="{FF2B5EF4-FFF2-40B4-BE49-F238E27FC236}">
+                    <a16:creationId xmlns:a16="http://schemas.microsoft.com/office/drawing/2014/main" id="{F6209F96-7DC9-D180-DDE2-0BA975FCC1EA}"/>
+                  </a:ext>
+                </a:extLst>
+              </p:cNvPr>
+              <p:cNvGrpSpPr/>
+              <p:nvPr/>
+            </p:nvGrpSpPr>
+            <p:grpSpPr>
+              <a:xfrm>
+                <a:off x="2288562" y="1307911"/>
+                <a:ext cx="804605" cy="882387"/>
+                <a:chOff x="2100116" y="1161875"/>
+                <a:chExt cx="1070929" cy="1174458"/>
+              </a:xfrm>
+            </p:grpSpPr>
+            <p:sp>
+              <p:nvSpPr>
+                <p:cNvPr id="8" name="Rectángulo 7">
+                  <a:extLst>
+                    <a:ext uri="{FF2B5EF4-FFF2-40B4-BE49-F238E27FC236}">
+                      <a16:creationId xmlns:a16="http://schemas.microsoft.com/office/drawing/2014/main" id="{FCB7FD0C-BEE3-5EF1-7B08-68A750E6C2A3}"/>
+                    </a:ext>
+                  </a:extLst>
+                </p:cNvPr>
+                <p:cNvSpPr/>
+                <p:nvPr/>
+              </p:nvSpPr>
+              <p:spPr>
+                <a:xfrm>
+                  <a:off x="2336341" y="1161875"/>
+                  <a:ext cx="834704" cy="1174458"/>
+                </a:xfrm>
+                <a:prstGeom prst="rect">
+                  <a:avLst/>
+                </a:prstGeom>
+                <a:solidFill>
+                  <a:schemeClr val="bg2">
+                    <a:lumMod val="90000"/>
+                  </a:schemeClr>
+                </a:solidFill>
+              </p:spPr>
+              <p:style>
+                <a:lnRef idx="2">
+                  <a:schemeClr val="accent1">
+                    <a:shade val="15000"/>
+                  </a:schemeClr>
+                </a:lnRef>
+                <a:fillRef idx="1">
+                  <a:schemeClr val="accent1"/>
+                </a:fillRef>
+                <a:effectRef idx="0">
+                  <a:schemeClr val="accent1"/>
+                </a:effectRef>
+                <a:fontRef idx="minor">
+                  <a:schemeClr val="lt1"/>
+                </a:fontRef>
+              </p:style>
+              <p:txBody>
+                <a:bodyPr rtlCol="0" anchor="ctr"/>
+                <a:lstStyle/>
+                <a:p>
+                  <a:pPr algn="ctr"/>
+                  <a:endParaRPr lang="es-ES"/>
+                </a:p>
+              </p:txBody>
+            </p:sp>
+            <p:sp>
+              <p:nvSpPr>
+                <p:cNvPr id="9" name="Elipse 8">
+                  <a:extLst>
+                    <a:ext uri="{FF2B5EF4-FFF2-40B4-BE49-F238E27FC236}">
+                      <a16:creationId xmlns:a16="http://schemas.microsoft.com/office/drawing/2014/main" id="{5B919FA8-9586-9DFD-28EC-0298B382BDED}"/>
+                    </a:ext>
+                  </a:extLst>
+                </p:cNvPr>
+                <p:cNvSpPr/>
+                <p:nvPr/>
+              </p:nvSpPr>
+              <p:spPr>
+                <a:xfrm>
+                  <a:off x="2100116" y="1305718"/>
+                  <a:ext cx="644427" cy="211459"/>
+                </a:xfrm>
+                <a:prstGeom prst="ellipse">
+                  <a:avLst/>
+                </a:prstGeom>
+                <a:solidFill>
+                  <a:schemeClr val="bg1"/>
+                </a:solidFill>
+              </p:spPr>
+              <p:style>
+                <a:lnRef idx="2">
+                  <a:schemeClr val="accent1">
+                    <a:shade val="15000"/>
+                  </a:schemeClr>
+                </a:lnRef>
+                <a:fillRef idx="1">
+                  <a:schemeClr val="accent1"/>
+                </a:fillRef>
+                <a:effectRef idx="0">
+                  <a:schemeClr val="accent1"/>
+                </a:effectRef>
+                <a:fontRef idx="minor">
+                  <a:schemeClr val="lt1"/>
+                </a:fontRef>
+              </p:style>
+              <p:txBody>
+                <a:bodyPr rtlCol="0" anchor="ctr"/>
+                <a:lstStyle/>
+                <a:p>
+                  <a:pPr algn="ctr"/>
+                  <a:endParaRPr lang="es-ES"/>
+                </a:p>
+              </p:txBody>
+            </p:sp>
+            <p:sp>
+              <p:nvSpPr>
+                <p:cNvPr id="10" name="Rectángulo 9">
+                  <a:extLst>
+                    <a:ext uri="{FF2B5EF4-FFF2-40B4-BE49-F238E27FC236}">
+                      <a16:creationId xmlns:a16="http://schemas.microsoft.com/office/drawing/2014/main" id="{78173E30-4025-2731-CE46-57F9C329B57F}"/>
+                    </a:ext>
+                  </a:extLst>
+                </p:cNvPr>
+                <p:cNvSpPr/>
+                <p:nvPr/>
+              </p:nvSpPr>
+              <p:spPr>
+                <a:xfrm>
+                  <a:off x="2100116" y="1639180"/>
+                  <a:ext cx="644427" cy="211459"/>
+                </a:xfrm>
+                <a:prstGeom prst="rect">
+                  <a:avLst/>
+                </a:prstGeom>
+                <a:solidFill>
+                  <a:schemeClr val="bg1"/>
+                </a:solidFill>
+              </p:spPr>
+              <p:style>
+                <a:lnRef idx="2">
+                  <a:schemeClr val="accent1">
+                    <a:shade val="15000"/>
+                  </a:schemeClr>
+                </a:lnRef>
+                <a:fillRef idx="1">
+                  <a:schemeClr val="accent1"/>
+                </a:fillRef>
+                <a:effectRef idx="0">
+                  <a:schemeClr val="accent1"/>
+                </a:effectRef>
+                <a:fontRef idx="minor">
+                  <a:schemeClr val="lt1"/>
+                </a:fontRef>
+              </p:style>
+              <p:txBody>
+                <a:bodyPr rtlCol="0" anchor="ctr"/>
+                <a:lstStyle/>
+                <a:p>
+                  <a:pPr algn="ctr"/>
+                  <a:endParaRPr lang="es-ES"/>
+                </a:p>
+              </p:txBody>
+            </p:sp>
+            <p:sp>
+              <p:nvSpPr>
+                <p:cNvPr id="11" name="Rectángulo 10">
+                  <a:extLst>
+                    <a:ext uri="{FF2B5EF4-FFF2-40B4-BE49-F238E27FC236}">
+                      <a16:creationId xmlns:a16="http://schemas.microsoft.com/office/drawing/2014/main" id="{5134015D-0779-647B-DF9C-038D96687030}"/>
+                    </a:ext>
+                  </a:extLst>
+                </p:cNvPr>
+                <p:cNvSpPr/>
+                <p:nvPr/>
+              </p:nvSpPr>
+              <p:spPr>
+                <a:xfrm>
+                  <a:off x="2100116" y="1972642"/>
+                  <a:ext cx="644427" cy="211459"/>
+                </a:xfrm>
+                <a:prstGeom prst="rect">
+                  <a:avLst/>
+                </a:prstGeom>
+                <a:solidFill>
+                  <a:schemeClr val="bg1"/>
+                </a:solidFill>
+              </p:spPr>
+              <p:style>
+                <a:lnRef idx="2">
+                  <a:schemeClr val="accent1">
+                    <a:shade val="15000"/>
+                  </a:schemeClr>
+                </a:lnRef>
+                <a:fillRef idx="1">
+                  <a:schemeClr val="accent1"/>
+                </a:fillRef>
+                <a:effectRef idx="0">
+                  <a:schemeClr val="accent1"/>
+                </a:effectRef>
+                <a:fontRef idx="minor">
+                  <a:schemeClr val="lt1"/>
+                </a:fontRef>
+              </p:style>
+              <p:txBody>
+                <a:bodyPr rtlCol="0" anchor="ctr"/>
+                <a:lstStyle/>
+                <a:p>
+                  <a:pPr algn="ctr"/>
+                  <a:endParaRPr lang="es-ES"/>
+                </a:p>
+              </p:txBody>
+            </p:sp>
+          </p:grpSp>
+          <p:sp>
+            <p:nvSpPr>
+              <p:cNvPr id="7" name="CuadroTexto 6">
+                <a:extLst>
+                  <a:ext uri="{FF2B5EF4-FFF2-40B4-BE49-F238E27FC236}">
+                    <a16:creationId xmlns:a16="http://schemas.microsoft.com/office/drawing/2014/main" id="{5EC95AF9-78AC-73E1-6C98-CF0F377E7A16}"/>
+                  </a:ext>
+                </a:extLst>
+              </p:cNvPr>
+              <p:cNvSpPr txBox="1"/>
+              <p:nvPr/>
+            </p:nvSpPr>
+            <p:spPr>
+              <a:xfrm>
+                <a:off x="1406788" y="2210881"/>
+                <a:ext cx="2568204" cy="954107"/>
+              </a:xfrm>
+              <a:prstGeom prst="rect">
+                <a:avLst/>
+              </a:prstGeom>
+              <a:noFill/>
+            </p:spPr>
+            <p:txBody>
+              <a:bodyPr wrap="none" rtlCol="0">
+                <a:spAutoFit/>
+              </a:bodyPr>
+              <a:lstStyle/>
+              <a:p>
+                <a:pPr algn="ctr"/>
+                <a:r>
+                  <a:rPr lang="es-ES" sz="1400" b="1" dirty="0" err="1">
+                    <a:latin typeface="+mj-lt"/>
+                  </a:rPr>
+                  <a:t>archetypes</a:t>
+                </a:r>
+                <a:r>
+                  <a:rPr lang="es-ES" sz="1400" b="1" dirty="0">
+                    <a:latin typeface="+mj-lt"/>
+                  </a:rPr>
+                  <a:t>/general/section.xsl</a:t>
+                </a:r>
+              </a:p>
+              <a:p>
+                <a:pPr algn="ctr"/>
+                <a:r>
+                  <a:rPr lang="es-ES" sz="1400" dirty="0">
+                    <a:latin typeface="+mj-lt"/>
+                  </a:rPr>
+                  <a:t>Genera </a:t>
+                </a:r>
+                <a:r>
+                  <a:rPr lang="es-ES" sz="1400" dirty="0" err="1">
+                    <a:latin typeface="+mj-lt"/>
+                  </a:rPr>
+                  <a:t>section</a:t>
+                </a:r>
+                <a:r>
+                  <a:rPr lang="es-ES" sz="1400" dirty="0">
+                    <a:latin typeface="+mj-lt"/>
+                  </a:rPr>
+                  <a:t> en HTML normal</a:t>
+                </a:r>
+              </a:p>
+              <a:p>
+                <a:pPr algn="ctr"/>
+                <a:r>
+                  <a:rPr lang="es-ES" sz="1400" dirty="0">
+                    <a:latin typeface="+mj-lt"/>
+                  </a:rPr>
+                  <a:t>Genera </a:t>
+                </a:r>
+                <a:r>
+                  <a:rPr lang="es-ES" sz="1400" dirty="0" err="1">
+                    <a:latin typeface="+mj-lt"/>
+                  </a:rPr>
+                  <a:t>section</a:t>
+                </a:r>
+                <a:r>
+                  <a:rPr lang="es-ES" sz="1400" dirty="0">
+                    <a:latin typeface="+mj-lt"/>
+                  </a:rPr>
+                  <a:t> en TOC</a:t>
+                </a:r>
+              </a:p>
+              <a:p>
+                <a:pPr algn="ctr"/>
+                <a:r>
+                  <a:rPr lang="es-ES" sz="1400" b="1" i="1" dirty="0">
+                    <a:latin typeface="+mj-lt"/>
+                  </a:rPr>
+                  <a:t>¿dividir en dos archivos?</a:t>
+                </a:r>
+              </a:p>
+            </p:txBody>
+          </p:sp>
+        </p:grpSp>
+      </p:grpSp>
+      <p:grpSp>
+        <p:nvGrpSpPr>
+          <p:cNvPr id="42" name="Grupo 41">
+            <a:extLst>
+              <a:ext uri="{FF2B5EF4-FFF2-40B4-BE49-F238E27FC236}">
+                <a16:creationId xmlns:a16="http://schemas.microsoft.com/office/drawing/2014/main" id="{CCD10193-CFF3-8835-E78E-11ABDF662FE3}"/>
+              </a:ext>
+            </a:extLst>
+          </p:cNvPr>
+          <p:cNvGrpSpPr/>
+          <p:nvPr/>
+        </p:nvGrpSpPr>
+        <p:grpSpPr>
+          <a:xfrm>
+            <a:off x="3459194" y="452201"/>
+            <a:ext cx="2705420" cy="2301269"/>
+            <a:chOff x="4743306" y="3311364"/>
+            <a:chExt cx="2705420" cy="2301269"/>
+          </a:xfrm>
+        </p:grpSpPr>
+        <p:sp>
+          <p:nvSpPr>
+            <p:cNvPr id="43" name="Rectángulo 42">
+              <a:extLst>
+                <a:ext uri="{FF2B5EF4-FFF2-40B4-BE49-F238E27FC236}">
+                  <a16:creationId xmlns:a16="http://schemas.microsoft.com/office/drawing/2014/main" id="{32C7E85D-8F9F-1D49-B6AD-44939B5B96C3}"/>
+                </a:ext>
+              </a:extLst>
+            </p:cNvPr>
+            <p:cNvSpPr/>
+            <p:nvPr/>
+          </p:nvSpPr>
+          <p:spPr>
+            <a:xfrm>
+              <a:off x="6164551" y="3311364"/>
+              <a:ext cx="627126" cy="882387"/>
+            </a:xfrm>
+            <a:prstGeom prst="rect">
+              <a:avLst/>
+            </a:prstGeom>
+            <a:solidFill>
+              <a:schemeClr val="bg2">
+                <a:lumMod val="90000"/>
+              </a:schemeClr>
+            </a:solidFill>
+          </p:spPr>
+          <p:style>
+            <a:lnRef idx="2">
+              <a:schemeClr val="accent1">
+                <a:shade val="15000"/>
+              </a:schemeClr>
+            </a:lnRef>
+            <a:fillRef idx="1">
+              <a:schemeClr val="accent1"/>
+            </a:fillRef>
+            <a:effectRef idx="0">
+              <a:schemeClr val="accent1"/>
+            </a:effectRef>
+            <a:fontRef idx="minor">
+              <a:schemeClr val="lt1"/>
+            </a:fontRef>
+          </p:style>
+          <p:txBody>
+            <a:bodyPr rtlCol="0" anchor="ctr"/>
+            <a:lstStyle/>
+            <a:p>
+              <a:pPr algn="ctr"/>
+              <a:endParaRPr lang="es-ES" dirty="0"/>
+            </a:p>
+          </p:txBody>
+        </p:sp>
+        <p:sp>
+          <p:nvSpPr>
+            <p:cNvPr id="44" name="Rectángulo 43">
+              <a:extLst>
+                <a:ext uri="{FF2B5EF4-FFF2-40B4-BE49-F238E27FC236}">
+                  <a16:creationId xmlns:a16="http://schemas.microsoft.com/office/drawing/2014/main" id="{94B03166-2467-8C95-4040-33164BD4B843}"/>
+                </a:ext>
+              </a:extLst>
+            </p:cNvPr>
+            <p:cNvSpPr/>
+            <p:nvPr/>
+          </p:nvSpPr>
+          <p:spPr>
+            <a:xfrm>
+              <a:off x="6017856" y="3425738"/>
+              <a:ext cx="627126" cy="882387"/>
+            </a:xfrm>
+            <a:prstGeom prst="rect">
+              <a:avLst/>
+            </a:prstGeom>
+            <a:solidFill>
+              <a:schemeClr val="bg2">
+                <a:lumMod val="90000"/>
+              </a:schemeClr>
+            </a:solidFill>
+          </p:spPr>
+          <p:style>
+            <a:lnRef idx="2">
+              <a:schemeClr val="accent1">
+                <a:shade val="15000"/>
+              </a:schemeClr>
+            </a:lnRef>
+            <a:fillRef idx="1">
+              <a:schemeClr val="accent1"/>
+            </a:fillRef>
+            <a:effectRef idx="0">
+              <a:schemeClr val="accent1"/>
+            </a:effectRef>
+            <a:fontRef idx="minor">
+              <a:schemeClr val="lt1"/>
+            </a:fontRef>
+          </p:style>
+          <p:txBody>
+            <a:bodyPr rtlCol="0" anchor="ctr"/>
+            <a:lstStyle/>
+            <a:p>
+              <a:pPr algn="ctr"/>
+              <a:endParaRPr lang="es-ES" dirty="0"/>
+            </a:p>
+          </p:txBody>
+        </p:sp>
+        <p:grpSp>
+          <p:nvGrpSpPr>
+            <p:cNvPr id="45" name="Grupo 44">
+              <a:extLst>
+                <a:ext uri="{FF2B5EF4-FFF2-40B4-BE49-F238E27FC236}">
+                  <a16:creationId xmlns:a16="http://schemas.microsoft.com/office/drawing/2014/main" id="{E396EECD-9BD2-E2B0-2342-F25F2E8F24D7}"/>
+                </a:ext>
+              </a:extLst>
+            </p:cNvPr>
+            <p:cNvGrpSpPr/>
+            <p:nvPr/>
+          </p:nvGrpSpPr>
+          <p:grpSpPr>
+            <a:xfrm>
+              <a:off x="4743306" y="3540112"/>
+              <a:ext cx="2705420" cy="2072521"/>
+              <a:chOff x="1338186" y="1307911"/>
+              <a:chExt cx="2705420" cy="2072521"/>
+            </a:xfrm>
+          </p:grpSpPr>
+          <p:grpSp>
+            <p:nvGrpSpPr>
+              <p:cNvPr id="46" name="Grupo 45">
+                <a:extLst>
+                  <a:ext uri="{FF2B5EF4-FFF2-40B4-BE49-F238E27FC236}">
+                    <a16:creationId xmlns:a16="http://schemas.microsoft.com/office/drawing/2014/main" id="{B1D04149-E717-F09C-B259-758D43D0FB04}"/>
+                  </a:ext>
+                </a:extLst>
+              </p:cNvPr>
+              <p:cNvGrpSpPr/>
+              <p:nvPr/>
+            </p:nvGrpSpPr>
+            <p:grpSpPr>
+              <a:xfrm>
+                <a:off x="2288562" y="1307911"/>
+                <a:ext cx="804605" cy="882387"/>
+                <a:chOff x="2100116" y="1161875"/>
+                <a:chExt cx="1070929" cy="1174458"/>
+              </a:xfrm>
+            </p:grpSpPr>
+            <p:sp>
+              <p:nvSpPr>
+                <p:cNvPr id="48" name="Rectángulo 47">
+                  <a:extLst>
+                    <a:ext uri="{FF2B5EF4-FFF2-40B4-BE49-F238E27FC236}">
+                      <a16:creationId xmlns:a16="http://schemas.microsoft.com/office/drawing/2014/main" id="{D1F7EFFF-7DE6-3F50-1A24-E8C4E94C5068}"/>
+                    </a:ext>
+                  </a:extLst>
+                </p:cNvPr>
+                <p:cNvSpPr/>
+                <p:nvPr/>
+              </p:nvSpPr>
+              <p:spPr>
+                <a:xfrm>
+                  <a:off x="2336341" y="1161875"/>
+                  <a:ext cx="834704" cy="1174458"/>
+                </a:xfrm>
+                <a:prstGeom prst="rect">
+                  <a:avLst/>
+                </a:prstGeom>
+                <a:solidFill>
+                  <a:schemeClr val="bg2">
+                    <a:lumMod val="90000"/>
+                  </a:schemeClr>
+                </a:solidFill>
+              </p:spPr>
+              <p:style>
+                <a:lnRef idx="2">
+                  <a:schemeClr val="accent1">
+                    <a:shade val="15000"/>
+                  </a:schemeClr>
+                </a:lnRef>
+                <a:fillRef idx="1">
+                  <a:schemeClr val="accent1"/>
+                </a:fillRef>
+                <a:effectRef idx="0">
+                  <a:schemeClr val="accent1"/>
+                </a:effectRef>
+                <a:fontRef idx="minor">
+                  <a:schemeClr val="lt1"/>
+                </a:fontRef>
+              </p:style>
+              <p:txBody>
+                <a:bodyPr rtlCol="0" anchor="ctr"/>
+                <a:lstStyle/>
+                <a:p>
+                  <a:pPr algn="ctr"/>
+                  <a:endParaRPr lang="es-ES"/>
+                </a:p>
+              </p:txBody>
+            </p:sp>
+            <p:sp>
+              <p:nvSpPr>
+                <p:cNvPr id="49" name="Elipse 48">
+                  <a:extLst>
+                    <a:ext uri="{FF2B5EF4-FFF2-40B4-BE49-F238E27FC236}">
+                      <a16:creationId xmlns:a16="http://schemas.microsoft.com/office/drawing/2014/main" id="{FFD4B123-244D-2AEC-1593-F3DBC53645BD}"/>
+                    </a:ext>
+                  </a:extLst>
+                </p:cNvPr>
+                <p:cNvSpPr/>
+                <p:nvPr/>
+              </p:nvSpPr>
+              <p:spPr>
+                <a:xfrm>
+                  <a:off x="2100116" y="1305718"/>
+                  <a:ext cx="644427" cy="211459"/>
+                </a:xfrm>
+                <a:prstGeom prst="ellipse">
+                  <a:avLst/>
+                </a:prstGeom>
+                <a:solidFill>
+                  <a:schemeClr val="bg1"/>
+                </a:solidFill>
+              </p:spPr>
+              <p:style>
+                <a:lnRef idx="2">
+                  <a:schemeClr val="accent1">
+                    <a:shade val="15000"/>
+                  </a:schemeClr>
+                </a:lnRef>
+                <a:fillRef idx="1">
+                  <a:schemeClr val="accent1"/>
+                </a:fillRef>
+                <a:effectRef idx="0">
+                  <a:schemeClr val="accent1"/>
+                </a:effectRef>
+                <a:fontRef idx="minor">
+                  <a:schemeClr val="lt1"/>
+                </a:fontRef>
+              </p:style>
+              <p:txBody>
+                <a:bodyPr rtlCol="0" anchor="ctr"/>
+                <a:lstStyle/>
+                <a:p>
+                  <a:pPr algn="ctr"/>
+                  <a:endParaRPr lang="es-ES"/>
+                </a:p>
+              </p:txBody>
+            </p:sp>
+            <p:sp>
+              <p:nvSpPr>
+                <p:cNvPr id="50" name="Rectángulo 49">
+                  <a:extLst>
+                    <a:ext uri="{FF2B5EF4-FFF2-40B4-BE49-F238E27FC236}">
+                      <a16:creationId xmlns:a16="http://schemas.microsoft.com/office/drawing/2014/main" id="{05904334-6E8E-409D-7E62-98429DF447BC}"/>
+                    </a:ext>
+                  </a:extLst>
+                </p:cNvPr>
+                <p:cNvSpPr/>
+                <p:nvPr/>
+              </p:nvSpPr>
+              <p:spPr>
+                <a:xfrm>
+                  <a:off x="2100116" y="1639180"/>
+                  <a:ext cx="644427" cy="211459"/>
+                </a:xfrm>
+                <a:prstGeom prst="rect">
+                  <a:avLst/>
+                </a:prstGeom>
+                <a:solidFill>
+                  <a:schemeClr val="bg1"/>
+                </a:solidFill>
+              </p:spPr>
+              <p:style>
+                <a:lnRef idx="2">
+                  <a:schemeClr val="accent1">
+                    <a:shade val="15000"/>
+                  </a:schemeClr>
+                </a:lnRef>
+                <a:fillRef idx="1">
+                  <a:schemeClr val="accent1"/>
+                </a:fillRef>
+                <a:effectRef idx="0">
+                  <a:schemeClr val="accent1"/>
+                </a:effectRef>
+                <a:fontRef idx="minor">
+                  <a:schemeClr val="lt1"/>
+                </a:fontRef>
+              </p:style>
+              <p:txBody>
+                <a:bodyPr rtlCol="0" anchor="ctr"/>
+                <a:lstStyle/>
+                <a:p>
+                  <a:pPr algn="ctr"/>
+                  <a:endParaRPr lang="es-ES"/>
+                </a:p>
+              </p:txBody>
+            </p:sp>
+            <p:sp>
+              <p:nvSpPr>
+                <p:cNvPr id="51" name="Rectángulo 50">
+                  <a:extLst>
+                    <a:ext uri="{FF2B5EF4-FFF2-40B4-BE49-F238E27FC236}">
+                      <a16:creationId xmlns:a16="http://schemas.microsoft.com/office/drawing/2014/main" id="{16B24B98-A266-D610-FC6E-0972190C8088}"/>
+                    </a:ext>
+                  </a:extLst>
+                </p:cNvPr>
+                <p:cNvSpPr/>
+                <p:nvPr/>
+              </p:nvSpPr>
+              <p:spPr>
+                <a:xfrm>
+                  <a:off x="2100116" y="1972642"/>
+                  <a:ext cx="644427" cy="211459"/>
+                </a:xfrm>
+                <a:prstGeom prst="rect">
+                  <a:avLst/>
+                </a:prstGeom>
+                <a:solidFill>
+                  <a:schemeClr val="bg1"/>
+                </a:solidFill>
+              </p:spPr>
+              <p:style>
+                <a:lnRef idx="2">
+                  <a:schemeClr val="accent1">
+                    <a:shade val="15000"/>
+                  </a:schemeClr>
+                </a:lnRef>
+                <a:fillRef idx="1">
+                  <a:schemeClr val="accent1"/>
+                </a:fillRef>
+                <a:effectRef idx="0">
+                  <a:schemeClr val="accent1"/>
+                </a:effectRef>
+                <a:fontRef idx="minor">
+                  <a:schemeClr val="lt1"/>
+                </a:fontRef>
+              </p:style>
+              <p:txBody>
+                <a:bodyPr rtlCol="0" anchor="ctr"/>
+                <a:lstStyle/>
+                <a:p>
+                  <a:pPr algn="ctr"/>
+                  <a:endParaRPr lang="es-ES"/>
+                </a:p>
+              </p:txBody>
+            </p:sp>
+          </p:grpSp>
+          <p:sp>
+            <p:nvSpPr>
+              <p:cNvPr id="47" name="CuadroTexto 46">
+                <a:extLst>
+                  <a:ext uri="{FF2B5EF4-FFF2-40B4-BE49-F238E27FC236}">
+                    <a16:creationId xmlns:a16="http://schemas.microsoft.com/office/drawing/2014/main" id="{E91BC50B-80D1-B872-4147-F7685FCE050D}"/>
+                  </a:ext>
+                </a:extLst>
+              </p:cNvPr>
+              <p:cNvSpPr txBox="1"/>
+              <p:nvPr/>
+            </p:nvSpPr>
+            <p:spPr>
+              <a:xfrm>
+                <a:off x="1338186" y="2210881"/>
+                <a:ext cx="2705420" cy="1169551"/>
+              </a:xfrm>
+              <a:prstGeom prst="rect">
+                <a:avLst/>
+              </a:prstGeom>
+              <a:noFill/>
+            </p:spPr>
+            <p:txBody>
+              <a:bodyPr wrap="none" rtlCol="0">
+                <a:spAutoFit/>
+              </a:bodyPr>
+              <a:lstStyle/>
+              <a:p>
+                <a:pPr algn="ctr"/>
+                <a:r>
+                  <a:rPr lang="es-ES" sz="1400" b="1" dirty="0" err="1">
+                    <a:latin typeface="+mj-lt"/>
+                  </a:rPr>
+                  <a:t>archetypes</a:t>
+                </a:r>
+                <a:r>
+                  <a:rPr lang="es-ES" sz="1400" b="1" dirty="0">
+                    <a:latin typeface="+mj-lt"/>
+                  </a:rPr>
+                  <a:t>/general/appendix.xsl</a:t>
+                </a:r>
+              </a:p>
+              <a:p>
+                <a:pPr algn="ctr"/>
+                <a:r>
+                  <a:rPr lang="es-ES" sz="1400" dirty="0">
+                    <a:latin typeface="+mj-lt"/>
+                  </a:rPr>
+                  <a:t>Genera </a:t>
+                </a:r>
+                <a:r>
+                  <a:rPr lang="es-ES" sz="1400" dirty="0" err="1">
+                    <a:latin typeface="+mj-lt"/>
+                  </a:rPr>
+                  <a:t>appendix</a:t>
+                </a:r>
+                <a:r>
+                  <a:rPr lang="es-ES" sz="1400" dirty="0">
+                    <a:latin typeface="+mj-lt"/>
+                  </a:rPr>
+                  <a:t> en HTML normal</a:t>
+                </a:r>
+              </a:p>
+              <a:p>
+                <a:pPr algn="ctr"/>
+                <a:r>
+                  <a:rPr lang="es-ES" sz="1400" dirty="0">
+                    <a:latin typeface="+mj-lt"/>
+                  </a:rPr>
+                  <a:t>Genera </a:t>
+                </a:r>
+                <a:r>
+                  <a:rPr lang="es-ES" sz="1400" dirty="0" err="1">
+                    <a:latin typeface="+mj-lt"/>
+                  </a:rPr>
+                  <a:t>appendix</a:t>
+                </a:r>
+                <a:r>
+                  <a:rPr lang="es-ES" sz="1400" dirty="0">
+                    <a:latin typeface="+mj-lt"/>
+                  </a:rPr>
+                  <a:t> en TOC</a:t>
+                </a:r>
+              </a:p>
+              <a:p>
+                <a:pPr algn="ctr"/>
+                <a:r>
+                  <a:rPr lang="es-ES" sz="1400" b="1" i="1" dirty="0">
+                    <a:latin typeface="+mj-lt"/>
+                  </a:rPr>
+                  <a:t>Muy similar a section.xls</a:t>
+                </a:r>
+              </a:p>
+              <a:p>
+                <a:pPr algn="ctr"/>
+                <a:r>
+                  <a:rPr lang="es-ES" sz="1400" b="1" i="1" dirty="0">
+                    <a:latin typeface="+mj-lt"/>
+                  </a:rPr>
+                  <a:t>¿dividir en dos archivos?</a:t>
+                </a:r>
+              </a:p>
+            </p:txBody>
+          </p:sp>
+        </p:grpSp>
+      </p:grpSp>
+      <p:grpSp>
+        <p:nvGrpSpPr>
+          <p:cNvPr id="52" name="Grupo 51">
+            <a:extLst>
+              <a:ext uri="{FF2B5EF4-FFF2-40B4-BE49-F238E27FC236}">
+                <a16:creationId xmlns:a16="http://schemas.microsoft.com/office/drawing/2014/main" id="{5963B36C-1D5C-644A-1B11-7FAC51C640DB}"/>
+              </a:ext>
+            </a:extLst>
+          </p:cNvPr>
+          <p:cNvGrpSpPr/>
+          <p:nvPr/>
+        </p:nvGrpSpPr>
+        <p:grpSpPr>
+          <a:xfrm>
+            <a:off x="6417292" y="452764"/>
+            <a:ext cx="2757934" cy="1870382"/>
+            <a:chOff x="4717062" y="3311364"/>
+            <a:chExt cx="2757934" cy="1870382"/>
+          </a:xfrm>
+        </p:grpSpPr>
+        <p:sp>
+          <p:nvSpPr>
+            <p:cNvPr id="53" name="Rectángulo 52">
+              <a:extLst>
+                <a:ext uri="{FF2B5EF4-FFF2-40B4-BE49-F238E27FC236}">
+                  <a16:creationId xmlns:a16="http://schemas.microsoft.com/office/drawing/2014/main" id="{B25D6AA1-C6C4-893F-9335-D767BAE52E81}"/>
+                </a:ext>
+              </a:extLst>
+            </p:cNvPr>
+            <p:cNvSpPr/>
+            <p:nvPr/>
+          </p:nvSpPr>
+          <p:spPr>
+            <a:xfrm>
+              <a:off x="6164551" y="3311364"/>
+              <a:ext cx="627126" cy="882387"/>
+            </a:xfrm>
+            <a:prstGeom prst="rect">
+              <a:avLst/>
+            </a:prstGeom>
+            <a:solidFill>
+              <a:schemeClr val="bg2">
+                <a:lumMod val="90000"/>
+              </a:schemeClr>
+            </a:solidFill>
+          </p:spPr>
+          <p:style>
+            <a:lnRef idx="2">
+              <a:schemeClr val="accent1">
+                <a:shade val="15000"/>
+              </a:schemeClr>
+            </a:lnRef>
+            <a:fillRef idx="1">
+              <a:schemeClr val="accent1"/>
+            </a:fillRef>
+            <a:effectRef idx="0">
+              <a:schemeClr val="accent1"/>
+            </a:effectRef>
+            <a:fontRef idx="minor">
+              <a:schemeClr val="lt1"/>
+            </a:fontRef>
+          </p:style>
+          <p:txBody>
+            <a:bodyPr rtlCol="0" anchor="ctr"/>
+            <a:lstStyle/>
+            <a:p>
+              <a:pPr algn="ctr"/>
+              <a:endParaRPr lang="es-ES" dirty="0"/>
+            </a:p>
+          </p:txBody>
+        </p:sp>
+        <p:sp>
+          <p:nvSpPr>
+            <p:cNvPr id="54" name="Rectángulo 53">
+              <a:extLst>
+                <a:ext uri="{FF2B5EF4-FFF2-40B4-BE49-F238E27FC236}">
+                  <a16:creationId xmlns:a16="http://schemas.microsoft.com/office/drawing/2014/main" id="{6930CAB1-8794-0283-F0C8-62B4EE75AFA7}"/>
+                </a:ext>
+              </a:extLst>
+            </p:cNvPr>
+            <p:cNvSpPr/>
+            <p:nvPr/>
+          </p:nvSpPr>
+          <p:spPr>
+            <a:xfrm>
+              <a:off x="6017856" y="3425738"/>
+              <a:ext cx="627126" cy="882387"/>
+            </a:xfrm>
+            <a:prstGeom prst="rect">
+              <a:avLst/>
+            </a:prstGeom>
+            <a:solidFill>
+              <a:schemeClr val="bg2">
+                <a:lumMod val="90000"/>
+              </a:schemeClr>
+            </a:solidFill>
+          </p:spPr>
+          <p:style>
+            <a:lnRef idx="2">
+              <a:schemeClr val="accent1">
+                <a:shade val="15000"/>
+              </a:schemeClr>
+            </a:lnRef>
+            <a:fillRef idx="1">
+              <a:schemeClr val="accent1"/>
+            </a:fillRef>
+            <a:effectRef idx="0">
+              <a:schemeClr val="accent1"/>
+            </a:effectRef>
+            <a:fontRef idx="minor">
+              <a:schemeClr val="lt1"/>
+            </a:fontRef>
+          </p:style>
+          <p:txBody>
+            <a:bodyPr rtlCol="0" anchor="ctr"/>
+            <a:lstStyle/>
+            <a:p>
+              <a:pPr algn="ctr"/>
+              <a:endParaRPr lang="es-ES" dirty="0"/>
+            </a:p>
+          </p:txBody>
+        </p:sp>
+        <p:grpSp>
+          <p:nvGrpSpPr>
+            <p:cNvPr id="55" name="Grupo 54">
+              <a:extLst>
+                <a:ext uri="{FF2B5EF4-FFF2-40B4-BE49-F238E27FC236}">
+                  <a16:creationId xmlns:a16="http://schemas.microsoft.com/office/drawing/2014/main" id="{55FF4F96-6FF2-2B98-0A90-BD2CAF8B7B14}"/>
+                </a:ext>
+              </a:extLst>
+            </p:cNvPr>
+            <p:cNvGrpSpPr/>
+            <p:nvPr/>
+          </p:nvGrpSpPr>
+          <p:grpSpPr>
+            <a:xfrm>
+              <a:off x="4717062" y="3540112"/>
+              <a:ext cx="2757934" cy="1641634"/>
+              <a:chOff x="1311942" y="1307911"/>
+              <a:chExt cx="2757934" cy="1641634"/>
+            </a:xfrm>
+          </p:grpSpPr>
+          <p:grpSp>
+            <p:nvGrpSpPr>
+              <p:cNvPr id="56" name="Grupo 55">
+                <a:extLst>
+                  <a:ext uri="{FF2B5EF4-FFF2-40B4-BE49-F238E27FC236}">
+                    <a16:creationId xmlns:a16="http://schemas.microsoft.com/office/drawing/2014/main" id="{35D13028-4365-3315-BCFF-465633A74C57}"/>
+                  </a:ext>
+                </a:extLst>
+              </p:cNvPr>
+              <p:cNvGrpSpPr/>
+              <p:nvPr/>
+            </p:nvGrpSpPr>
+            <p:grpSpPr>
+              <a:xfrm>
+                <a:off x="2288562" y="1307911"/>
+                <a:ext cx="804605" cy="882387"/>
+                <a:chOff x="2100116" y="1161875"/>
+                <a:chExt cx="1070929" cy="1174458"/>
+              </a:xfrm>
+            </p:grpSpPr>
+            <p:sp>
+              <p:nvSpPr>
+                <p:cNvPr id="58" name="Rectángulo 57">
+                  <a:extLst>
+                    <a:ext uri="{FF2B5EF4-FFF2-40B4-BE49-F238E27FC236}">
+                      <a16:creationId xmlns:a16="http://schemas.microsoft.com/office/drawing/2014/main" id="{7C81E750-93DD-9D0E-3A01-7BC3E9A9DBAB}"/>
+                    </a:ext>
+                  </a:extLst>
+                </p:cNvPr>
+                <p:cNvSpPr/>
+                <p:nvPr/>
+              </p:nvSpPr>
+              <p:spPr>
+                <a:xfrm>
+                  <a:off x="2336341" y="1161875"/>
+                  <a:ext cx="834704" cy="1174458"/>
+                </a:xfrm>
+                <a:prstGeom prst="rect">
+                  <a:avLst/>
+                </a:prstGeom>
+                <a:solidFill>
+                  <a:schemeClr val="bg2">
+                    <a:lumMod val="90000"/>
+                  </a:schemeClr>
+                </a:solidFill>
+              </p:spPr>
+              <p:style>
+                <a:lnRef idx="2">
+                  <a:schemeClr val="accent1">
+                    <a:shade val="15000"/>
+                  </a:schemeClr>
+                </a:lnRef>
+                <a:fillRef idx="1">
+                  <a:schemeClr val="accent1"/>
+                </a:fillRef>
+                <a:effectRef idx="0">
+                  <a:schemeClr val="accent1"/>
+                </a:effectRef>
+                <a:fontRef idx="minor">
+                  <a:schemeClr val="lt1"/>
+                </a:fontRef>
+              </p:style>
+              <p:txBody>
+                <a:bodyPr rtlCol="0" anchor="ctr"/>
+                <a:lstStyle/>
+                <a:p>
+                  <a:pPr algn="ctr"/>
+                  <a:endParaRPr lang="es-ES"/>
+                </a:p>
+              </p:txBody>
+            </p:sp>
+            <p:sp>
+              <p:nvSpPr>
+                <p:cNvPr id="59" name="Elipse 58">
+                  <a:extLst>
+                    <a:ext uri="{FF2B5EF4-FFF2-40B4-BE49-F238E27FC236}">
+                      <a16:creationId xmlns:a16="http://schemas.microsoft.com/office/drawing/2014/main" id="{00FCBD1C-E8BC-37DB-9413-C60930356555}"/>
+                    </a:ext>
+                  </a:extLst>
+                </p:cNvPr>
+                <p:cNvSpPr/>
+                <p:nvPr/>
+              </p:nvSpPr>
+              <p:spPr>
+                <a:xfrm>
+                  <a:off x="2100116" y="1305718"/>
+                  <a:ext cx="644427" cy="211459"/>
+                </a:xfrm>
+                <a:prstGeom prst="ellipse">
+                  <a:avLst/>
+                </a:prstGeom>
+                <a:solidFill>
+                  <a:schemeClr val="bg1"/>
+                </a:solidFill>
+              </p:spPr>
+              <p:style>
+                <a:lnRef idx="2">
+                  <a:schemeClr val="accent1">
+                    <a:shade val="15000"/>
+                  </a:schemeClr>
+                </a:lnRef>
+                <a:fillRef idx="1">
+                  <a:schemeClr val="accent1"/>
+                </a:fillRef>
+                <a:effectRef idx="0">
+                  <a:schemeClr val="accent1"/>
+                </a:effectRef>
+                <a:fontRef idx="minor">
+                  <a:schemeClr val="lt1"/>
+                </a:fontRef>
+              </p:style>
+              <p:txBody>
+                <a:bodyPr rtlCol="0" anchor="ctr"/>
+                <a:lstStyle/>
+                <a:p>
+                  <a:pPr algn="ctr"/>
+                  <a:endParaRPr lang="es-ES"/>
+                </a:p>
+              </p:txBody>
+            </p:sp>
+            <p:sp>
+              <p:nvSpPr>
+                <p:cNvPr id="60" name="Rectángulo 59">
+                  <a:extLst>
+                    <a:ext uri="{FF2B5EF4-FFF2-40B4-BE49-F238E27FC236}">
+                      <a16:creationId xmlns:a16="http://schemas.microsoft.com/office/drawing/2014/main" id="{F0AADD75-9364-3F38-458B-780D27A0D6E0}"/>
+                    </a:ext>
+                  </a:extLst>
+                </p:cNvPr>
+                <p:cNvSpPr/>
+                <p:nvPr/>
+              </p:nvSpPr>
+              <p:spPr>
+                <a:xfrm>
+                  <a:off x="2100116" y="1639180"/>
+                  <a:ext cx="644427" cy="211459"/>
+                </a:xfrm>
+                <a:prstGeom prst="rect">
+                  <a:avLst/>
+                </a:prstGeom>
+                <a:solidFill>
+                  <a:schemeClr val="bg1"/>
+                </a:solidFill>
+              </p:spPr>
+              <p:style>
+                <a:lnRef idx="2">
+                  <a:schemeClr val="accent1">
+                    <a:shade val="15000"/>
+                  </a:schemeClr>
+                </a:lnRef>
+                <a:fillRef idx="1">
+                  <a:schemeClr val="accent1"/>
+                </a:fillRef>
+                <a:effectRef idx="0">
+                  <a:schemeClr val="accent1"/>
+                </a:effectRef>
+                <a:fontRef idx="minor">
+                  <a:schemeClr val="lt1"/>
+                </a:fontRef>
+              </p:style>
+              <p:txBody>
+                <a:bodyPr rtlCol="0" anchor="ctr"/>
+                <a:lstStyle/>
+                <a:p>
+                  <a:pPr algn="ctr"/>
+                  <a:endParaRPr lang="es-ES"/>
+                </a:p>
+              </p:txBody>
+            </p:sp>
+            <p:sp>
+              <p:nvSpPr>
+                <p:cNvPr id="61" name="Rectángulo 60">
+                  <a:extLst>
+                    <a:ext uri="{FF2B5EF4-FFF2-40B4-BE49-F238E27FC236}">
+                      <a16:creationId xmlns:a16="http://schemas.microsoft.com/office/drawing/2014/main" id="{FF8E26BE-8D46-5644-960B-0DCC163B80CC}"/>
+                    </a:ext>
+                  </a:extLst>
+                </p:cNvPr>
+                <p:cNvSpPr/>
+                <p:nvPr/>
+              </p:nvSpPr>
+              <p:spPr>
+                <a:xfrm>
+                  <a:off x="2100116" y="1972642"/>
+                  <a:ext cx="644427" cy="211459"/>
+                </a:xfrm>
+                <a:prstGeom prst="rect">
+                  <a:avLst/>
+                </a:prstGeom>
+                <a:solidFill>
+                  <a:schemeClr val="bg1"/>
+                </a:solidFill>
+              </p:spPr>
+              <p:style>
+                <a:lnRef idx="2">
+                  <a:schemeClr val="accent1">
+                    <a:shade val="15000"/>
+                  </a:schemeClr>
+                </a:lnRef>
+                <a:fillRef idx="1">
+                  <a:schemeClr val="accent1"/>
+                </a:fillRef>
+                <a:effectRef idx="0">
+                  <a:schemeClr val="accent1"/>
+                </a:effectRef>
+                <a:fontRef idx="minor">
+                  <a:schemeClr val="lt1"/>
+                </a:fontRef>
+              </p:style>
+              <p:txBody>
+                <a:bodyPr rtlCol="0" anchor="ctr"/>
+                <a:lstStyle/>
+                <a:p>
+                  <a:pPr algn="ctr"/>
+                  <a:endParaRPr lang="es-ES"/>
+                </a:p>
+              </p:txBody>
+            </p:sp>
+          </p:grpSp>
+          <p:sp>
+            <p:nvSpPr>
+              <p:cNvPr id="57" name="CuadroTexto 56">
+                <a:extLst>
+                  <a:ext uri="{FF2B5EF4-FFF2-40B4-BE49-F238E27FC236}">
+                    <a16:creationId xmlns:a16="http://schemas.microsoft.com/office/drawing/2014/main" id="{00CB2B11-F1CC-B980-36BC-F9C0779080E9}"/>
+                  </a:ext>
+                </a:extLst>
+              </p:cNvPr>
+              <p:cNvSpPr txBox="1"/>
+              <p:nvPr/>
+            </p:nvSpPr>
+            <p:spPr>
+              <a:xfrm>
+                <a:off x="1311942" y="2210881"/>
+                <a:ext cx="2757934" cy="738664"/>
+              </a:xfrm>
+              <a:prstGeom prst="rect">
+                <a:avLst/>
+              </a:prstGeom>
+              <a:noFill/>
+            </p:spPr>
+            <p:txBody>
+              <a:bodyPr wrap="none" rtlCol="0">
+                <a:spAutoFit/>
+              </a:bodyPr>
+              <a:lstStyle/>
+              <a:p>
+                <a:pPr algn="ctr"/>
+                <a:r>
+                  <a:rPr lang="es-ES" sz="1400" b="1" dirty="0" err="1">
+                    <a:latin typeface="+mj-lt"/>
+                  </a:rPr>
+                  <a:t>archetypes</a:t>
+                </a:r>
+                <a:r>
+                  <a:rPr lang="es-ES" sz="1400" b="1" dirty="0">
+                    <a:latin typeface="+mj-lt"/>
+                  </a:rPr>
+                  <a:t>/general/paragraph.xsl</a:t>
+                </a:r>
+              </a:p>
+              <a:p>
+                <a:pPr algn="ctr"/>
+                <a:r>
+                  <a:rPr lang="es-ES" sz="1400" dirty="0">
+                    <a:latin typeface="+mj-lt"/>
+                  </a:rPr>
+                  <a:t>Genera el texto del párrafo</a:t>
+                </a:r>
+              </a:p>
+              <a:p>
+                <a:pPr algn="ctr"/>
+                <a:r>
+                  <a:rPr lang="es-ES" sz="1400" dirty="0">
+                    <a:latin typeface="+mj-lt"/>
+                  </a:rPr>
+                  <a:t>llamando a </a:t>
+                </a:r>
+                <a:r>
+                  <a:rPr lang="es-ES" sz="1400" dirty="0" err="1">
+                    <a:latin typeface="+mj-lt"/>
+                  </a:rPr>
+                  <a:t>generate_markdown</a:t>
+                </a:r>
+                <a:endParaRPr lang="es-ES" sz="1400" b="1" i="1" dirty="0">
+                  <a:latin typeface="+mj-lt"/>
+                </a:endParaRPr>
+              </a:p>
+            </p:txBody>
+          </p:sp>
+        </p:grpSp>
+      </p:grpSp>
+      <p:grpSp>
+        <p:nvGrpSpPr>
+          <p:cNvPr id="62" name="Grupo 61">
+            <a:extLst>
+              <a:ext uri="{FF2B5EF4-FFF2-40B4-BE49-F238E27FC236}">
+                <a16:creationId xmlns:a16="http://schemas.microsoft.com/office/drawing/2014/main" id="{FD6EA05B-565E-2044-1FBB-F19A29B8DBD5}"/>
+              </a:ext>
+            </a:extLst>
+          </p:cNvPr>
+          <p:cNvGrpSpPr/>
+          <p:nvPr/>
+        </p:nvGrpSpPr>
+        <p:grpSpPr>
+          <a:xfrm>
+            <a:off x="177352" y="3002801"/>
+            <a:ext cx="3826817" cy="2085825"/>
+            <a:chOff x="4182624" y="3311364"/>
+            <a:chExt cx="3826817" cy="2085825"/>
+          </a:xfrm>
+        </p:grpSpPr>
+        <p:sp>
+          <p:nvSpPr>
+            <p:cNvPr id="63" name="Rectángulo 62">
+              <a:extLst>
+                <a:ext uri="{FF2B5EF4-FFF2-40B4-BE49-F238E27FC236}">
+                  <a16:creationId xmlns:a16="http://schemas.microsoft.com/office/drawing/2014/main" id="{50405F49-8194-66DC-4A73-451F531198B2}"/>
+                </a:ext>
+              </a:extLst>
+            </p:cNvPr>
+            <p:cNvSpPr/>
+            <p:nvPr/>
+          </p:nvSpPr>
+          <p:spPr>
+            <a:xfrm>
+              <a:off x="6164551" y="3311364"/>
+              <a:ext cx="627126" cy="882387"/>
+            </a:xfrm>
+            <a:prstGeom prst="rect">
+              <a:avLst/>
+            </a:prstGeom>
+            <a:solidFill>
+              <a:schemeClr val="bg2">
+                <a:lumMod val="90000"/>
+              </a:schemeClr>
+            </a:solidFill>
+          </p:spPr>
+          <p:style>
+            <a:lnRef idx="2">
+              <a:schemeClr val="accent1">
+                <a:shade val="15000"/>
+              </a:schemeClr>
+            </a:lnRef>
+            <a:fillRef idx="1">
+              <a:schemeClr val="accent1"/>
+            </a:fillRef>
+            <a:effectRef idx="0">
+              <a:schemeClr val="accent1"/>
+            </a:effectRef>
+            <a:fontRef idx="minor">
+              <a:schemeClr val="lt1"/>
+            </a:fontRef>
+          </p:style>
+          <p:txBody>
+            <a:bodyPr rtlCol="0" anchor="ctr"/>
+            <a:lstStyle/>
+            <a:p>
+              <a:pPr algn="ctr"/>
+              <a:endParaRPr lang="es-ES" dirty="0"/>
+            </a:p>
+          </p:txBody>
+        </p:sp>
+        <p:sp>
+          <p:nvSpPr>
+            <p:cNvPr id="64" name="Rectángulo 63">
+              <a:extLst>
+                <a:ext uri="{FF2B5EF4-FFF2-40B4-BE49-F238E27FC236}">
+                  <a16:creationId xmlns:a16="http://schemas.microsoft.com/office/drawing/2014/main" id="{4D8A38A6-C060-2F6F-41AB-1551509148A9}"/>
+                </a:ext>
+              </a:extLst>
+            </p:cNvPr>
+            <p:cNvSpPr/>
+            <p:nvPr/>
+          </p:nvSpPr>
+          <p:spPr>
+            <a:xfrm>
+              <a:off x="6017856" y="3425738"/>
+              <a:ext cx="627126" cy="882387"/>
+            </a:xfrm>
+            <a:prstGeom prst="rect">
+              <a:avLst/>
+            </a:prstGeom>
+            <a:solidFill>
+              <a:schemeClr val="bg2">
+                <a:lumMod val="90000"/>
+              </a:schemeClr>
+            </a:solidFill>
+          </p:spPr>
+          <p:style>
+            <a:lnRef idx="2">
+              <a:schemeClr val="accent1">
+                <a:shade val="15000"/>
+              </a:schemeClr>
+            </a:lnRef>
+            <a:fillRef idx="1">
+              <a:schemeClr val="accent1"/>
+            </a:fillRef>
+            <a:effectRef idx="0">
+              <a:schemeClr val="accent1"/>
+            </a:effectRef>
+            <a:fontRef idx="minor">
+              <a:schemeClr val="lt1"/>
+            </a:fontRef>
+          </p:style>
+          <p:txBody>
+            <a:bodyPr rtlCol="0" anchor="ctr"/>
+            <a:lstStyle/>
+            <a:p>
+              <a:pPr algn="ctr"/>
+              <a:endParaRPr lang="es-ES" dirty="0"/>
+            </a:p>
+          </p:txBody>
+        </p:sp>
+        <p:grpSp>
+          <p:nvGrpSpPr>
+            <p:cNvPr id="65" name="Grupo 64">
+              <a:extLst>
+                <a:ext uri="{FF2B5EF4-FFF2-40B4-BE49-F238E27FC236}">
+                  <a16:creationId xmlns:a16="http://schemas.microsoft.com/office/drawing/2014/main" id="{DD16FBF9-B305-D1B6-A097-E262F67E428A}"/>
+                </a:ext>
+              </a:extLst>
+            </p:cNvPr>
+            <p:cNvGrpSpPr/>
+            <p:nvPr/>
+          </p:nvGrpSpPr>
+          <p:grpSpPr>
+            <a:xfrm>
+              <a:off x="4182624" y="3540112"/>
+              <a:ext cx="3826817" cy="1857077"/>
+              <a:chOff x="777504" y="1307911"/>
+              <a:chExt cx="3826817" cy="1857077"/>
+            </a:xfrm>
+          </p:grpSpPr>
+          <p:grpSp>
+            <p:nvGrpSpPr>
+              <p:cNvPr id="66" name="Grupo 65">
+                <a:extLst>
+                  <a:ext uri="{FF2B5EF4-FFF2-40B4-BE49-F238E27FC236}">
+                    <a16:creationId xmlns:a16="http://schemas.microsoft.com/office/drawing/2014/main" id="{FBD5B220-C9A6-69C0-3201-59A48BC93347}"/>
+                  </a:ext>
+                </a:extLst>
+              </p:cNvPr>
+              <p:cNvGrpSpPr/>
+              <p:nvPr/>
+            </p:nvGrpSpPr>
+            <p:grpSpPr>
+              <a:xfrm>
+                <a:off x="2288562" y="1307911"/>
+                <a:ext cx="804605" cy="882387"/>
+                <a:chOff x="2100116" y="1161875"/>
+                <a:chExt cx="1070929" cy="1174458"/>
+              </a:xfrm>
+            </p:grpSpPr>
+            <p:sp>
+              <p:nvSpPr>
+                <p:cNvPr id="68" name="Rectángulo 67">
+                  <a:extLst>
+                    <a:ext uri="{FF2B5EF4-FFF2-40B4-BE49-F238E27FC236}">
+                      <a16:creationId xmlns:a16="http://schemas.microsoft.com/office/drawing/2014/main" id="{91EC1B53-35D1-5A36-F0E0-9ACF59A07FEA}"/>
+                    </a:ext>
+                  </a:extLst>
+                </p:cNvPr>
+                <p:cNvSpPr/>
+                <p:nvPr/>
+              </p:nvSpPr>
+              <p:spPr>
+                <a:xfrm>
+                  <a:off x="2336341" y="1161875"/>
+                  <a:ext cx="834704" cy="1174458"/>
+                </a:xfrm>
+                <a:prstGeom prst="rect">
+                  <a:avLst/>
+                </a:prstGeom>
+                <a:solidFill>
+                  <a:schemeClr val="bg2">
+                    <a:lumMod val="90000"/>
+                  </a:schemeClr>
+                </a:solidFill>
+              </p:spPr>
+              <p:style>
+                <a:lnRef idx="2">
+                  <a:schemeClr val="accent1">
+                    <a:shade val="15000"/>
+                  </a:schemeClr>
+                </a:lnRef>
+                <a:fillRef idx="1">
+                  <a:schemeClr val="accent1"/>
+                </a:fillRef>
+                <a:effectRef idx="0">
+                  <a:schemeClr val="accent1"/>
+                </a:effectRef>
+                <a:fontRef idx="minor">
+                  <a:schemeClr val="lt1"/>
+                </a:fontRef>
+              </p:style>
+              <p:txBody>
+                <a:bodyPr rtlCol="0" anchor="ctr"/>
+                <a:lstStyle/>
+                <a:p>
+                  <a:pPr algn="ctr"/>
+                  <a:endParaRPr lang="es-ES"/>
+                </a:p>
+              </p:txBody>
+            </p:sp>
+            <p:sp>
+              <p:nvSpPr>
+                <p:cNvPr id="69" name="Elipse 68">
+                  <a:extLst>
+                    <a:ext uri="{FF2B5EF4-FFF2-40B4-BE49-F238E27FC236}">
+                      <a16:creationId xmlns:a16="http://schemas.microsoft.com/office/drawing/2014/main" id="{772CD5F7-44D0-849F-639B-DB8637B79D80}"/>
+                    </a:ext>
+                  </a:extLst>
+                </p:cNvPr>
+                <p:cNvSpPr/>
+                <p:nvPr/>
+              </p:nvSpPr>
+              <p:spPr>
+                <a:xfrm>
+                  <a:off x="2100116" y="1305718"/>
+                  <a:ext cx="644427" cy="211459"/>
+                </a:xfrm>
+                <a:prstGeom prst="ellipse">
+                  <a:avLst/>
+                </a:prstGeom>
+                <a:solidFill>
+                  <a:schemeClr val="bg1"/>
+                </a:solidFill>
+              </p:spPr>
+              <p:style>
+                <a:lnRef idx="2">
+                  <a:schemeClr val="accent1">
+                    <a:shade val="15000"/>
+                  </a:schemeClr>
+                </a:lnRef>
+                <a:fillRef idx="1">
+                  <a:schemeClr val="accent1"/>
+                </a:fillRef>
+                <a:effectRef idx="0">
+                  <a:schemeClr val="accent1"/>
+                </a:effectRef>
+                <a:fontRef idx="minor">
+                  <a:schemeClr val="lt1"/>
+                </a:fontRef>
+              </p:style>
+              <p:txBody>
+                <a:bodyPr rtlCol="0" anchor="ctr"/>
+                <a:lstStyle/>
+                <a:p>
+                  <a:pPr algn="ctr"/>
+                  <a:endParaRPr lang="es-ES"/>
+                </a:p>
+              </p:txBody>
+            </p:sp>
+            <p:sp>
+              <p:nvSpPr>
+                <p:cNvPr id="70" name="Rectángulo 69">
+                  <a:extLst>
+                    <a:ext uri="{FF2B5EF4-FFF2-40B4-BE49-F238E27FC236}">
+                      <a16:creationId xmlns:a16="http://schemas.microsoft.com/office/drawing/2014/main" id="{DF05BA91-7C0F-C66D-4F63-CEB8A44A1B53}"/>
+                    </a:ext>
+                  </a:extLst>
+                </p:cNvPr>
+                <p:cNvSpPr/>
+                <p:nvPr/>
+              </p:nvSpPr>
+              <p:spPr>
+                <a:xfrm>
+                  <a:off x="2100116" y="1639180"/>
+                  <a:ext cx="644427" cy="211459"/>
+                </a:xfrm>
+                <a:prstGeom prst="rect">
+                  <a:avLst/>
+                </a:prstGeom>
+                <a:solidFill>
+                  <a:schemeClr val="bg1"/>
+                </a:solidFill>
+              </p:spPr>
+              <p:style>
+                <a:lnRef idx="2">
+                  <a:schemeClr val="accent1">
+                    <a:shade val="15000"/>
+                  </a:schemeClr>
+                </a:lnRef>
+                <a:fillRef idx="1">
+                  <a:schemeClr val="accent1"/>
+                </a:fillRef>
+                <a:effectRef idx="0">
+                  <a:schemeClr val="accent1"/>
+                </a:effectRef>
+                <a:fontRef idx="minor">
+                  <a:schemeClr val="lt1"/>
+                </a:fontRef>
+              </p:style>
+              <p:txBody>
+                <a:bodyPr rtlCol="0" anchor="ctr"/>
+                <a:lstStyle/>
+                <a:p>
+                  <a:pPr algn="ctr"/>
+                  <a:endParaRPr lang="es-ES"/>
+                </a:p>
+              </p:txBody>
+            </p:sp>
+            <p:sp>
+              <p:nvSpPr>
+                <p:cNvPr id="71" name="Rectángulo 70">
+                  <a:extLst>
+                    <a:ext uri="{FF2B5EF4-FFF2-40B4-BE49-F238E27FC236}">
+                      <a16:creationId xmlns:a16="http://schemas.microsoft.com/office/drawing/2014/main" id="{CB4E953D-130F-A6E8-42CA-365AC9B27E14}"/>
+                    </a:ext>
+                  </a:extLst>
+                </p:cNvPr>
+                <p:cNvSpPr/>
+                <p:nvPr/>
+              </p:nvSpPr>
+              <p:spPr>
+                <a:xfrm>
+                  <a:off x="2100116" y="1972642"/>
+                  <a:ext cx="644427" cy="211459"/>
+                </a:xfrm>
+                <a:prstGeom prst="rect">
+                  <a:avLst/>
+                </a:prstGeom>
+                <a:solidFill>
+                  <a:schemeClr val="bg1"/>
+                </a:solidFill>
+              </p:spPr>
+              <p:style>
+                <a:lnRef idx="2">
+                  <a:schemeClr val="accent1">
+                    <a:shade val="15000"/>
+                  </a:schemeClr>
+                </a:lnRef>
+                <a:fillRef idx="1">
+                  <a:schemeClr val="accent1"/>
+                </a:fillRef>
+                <a:effectRef idx="0">
+                  <a:schemeClr val="accent1"/>
+                </a:effectRef>
+                <a:fontRef idx="minor">
+                  <a:schemeClr val="lt1"/>
+                </a:fontRef>
+              </p:style>
+              <p:txBody>
+                <a:bodyPr rtlCol="0" anchor="ctr"/>
+                <a:lstStyle/>
+                <a:p>
+                  <a:pPr algn="ctr"/>
+                  <a:endParaRPr lang="es-ES"/>
+                </a:p>
+              </p:txBody>
+            </p:sp>
+          </p:grpSp>
+          <p:sp>
+            <p:nvSpPr>
+              <p:cNvPr id="67" name="CuadroTexto 66">
+                <a:extLst>
+                  <a:ext uri="{FF2B5EF4-FFF2-40B4-BE49-F238E27FC236}">
+                    <a16:creationId xmlns:a16="http://schemas.microsoft.com/office/drawing/2014/main" id="{49D06E81-1EA3-2618-2350-F1CF844612F6}"/>
+                  </a:ext>
+                </a:extLst>
+              </p:cNvPr>
+              <p:cNvSpPr txBox="1"/>
+              <p:nvPr/>
+            </p:nvSpPr>
+            <p:spPr>
+              <a:xfrm>
+                <a:off x="777504" y="2210881"/>
+                <a:ext cx="3826817" cy="954107"/>
+              </a:xfrm>
+              <a:prstGeom prst="rect">
+                <a:avLst/>
+              </a:prstGeom>
+              <a:noFill/>
+            </p:spPr>
+            <p:txBody>
+              <a:bodyPr wrap="none" rtlCol="0">
+                <a:spAutoFit/>
+              </a:bodyPr>
+              <a:lstStyle/>
+              <a:p>
+                <a:pPr algn="ctr"/>
+                <a:r>
+                  <a:rPr lang="es-ES" sz="1400" b="1" dirty="0" err="1">
+                    <a:latin typeface="+mj-lt"/>
+                  </a:rPr>
+                  <a:t>archetypes</a:t>
+                </a:r>
+                <a:r>
+                  <a:rPr lang="es-ES" sz="1400" b="1" dirty="0">
+                    <a:latin typeface="+mj-lt"/>
+                  </a:rPr>
+                  <a:t>/general/glossary_item.xsl</a:t>
+                </a:r>
+              </a:p>
+              <a:p>
+                <a:pPr algn="ctr"/>
+                <a:r>
+                  <a:rPr lang="es-ES" sz="1400" dirty="0">
+                    <a:latin typeface="+mj-lt"/>
+                  </a:rPr>
+                  <a:t>Genera un &lt;</a:t>
+                </a:r>
+                <a:r>
+                  <a:rPr lang="es-ES" sz="1400" dirty="0" err="1">
+                    <a:latin typeface="+mj-lt"/>
+                  </a:rPr>
+                  <a:t>span</a:t>
+                </a:r>
+                <a:r>
+                  <a:rPr lang="es-ES" sz="1400" dirty="0">
+                    <a:latin typeface="+mj-lt"/>
+                  </a:rPr>
+                  <a:t> </a:t>
+                </a:r>
+                <a:r>
+                  <a:rPr lang="es-ES" sz="1400" dirty="0" err="1">
+                    <a:latin typeface="+mj-lt"/>
+                  </a:rPr>
+                  <a:t>class</a:t>
+                </a:r>
+                <a:r>
+                  <a:rPr lang="es-ES" sz="1400" dirty="0">
+                    <a:latin typeface="+mj-lt"/>
+                  </a:rPr>
+                  <a:t>=“</a:t>
+                </a:r>
+                <a:r>
+                  <a:rPr lang="es-ES" sz="1400" dirty="0" err="1">
+                    <a:latin typeface="+mj-lt"/>
+                  </a:rPr>
+                  <a:t>glo_name</a:t>
+                </a:r>
+                <a:r>
+                  <a:rPr lang="es-ES" sz="1400" dirty="0">
+                    <a:latin typeface="+mj-lt"/>
+                  </a:rPr>
+                  <a:t>”&gt; con el </a:t>
+                </a:r>
+              </a:p>
+              <a:p>
+                <a:pPr algn="ctr"/>
+                <a:r>
+                  <a:rPr lang="es-ES" sz="1400" dirty="0">
+                    <a:latin typeface="+mj-lt"/>
+                  </a:rPr>
+                  <a:t>nombre y el resto llamando a </a:t>
+                </a:r>
+                <a:r>
+                  <a:rPr lang="es-ES" sz="1400" dirty="0" err="1">
+                    <a:latin typeface="+mj-lt"/>
+                  </a:rPr>
+                  <a:t>generate_markdown</a:t>
+                </a:r>
+                <a:r>
+                  <a:rPr lang="es-ES" sz="1400" dirty="0">
+                    <a:latin typeface="+mj-lt"/>
+                  </a:rPr>
+                  <a:t>.</a:t>
+                </a:r>
+              </a:p>
+              <a:p>
+                <a:pPr algn="ctr"/>
+                <a:r>
+                  <a:rPr lang="es-ES" sz="1400" dirty="0">
+                    <a:latin typeface="+mj-lt"/>
+                  </a:rPr>
+                  <a:t>Si hay imagen, la añade en un &lt;</a:t>
+                </a:r>
+                <a:r>
+                  <a:rPr lang="es-ES" sz="1400" dirty="0" err="1">
+                    <a:latin typeface="+mj-lt"/>
+                  </a:rPr>
+                  <a:t>div</a:t>
+                </a:r>
+                <a:r>
+                  <a:rPr lang="es-ES" sz="1400" dirty="0">
+                    <a:latin typeface="+mj-lt"/>
+                  </a:rPr>
+                  <a:t>&gt;.</a:t>
+                </a:r>
+              </a:p>
+            </p:txBody>
+          </p:sp>
+        </p:grpSp>
+      </p:grpSp>
+    </p:spTree>
+    <p:extLst>
+      <p:ext uri="{BB962C8B-B14F-4D97-AF65-F5344CB8AC3E}">
+        <p14:creationId xmlns:p14="http://schemas.microsoft.com/office/powerpoint/2010/main" val="1693129321"/>
+      </p:ext>
+    </p:extLst>
+  </p:cSld>
+  <p:clrMapOvr>
+    <a:masterClrMapping/>
+  </p:clrMapOvr>
+</p:sld>
+</file>
+
 <file path=ppt/theme/theme1.xml><?xml version="1.0" encoding="utf-8"?>
 <a:theme xmlns:a="http://schemas.openxmlformats.org/drawingml/2006/main" name="Tema de Office">
   <a:themeElements>

--- a/documentation/Refactorización XLST.pptx
+++ b/documentation/Refactorización XLST.pptx
@@ -8,6 +8,7 @@
     <p:sldId id="257" r:id="rId2"/>
     <p:sldId id="258" r:id="rId3"/>
     <p:sldId id="259" r:id="rId4"/>
+    <p:sldId id="260" r:id="rId5"/>
   </p:sldIdLst>
   <p:sldSz cx="12192000" cy="6858000"/>
   <p:notesSz cx="6797675" cy="9872663"/>
@@ -826,7 +827,7 @@
           <a:p>
             <a:fld id="{93065D2E-367D-4F9D-9E24-4F44260CE426}" type="datetimeFigureOut">
               <a:rPr lang="es-ES" smtClean="0"/>
-              <a:t>09/09/2026</a:t>
+              <a:t>12/09/2026</a:t>
             </a:fld>
             <a:endParaRPr lang="es-ES"/>
           </a:p>
@@ -1024,7 +1025,7 @@
           <a:p>
             <a:fld id="{93065D2E-367D-4F9D-9E24-4F44260CE426}" type="datetimeFigureOut">
               <a:rPr lang="es-ES" smtClean="0"/>
-              <a:t>09/09/2026</a:t>
+              <a:t>12/09/2026</a:t>
             </a:fld>
             <a:endParaRPr lang="es-ES"/>
           </a:p>
@@ -1232,7 +1233,7 @@
           <a:p>
             <a:fld id="{93065D2E-367D-4F9D-9E24-4F44260CE426}" type="datetimeFigureOut">
               <a:rPr lang="es-ES" smtClean="0"/>
-              <a:t>09/09/2026</a:t>
+              <a:t>12/09/2026</a:t>
             </a:fld>
             <a:endParaRPr lang="es-ES"/>
           </a:p>
@@ -1430,7 +1431,7 @@
           <a:p>
             <a:fld id="{93065D2E-367D-4F9D-9E24-4F44260CE426}" type="datetimeFigureOut">
               <a:rPr lang="es-ES" smtClean="0"/>
-              <a:t>09/09/2026</a:t>
+              <a:t>12/09/2026</a:t>
             </a:fld>
             <a:endParaRPr lang="es-ES"/>
           </a:p>
@@ -1705,7 +1706,7 @@
           <a:p>
             <a:fld id="{93065D2E-367D-4F9D-9E24-4F44260CE426}" type="datetimeFigureOut">
               <a:rPr lang="es-ES" smtClean="0"/>
-              <a:t>09/09/2026</a:t>
+              <a:t>12/09/2026</a:t>
             </a:fld>
             <a:endParaRPr lang="es-ES"/>
           </a:p>
@@ -1970,7 +1971,7 @@
           <a:p>
             <a:fld id="{93065D2E-367D-4F9D-9E24-4F44260CE426}" type="datetimeFigureOut">
               <a:rPr lang="es-ES" smtClean="0"/>
-              <a:t>09/09/2026</a:t>
+              <a:t>12/09/2026</a:t>
             </a:fld>
             <a:endParaRPr lang="es-ES"/>
           </a:p>
@@ -2382,7 +2383,7 @@
           <a:p>
             <a:fld id="{93065D2E-367D-4F9D-9E24-4F44260CE426}" type="datetimeFigureOut">
               <a:rPr lang="es-ES" smtClean="0"/>
-              <a:t>09/09/2026</a:t>
+              <a:t>12/09/2026</a:t>
             </a:fld>
             <a:endParaRPr lang="es-ES"/>
           </a:p>
@@ -2523,7 +2524,7 @@
           <a:p>
             <a:fld id="{93065D2E-367D-4F9D-9E24-4F44260CE426}" type="datetimeFigureOut">
               <a:rPr lang="es-ES" smtClean="0"/>
-              <a:t>09/09/2026</a:t>
+              <a:t>12/09/2026</a:t>
             </a:fld>
             <a:endParaRPr lang="es-ES"/>
           </a:p>
@@ -2636,7 +2637,7 @@
           <a:p>
             <a:fld id="{93065D2E-367D-4F9D-9E24-4F44260CE426}" type="datetimeFigureOut">
               <a:rPr lang="es-ES" smtClean="0"/>
-              <a:t>09/09/2026</a:t>
+              <a:t>12/09/2026</a:t>
             </a:fld>
             <a:endParaRPr lang="es-ES"/>
           </a:p>
@@ -2947,7 +2948,7 @@
           <a:p>
             <a:fld id="{93065D2E-367D-4F9D-9E24-4F44260CE426}" type="datetimeFigureOut">
               <a:rPr lang="es-ES" smtClean="0"/>
-              <a:t>09/09/2026</a:t>
+              <a:t>12/09/2026</a:t>
             </a:fld>
             <a:endParaRPr lang="es-ES"/>
           </a:p>
@@ -3235,7 +3236,7 @@
           <a:p>
             <a:fld id="{93065D2E-367D-4F9D-9E24-4F44260CE426}" type="datetimeFigureOut">
               <a:rPr lang="es-ES" smtClean="0"/>
-              <a:t>09/09/2026</a:t>
+              <a:t>12/09/2026</a:t>
             </a:fld>
             <a:endParaRPr lang="es-ES"/>
           </a:p>
@@ -3476,7 +3477,7 @@
           <a:p>
             <a:fld id="{93065D2E-367D-4F9D-9E24-4F44260CE426}" type="datetimeFigureOut">
               <a:rPr lang="es-ES" smtClean="0"/>
-              <a:t>09/09/2026</a:t>
+              <a:t>12/09/2026</a:t>
             </a:fld>
             <a:endParaRPr lang="es-ES"/>
           </a:p>
@@ -10916,6 +10917,82 @@
 </p:sld>
 </file>
 
+<file path=ppt/slides/slide4.xml><?xml version="1.0" encoding="utf-8"?>
+<p:sld xmlns:a="http://schemas.openxmlformats.org/drawingml/2006/main" xmlns:r="http://schemas.openxmlformats.org/officeDocument/2006/relationships" xmlns:p="http://schemas.openxmlformats.org/presentationml/2006/main">
+  <p:cSld>
+    <p:spTree>
+      <p:nvGrpSpPr>
+        <p:cNvPr id="1" name=""/>
+        <p:cNvGrpSpPr/>
+        <p:nvPr/>
+      </p:nvGrpSpPr>
+      <p:grpSpPr>
+        <a:xfrm>
+          <a:off x="0" y="0"/>
+          <a:ext cx="0" cy="0"/>
+          <a:chOff x="0" y="0"/>
+          <a:chExt cx="0" cy="0"/>
+        </a:xfrm>
+      </p:grpSpPr>
+      <p:pic>
+        <p:nvPicPr>
+          <p:cNvPr id="3" name="Imagen 2">
+            <a:extLst>
+              <a:ext uri="{FF2B5EF4-FFF2-40B4-BE49-F238E27FC236}">
+                <a16:creationId xmlns:a16="http://schemas.microsoft.com/office/drawing/2014/main" id="{C67BD650-7DE6-4C6C-A08F-3FF0F345B8E1}"/>
+              </a:ext>
+            </a:extLst>
+          </p:cNvPr>
+          <p:cNvPicPr>
+            <a:picLocks noChangeAspect="1"/>
+          </p:cNvPicPr>
+          <p:nvPr/>
+        </p:nvPicPr>
+        <p:blipFill>
+          <a:blip r:embed="rId2">
+            <a:clrChange>
+              <a:clrFrom>
+                <a:srgbClr val="FFFFFF"/>
+              </a:clrFrom>
+              <a:clrTo>
+                <a:srgbClr val="FFFFFF">
+                  <a:alpha val="0"/>
+                </a:srgbClr>
+              </a:clrTo>
+            </a:clrChange>
+            <a:extLst>
+              <a:ext uri="{28A0092B-C50C-407E-A947-70E740481C1C}">
+                <a14:useLocalDpi xmlns:a14="http://schemas.microsoft.com/office/drawing/2010/main" val="0"/>
+              </a:ext>
+            </a:extLst>
+          </a:blip>
+          <a:stretch>
+            <a:fillRect/>
+          </a:stretch>
+        </p:blipFill>
+        <p:spPr>
+          <a:xfrm flipH="1">
+            <a:off x="3055559" y="1437997"/>
+            <a:ext cx="987517" cy="957731"/>
+          </a:xfrm>
+          <a:prstGeom prst="rect">
+            <a:avLst/>
+          </a:prstGeom>
+        </p:spPr>
+      </p:pic>
+    </p:spTree>
+    <p:extLst>
+      <p:ext uri="{BB962C8B-B14F-4D97-AF65-F5344CB8AC3E}">
+        <p14:creationId xmlns:p14="http://schemas.microsoft.com/office/powerpoint/2010/main" val="1278600191"/>
+      </p:ext>
+    </p:extLst>
+  </p:cSld>
+  <p:clrMapOvr>
+    <a:masterClrMapping/>
+  </p:clrMapOvr>
+</p:sld>
+</file>
+
 <file path=ppt/theme/theme1.xml><?xml version="1.0" encoding="utf-8"?>
 <a:theme xmlns:a="http://schemas.openxmlformats.org/drawingml/2006/main" name="Tema de Office">
   <a:themeElements>

--- a/documentation/Refactorización XLST.pptx
+++ b/documentation/Refactorización XLST.pptx
@@ -827,7 +827,7 @@
           <a:p>
             <a:fld id="{93065D2E-367D-4F9D-9E24-4F44260CE426}" type="datetimeFigureOut">
               <a:rPr lang="es-ES" smtClean="0"/>
-              <a:t>12/09/2026</a:t>
+              <a:t>13/09/2026</a:t>
             </a:fld>
             <a:endParaRPr lang="es-ES"/>
           </a:p>
@@ -1025,7 +1025,7 @@
           <a:p>
             <a:fld id="{93065D2E-367D-4F9D-9E24-4F44260CE426}" type="datetimeFigureOut">
               <a:rPr lang="es-ES" smtClean="0"/>
-              <a:t>12/09/2026</a:t>
+              <a:t>13/09/2026</a:t>
             </a:fld>
             <a:endParaRPr lang="es-ES"/>
           </a:p>
@@ -1233,7 +1233,7 @@
           <a:p>
             <a:fld id="{93065D2E-367D-4F9D-9E24-4F44260CE426}" type="datetimeFigureOut">
               <a:rPr lang="es-ES" smtClean="0"/>
-              <a:t>12/09/2026</a:t>
+              <a:t>13/09/2026</a:t>
             </a:fld>
             <a:endParaRPr lang="es-ES"/>
           </a:p>
@@ -1431,7 +1431,7 @@
           <a:p>
             <a:fld id="{93065D2E-367D-4F9D-9E24-4F44260CE426}" type="datetimeFigureOut">
               <a:rPr lang="es-ES" smtClean="0"/>
-              <a:t>12/09/2026</a:t>
+              <a:t>13/09/2026</a:t>
             </a:fld>
             <a:endParaRPr lang="es-ES"/>
           </a:p>
@@ -1706,7 +1706,7 @@
           <a:p>
             <a:fld id="{93065D2E-367D-4F9D-9E24-4F44260CE426}" type="datetimeFigureOut">
               <a:rPr lang="es-ES" smtClean="0"/>
-              <a:t>12/09/2026</a:t>
+              <a:t>13/09/2026</a:t>
             </a:fld>
             <a:endParaRPr lang="es-ES"/>
           </a:p>
@@ -1971,7 +1971,7 @@
           <a:p>
             <a:fld id="{93065D2E-367D-4F9D-9E24-4F44260CE426}" type="datetimeFigureOut">
               <a:rPr lang="es-ES" smtClean="0"/>
-              <a:t>12/09/2026</a:t>
+              <a:t>13/09/2026</a:t>
             </a:fld>
             <a:endParaRPr lang="es-ES"/>
           </a:p>
@@ -2383,7 +2383,7 @@
           <a:p>
             <a:fld id="{93065D2E-367D-4F9D-9E24-4F44260CE426}" type="datetimeFigureOut">
               <a:rPr lang="es-ES" smtClean="0"/>
-              <a:t>12/09/2026</a:t>
+              <a:t>13/09/2026</a:t>
             </a:fld>
             <a:endParaRPr lang="es-ES"/>
           </a:p>
@@ -2524,7 +2524,7 @@
           <a:p>
             <a:fld id="{93065D2E-367D-4F9D-9E24-4F44260CE426}" type="datetimeFigureOut">
               <a:rPr lang="es-ES" smtClean="0"/>
-              <a:t>12/09/2026</a:t>
+              <a:t>13/09/2026</a:t>
             </a:fld>
             <a:endParaRPr lang="es-ES"/>
           </a:p>
@@ -2637,7 +2637,7 @@
           <a:p>
             <a:fld id="{93065D2E-367D-4F9D-9E24-4F44260CE426}" type="datetimeFigureOut">
               <a:rPr lang="es-ES" smtClean="0"/>
-              <a:t>12/09/2026</a:t>
+              <a:t>13/09/2026</a:t>
             </a:fld>
             <a:endParaRPr lang="es-ES"/>
           </a:p>
@@ -2948,7 +2948,7 @@
           <a:p>
             <a:fld id="{93065D2E-367D-4F9D-9E24-4F44260CE426}" type="datetimeFigureOut">
               <a:rPr lang="es-ES" smtClean="0"/>
-              <a:t>12/09/2026</a:t>
+              <a:t>13/09/2026</a:t>
             </a:fld>
             <a:endParaRPr lang="es-ES"/>
           </a:p>
@@ -3236,7 +3236,7 @@
           <a:p>
             <a:fld id="{93065D2E-367D-4F9D-9E24-4F44260CE426}" type="datetimeFigureOut">
               <a:rPr lang="es-ES" smtClean="0"/>
-              <a:t>12/09/2026</a:t>
+              <a:t>13/09/2026</a:t>
             </a:fld>
             <a:endParaRPr lang="es-ES"/>
           </a:p>
@@ -3477,7 +3477,7 @@
           <a:p>
             <a:fld id="{93065D2E-367D-4F9D-9E24-4F44260CE426}" type="datetimeFigureOut">
               <a:rPr lang="es-ES" smtClean="0"/>
-              <a:t>12/09/2026</a:t>
+              <a:t>13/09/2026</a:t>
             </a:fld>
             <a:endParaRPr lang="es-ES"/>
           </a:p>
@@ -10936,6 +10936,66 @@
       </p:grpSpPr>
       <p:pic>
         <p:nvPicPr>
+          <p:cNvPr id="4" name="Imagen 3">
+            <a:extLst>
+              <a:ext uri="{FF2B5EF4-FFF2-40B4-BE49-F238E27FC236}">
+                <a16:creationId xmlns:a16="http://schemas.microsoft.com/office/drawing/2014/main" id="{AD8A2F39-A04F-8F57-6E10-6FD7ADE09F20}"/>
+              </a:ext>
+            </a:extLst>
+          </p:cNvPr>
+          <p:cNvPicPr>
+            <a:picLocks noChangeAspect="1"/>
+          </p:cNvPicPr>
+          <p:nvPr/>
+        </p:nvPicPr>
+        <p:blipFill>
+          <a:blip r:embed="rId2"/>
+          <a:stretch>
+            <a:fillRect/>
+          </a:stretch>
+        </p:blipFill>
+        <p:spPr>
+          <a:xfrm>
+            <a:off x="3347215" y="376547"/>
+            <a:ext cx="8192643" cy="3467584"/>
+          </a:xfrm>
+          <a:prstGeom prst="rect">
+            <a:avLst/>
+          </a:prstGeom>
+        </p:spPr>
+      </p:pic>
+      <p:pic>
+        <p:nvPicPr>
+          <p:cNvPr id="6" name="Imagen 5">
+            <a:extLst>
+              <a:ext uri="{FF2B5EF4-FFF2-40B4-BE49-F238E27FC236}">
+                <a16:creationId xmlns:a16="http://schemas.microsoft.com/office/drawing/2014/main" id="{758A630B-8337-EE3B-85B4-9B0B4475F8D2}"/>
+              </a:ext>
+            </a:extLst>
+          </p:cNvPr>
+          <p:cNvPicPr>
+            <a:picLocks noChangeAspect="1"/>
+          </p:cNvPicPr>
+          <p:nvPr/>
+        </p:nvPicPr>
+        <p:blipFill>
+          <a:blip r:embed="rId3"/>
+          <a:stretch>
+            <a:fillRect/>
+          </a:stretch>
+        </p:blipFill>
+        <p:spPr>
+          <a:xfrm>
+            <a:off x="1723198" y="4076138"/>
+            <a:ext cx="8240275" cy="2286319"/>
+          </a:xfrm>
+          <a:prstGeom prst="rect">
+            <a:avLst/>
+          </a:prstGeom>
+        </p:spPr>
+      </p:pic>
+      <p:pic>
+        <p:nvPicPr>
           <p:cNvPr id="3" name="Imagen 2">
             <a:extLst>
               <a:ext uri="{FF2B5EF4-FFF2-40B4-BE49-F238E27FC236}">
@@ -10949,7 +11009,7 @@
           <p:nvPr/>
         </p:nvPicPr>
         <p:blipFill>
-          <a:blip r:embed="rId2">
+          <a:blip r:embed="rId4">
             <a:clrChange>
               <a:clrFrom>
                 <a:srgbClr val="FFFFFF"/>
@@ -10972,12 +11032,30 @@
         </p:blipFill>
         <p:spPr>
           <a:xfrm flipH="1">
-            <a:off x="3055559" y="1437997"/>
+            <a:off x="8694520" y="4261566"/>
             <a:ext cx="987517" cy="957731"/>
           </a:xfrm>
           <a:prstGeom prst="rect">
             <a:avLst/>
           </a:prstGeom>
+          <a:solidFill>
+            <a:schemeClr val="bg1"/>
+          </a:solidFill>
+          <a:ln>
+            <a:solidFill>
+              <a:schemeClr val="tx1">
+                <a:lumMod val="50000"/>
+                <a:lumOff val="50000"/>
+              </a:schemeClr>
+            </a:solidFill>
+          </a:ln>
+          <a:effectLst>
+            <a:outerShdw blurRad="50800" dist="38100" dir="2700000" algn="tl" rotWithShape="0">
+              <a:prstClr val="black">
+                <a:alpha val="40000"/>
+              </a:prstClr>
+            </a:outerShdw>
+          </a:effectLst>
         </p:spPr>
       </p:pic>
     </p:spTree>

--- a/documentation/Refactorización XLST.pptx
+++ b/documentation/Refactorización XLST.pptx
@@ -9,6 +9,7 @@
     <p:sldId id="258" r:id="rId3"/>
     <p:sldId id="259" r:id="rId4"/>
     <p:sldId id="260" r:id="rId5"/>
+    <p:sldId id="261" r:id="rId6"/>
   </p:sldIdLst>
   <p:sldSz cx="12192000" cy="6858000"/>
   <p:notesSz cx="6797675" cy="9872663"/>
@@ -827,7 +828,7 @@
           <a:p>
             <a:fld id="{93065D2E-367D-4F9D-9E24-4F44260CE426}" type="datetimeFigureOut">
               <a:rPr lang="es-ES" smtClean="0"/>
-              <a:t>13/09/2026</a:t>
+              <a:t>14/09/2026</a:t>
             </a:fld>
             <a:endParaRPr lang="es-ES"/>
           </a:p>
@@ -1025,7 +1026,7 @@
           <a:p>
             <a:fld id="{93065D2E-367D-4F9D-9E24-4F44260CE426}" type="datetimeFigureOut">
               <a:rPr lang="es-ES" smtClean="0"/>
-              <a:t>13/09/2026</a:t>
+              <a:t>14/09/2026</a:t>
             </a:fld>
             <a:endParaRPr lang="es-ES"/>
           </a:p>
@@ -1233,7 +1234,7 @@
           <a:p>
             <a:fld id="{93065D2E-367D-4F9D-9E24-4F44260CE426}" type="datetimeFigureOut">
               <a:rPr lang="es-ES" smtClean="0"/>
-              <a:t>13/09/2026</a:t>
+              <a:t>14/09/2026</a:t>
             </a:fld>
             <a:endParaRPr lang="es-ES"/>
           </a:p>
@@ -1431,7 +1432,7 @@
           <a:p>
             <a:fld id="{93065D2E-367D-4F9D-9E24-4F44260CE426}" type="datetimeFigureOut">
               <a:rPr lang="es-ES" smtClean="0"/>
-              <a:t>13/09/2026</a:t>
+              <a:t>14/09/2026</a:t>
             </a:fld>
             <a:endParaRPr lang="es-ES"/>
           </a:p>
@@ -1706,7 +1707,7 @@
           <a:p>
             <a:fld id="{93065D2E-367D-4F9D-9E24-4F44260CE426}" type="datetimeFigureOut">
               <a:rPr lang="es-ES" smtClean="0"/>
-              <a:t>13/09/2026</a:t>
+              <a:t>14/09/2026</a:t>
             </a:fld>
             <a:endParaRPr lang="es-ES"/>
           </a:p>
@@ -1971,7 +1972,7 @@
           <a:p>
             <a:fld id="{93065D2E-367D-4F9D-9E24-4F44260CE426}" type="datetimeFigureOut">
               <a:rPr lang="es-ES" smtClean="0"/>
-              <a:t>13/09/2026</a:t>
+              <a:t>14/09/2026</a:t>
             </a:fld>
             <a:endParaRPr lang="es-ES"/>
           </a:p>
@@ -2383,7 +2384,7 @@
           <a:p>
             <a:fld id="{93065D2E-367D-4F9D-9E24-4F44260CE426}" type="datetimeFigureOut">
               <a:rPr lang="es-ES" smtClean="0"/>
-              <a:t>13/09/2026</a:t>
+              <a:t>14/09/2026</a:t>
             </a:fld>
             <a:endParaRPr lang="es-ES"/>
           </a:p>
@@ -2524,7 +2525,7 @@
           <a:p>
             <a:fld id="{93065D2E-367D-4F9D-9E24-4F44260CE426}" type="datetimeFigureOut">
               <a:rPr lang="es-ES" smtClean="0"/>
-              <a:t>13/09/2026</a:t>
+              <a:t>14/09/2026</a:t>
             </a:fld>
             <a:endParaRPr lang="es-ES"/>
           </a:p>
@@ -2637,7 +2638,7 @@
           <a:p>
             <a:fld id="{93065D2E-367D-4F9D-9E24-4F44260CE426}" type="datetimeFigureOut">
               <a:rPr lang="es-ES" smtClean="0"/>
-              <a:t>13/09/2026</a:t>
+              <a:t>14/09/2026</a:t>
             </a:fld>
             <a:endParaRPr lang="es-ES"/>
           </a:p>
@@ -2948,7 +2949,7 @@
           <a:p>
             <a:fld id="{93065D2E-367D-4F9D-9E24-4F44260CE426}" type="datetimeFigureOut">
               <a:rPr lang="es-ES" smtClean="0"/>
-              <a:t>13/09/2026</a:t>
+              <a:t>14/09/2026</a:t>
             </a:fld>
             <a:endParaRPr lang="es-ES"/>
           </a:p>
@@ -3236,7 +3237,7 @@
           <a:p>
             <a:fld id="{93065D2E-367D-4F9D-9E24-4F44260CE426}" type="datetimeFigureOut">
               <a:rPr lang="es-ES" smtClean="0"/>
-              <a:t>13/09/2026</a:t>
+              <a:t>14/09/2026</a:t>
             </a:fld>
             <a:endParaRPr lang="es-ES"/>
           </a:p>
@@ -3477,7 +3478,7 @@
           <a:p>
             <a:fld id="{93065D2E-367D-4F9D-9E24-4F44260CE426}" type="datetimeFigureOut">
               <a:rPr lang="es-ES" smtClean="0"/>
-              <a:t>13/09/2026</a:t>
+              <a:t>14/09/2026</a:t>
             </a:fld>
             <a:endParaRPr lang="es-ES"/>
           </a:p>
@@ -3908,10 +3909,10 @@
         </p:nvGrpSpPr>
         <p:grpSpPr>
           <a:xfrm>
-            <a:off x="2643298" y="276463"/>
-            <a:ext cx="3634969" cy="1426190"/>
-            <a:chOff x="873387" y="1307911"/>
-            <a:chExt cx="3634969" cy="1426190"/>
+            <a:off x="3403922" y="276463"/>
+            <a:ext cx="2113720" cy="1641634"/>
+            <a:chOff x="1634011" y="1307911"/>
+            <a:chExt cx="2113720" cy="1641634"/>
           </a:xfrm>
         </p:grpSpPr>
         <p:grpSp>
@@ -4147,8 +4148,8 @@
           </p:nvSpPr>
           <p:spPr>
             <a:xfrm>
-              <a:off x="873387" y="2210881"/>
-              <a:ext cx="3634969" cy="523220"/>
+              <a:off x="1634011" y="2210881"/>
+              <a:ext cx="2113720" cy="738664"/>
             </a:xfrm>
             <a:prstGeom prst="rect">
               <a:avLst/>
@@ -4175,7 +4176,16 @@
                 <a:rPr lang="es-ES" sz="1400" dirty="0">
                   <a:latin typeface="+mj-lt"/>
                 </a:rPr>
-                <a:t>(uno por idioma, sólo incluye a los dos archivos)</a:t>
+                <a:t>(uno por idioma, sólo</a:t>
+              </a:r>
+            </a:p>
+            <a:p>
+              <a:pPr algn="ctr"/>
+              <a:r>
+                <a:rPr lang="es-ES" sz="1400" dirty="0">
+                  <a:latin typeface="+mj-lt"/>
+                </a:rPr>
+                <a:t>incluye a los dos archivos)</a:t>
               </a:r>
             </a:p>
           </p:txBody>
@@ -4195,10 +4205,10 @@
         </p:nvGrpSpPr>
         <p:grpSpPr>
           <a:xfrm>
-            <a:off x="25473" y="941432"/>
-            <a:ext cx="3780651" cy="1641634"/>
-            <a:chOff x="800552" y="1307911"/>
-            <a:chExt cx="3780651" cy="1641634"/>
+            <a:off x="450654" y="941432"/>
+            <a:ext cx="2930289" cy="1857077"/>
+            <a:chOff x="1225733" y="1307911"/>
+            <a:chExt cx="2930289" cy="1857077"/>
           </a:xfrm>
         </p:grpSpPr>
         <p:grpSp>
@@ -4434,8 +4444,8 @@
           </p:nvSpPr>
           <p:spPr>
             <a:xfrm>
-              <a:off x="800552" y="2210881"/>
-              <a:ext cx="3780651" cy="738664"/>
+              <a:off x="1225733" y="2210881"/>
+              <a:ext cx="2930289" cy="954107"/>
             </a:xfrm>
             <a:prstGeom prst="rect">
               <a:avLst/>
@@ -4462,7 +4472,16 @@
                 <a:rPr lang="es-ES" sz="1400" dirty="0">
                   <a:latin typeface="+mj-lt"/>
                 </a:rPr>
-                <a:t>(uno por idioma, traduce todas las variables XSLT)</a:t>
+                <a:t>(uno por idioma, traduce </a:t>
+              </a:r>
+            </a:p>
+            <a:p>
+              <a:pPr algn="ctr"/>
+              <a:r>
+                <a:rPr lang="es-ES" sz="1400" dirty="0">
+                  <a:latin typeface="+mj-lt"/>
+                </a:rPr>
+                <a:t>todas las variables XSLT)</a:t>
               </a:r>
               <a:endParaRPr lang="es-ES" sz="1400" b="1" dirty="0">
                 <a:latin typeface="+mj-lt"/>
@@ -4773,9 +4792,9 @@
         <p:grpSpPr>
           <a:xfrm>
             <a:off x="2330323" y="3149273"/>
-            <a:ext cx="3341941" cy="2301269"/>
+            <a:ext cx="3341941" cy="2516713"/>
             <a:chOff x="4425036" y="3311364"/>
-            <a:chExt cx="3341941" cy="2301269"/>
+            <a:chExt cx="3341941" cy="2516713"/>
           </a:xfrm>
         </p:grpSpPr>
         <p:sp>
@@ -4895,9 +4914,9 @@
           <p:grpSpPr>
             <a:xfrm>
               <a:off x="4425036" y="3540112"/>
-              <a:ext cx="3341941" cy="2072521"/>
+              <a:ext cx="3341941" cy="2287965"/>
               <a:chOff x="1019916" y="1307911"/>
-              <a:chExt cx="3341941" cy="2072521"/>
+              <a:chExt cx="3341941" cy="2287965"/>
             </a:xfrm>
           </p:grpSpPr>
           <p:grpSp>
@@ -5134,7 +5153,7 @@
             <p:spPr>
               <a:xfrm>
                 <a:off x="1019916" y="2210881"/>
-                <a:ext cx="3341941" cy="1169551"/>
+                <a:ext cx="3341941" cy="1384995"/>
               </a:xfrm>
               <a:prstGeom prst="rect">
                 <a:avLst/>
@@ -5146,6 +5165,21 @@
                 <a:spAutoFit/>
               </a:bodyPr>
               <a:lstStyle/>
+              <a:p>
+                <a:pPr algn="ctr"/>
+                <a:r>
+                  <a:rPr lang="es-ES" sz="1400" dirty="0" err="1">
+                    <a:latin typeface="+mj-lt"/>
+                  </a:rPr>
+                  <a:t>labels</a:t>
+                </a:r>
+                <a:r>
+                  <a:rPr lang="es-ES" sz="1400" dirty="0">
+                    <a:latin typeface="+mj-lt"/>
+                  </a:rPr>
+                  <a:t>/class_labels.xsl</a:t>
+                </a:r>
+              </a:p>
               <a:p>
                 <a:pPr algn="ctr"/>
                 <a:r>
@@ -5231,8 +5265,8 @@
         </p:nvCxnSpPr>
         <p:spPr>
           <a:xfrm rot="10800000">
-            <a:off x="1915799" y="2583067"/>
-            <a:ext cx="1683170" cy="1232997"/>
+            <a:off x="1915799" y="2798509"/>
+            <a:ext cx="1683170" cy="1017554"/>
           </a:xfrm>
           <a:prstGeom prst="curvedConnector2">
             <a:avLst/>
@@ -5277,10 +5311,10 @@
         </p:nvGrpSpPr>
         <p:grpSpPr>
           <a:xfrm>
-            <a:off x="5977284" y="3136744"/>
-            <a:ext cx="1549975" cy="2085825"/>
-            <a:chOff x="5321017" y="3311364"/>
-            <a:chExt cx="1549975" cy="2085825"/>
+            <a:off x="5697086" y="3228184"/>
+            <a:ext cx="1872629" cy="2301269"/>
+            <a:chOff x="5159691" y="3311364"/>
+            <a:chExt cx="1872629" cy="2301269"/>
           </a:xfrm>
         </p:grpSpPr>
         <p:sp>
@@ -5399,10 +5433,10 @@
           </p:nvGrpSpPr>
           <p:grpSpPr>
             <a:xfrm>
-              <a:off x="5321017" y="3540112"/>
-              <a:ext cx="1549975" cy="1857077"/>
-              <a:chOff x="1915897" y="1307911"/>
-              <a:chExt cx="1549975" cy="1857077"/>
+              <a:off x="5159691" y="3540112"/>
+              <a:ext cx="1872629" cy="2072521"/>
+              <a:chOff x="1754571" y="1307911"/>
+              <a:chExt cx="1872629" cy="2072521"/>
             </a:xfrm>
           </p:grpSpPr>
           <p:grpSp>
@@ -5638,8 +5672,8 @@
             </p:nvSpPr>
             <p:spPr>
               <a:xfrm>
-                <a:off x="1915897" y="2210881"/>
-                <a:ext cx="1549975" cy="954107"/>
+                <a:off x="1754571" y="2210881"/>
+                <a:ext cx="1872629" cy="1169551"/>
               </a:xfrm>
               <a:prstGeom prst="rect">
                 <a:avLst/>
@@ -5709,6 +5743,21 @@
                     <a:latin typeface="+mj-lt"/>
                   </a:rPr>
                   <a:t>/cover.xsl</a:t>
+                </a:r>
+              </a:p>
+              <a:p>
+                <a:pPr algn="ctr"/>
+                <a:r>
+                  <a:rPr lang="es-ES" sz="1400" dirty="0" err="1">
+                    <a:latin typeface="+mj-lt"/>
+                  </a:rPr>
+                  <a:t>core</a:t>
+                </a:r>
+                <a:r>
+                  <a:rPr lang="es-ES" sz="1400" dirty="0">
+                    <a:latin typeface="+mj-lt"/>
+                  </a:rPr>
+                  <a:t>/generate_table.xsl</a:t>
                 </a:r>
               </a:p>
             </p:txBody>
@@ -5799,8 +5848,8 @@
           </p:nvSpPr>
           <p:spPr>
             <a:xfrm rot="20451329">
-              <a:off x="2684395" y="778370"/>
-              <a:ext cx="885179" cy="276999"/>
+              <a:off x="2610657" y="778370"/>
+              <a:ext cx="1032655" cy="276999"/>
             </a:xfrm>
             <a:prstGeom prst="rect">
               <a:avLst/>
@@ -5823,7 +5872,7 @@
               </a:r>
               <a:r>
                 <a:rPr lang="es-ES" sz="1200" dirty="0"/>
-                <a:t>»</a:t>
+                <a:t>» ①</a:t>
               </a:r>
             </a:p>
           </p:txBody>
@@ -5913,8 +5962,8 @@
           </p:nvSpPr>
           <p:spPr>
             <a:xfrm rot="1017362">
-              <a:off x="5334729" y="735499"/>
-              <a:ext cx="917239" cy="276999"/>
+              <a:off x="5277021" y="735499"/>
+              <a:ext cx="1032655" cy="276999"/>
             </a:xfrm>
             <a:prstGeom prst="rect">
               <a:avLst/>
@@ -5937,7 +5986,7 @@
               </a:r>
               <a:r>
                 <a:rPr lang="es-ES" sz="1200" dirty="0"/>
-                <a:t>»</a:t>
+                <a:t>» ②</a:t>
               </a:r>
             </a:p>
           </p:txBody>
@@ -6027,8 +6076,8 @@
           </p:nvSpPr>
           <p:spPr>
             <a:xfrm rot="19857530">
-              <a:off x="5406143" y="2613941"/>
-              <a:ext cx="917239" cy="276999"/>
+              <a:off x="5348435" y="2613941"/>
+              <a:ext cx="1032655" cy="276999"/>
             </a:xfrm>
             <a:prstGeom prst="rect">
               <a:avLst/>
@@ -6051,7 +6100,7 @@
               </a:r>
               <a:r>
                 <a:rPr lang="es-ES" sz="1200" dirty="0"/>
-                <a:t>»</a:t>
+                <a:t>» ①</a:t>
               </a:r>
             </a:p>
           </p:txBody>
@@ -6114,10 +6163,10 @@
         </p:nvGrpSpPr>
         <p:grpSpPr>
           <a:xfrm>
-            <a:off x="7630309" y="3141653"/>
-            <a:ext cx="3048527" cy="3593931"/>
-            <a:chOff x="4571744" y="3311364"/>
-            <a:chExt cx="3048527" cy="3593931"/>
+            <a:off x="7844427" y="2681538"/>
+            <a:ext cx="3426579" cy="4024818"/>
+            <a:chOff x="4382720" y="3311364"/>
+            <a:chExt cx="3426579" cy="4024818"/>
           </a:xfrm>
         </p:grpSpPr>
         <p:sp>
@@ -6236,10 +6285,10 @@
           </p:nvGrpSpPr>
           <p:grpSpPr>
             <a:xfrm>
-              <a:off x="4571744" y="3540112"/>
-              <a:ext cx="3048527" cy="3365183"/>
-              <a:chOff x="1166624" y="1307911"/>
-              <a:chExt cx="3048527" cy="3365183"/>
+              <a:off x="4382720" y="3540112"/>
+              <a:ext cx="3426579" cy="3796070"/>
+              <a:chOff x="977600" y="1307911"/>
+              <a:chExt cx="3426579" cy="3796070"/>
             </a:xfrm>
           </p:grpSpPr>
           <p:grpSp>
@@ -6475,8 +6524,8 @@
             </p:nvSpPr>
             <p:spPr>
               <a:xfrm>
-                <a:off x="1166624" y="2210881"/>
-                <a:ext cx="3048527" cy="2462213"/>
+                <a:off x="977600" y="2210881"/>
+                <a:ext cx="3426579" cy="2893100"/>
               </a:xfrm>
               <a:prstGeom prst="rect">
                 <a:avLst/>
@@ -6545,14 +6594,11 @@
                 </a:r>
                 <a:r>
                   <a:rPr lang="es-ES" sz="1400" dirty="0"/>
-                  <a:t>/general/</a:t>
-                </a:r>
-                <a:r>
-                  <a:rPr lang="es-ES" sz="1400" dirty="0">
-                    <a:latin typeface="+mj-lt"/>
-                  </a:rPr>
-                  <a:t>glossary_item.xsl</a:t>
-                </a:r>
+                  <a:t>/general/comment.xsl</a:t>
+                </a:r>
+                <a:endParaRPr lang="es-ES" sz="1400" dirty="0">
+                  <a:latin typeface="+mj-lt"/>
+                </a:endParaRPr>
               </a:p>
               <a:p>
                 <a:pPr algn="ctr"/>
@@ -6562,7 +6608,13 @@
                 </a:r>
                 <a:r>
                   <a:rPr lang="es-ES" sz="1400" dirty="0"/>
-                  <a:t>/general/figure.xsl</a:t>
+                  <a:t>/general/</a:t>
+                </a:r>
+                <a:r>
+                  <a:rPr lang="es-ES" sz="1400" dirty="0">
+                    <a:latin typeface="+mj-lt"/>
+                  </a:rPr>
+                  <a:t>glossary_item.xsl</a:t>
                 </a:r>
               </a:p>
               <a:p>
@@ -6573,7 +6625,7 @@
                 </a:r>
                 <a:r>
                   <a:rPr lang="es-ES" sz="1400" dirty="0"/>
-                  <a:t>/general/organization.xsl</a:t>
+                  <a:t>/general/bibliography_item.xsl</a:t>
                 </a:r>
               </a:p>
               <a:p>
@@ -6584,7 +6636,7 @@
                 </a:r>
                 <a:r>
                   <a:rPr lang="es-ES" sz="1400" dirty="0"/>
-                  <a:t>/general/stakeholder.xsl</a:t>
+                  <a:t>/general/figure.xsl</a:t>
                 </a:r>
               </a:p>
               <a:p>
@@ -6595,7 +6647,7 @@
                 </a:r>
                 <a:r>
                   <a:rPr lang="es-ES" sz="1400" dirty="0"/>
-                  <a:t>/general/symbolic_link.xsl</a:t>
+                  <a:t>/general/organization.xsl</a:t>
                 </a:r>
               </a:p>
               <a:p>
@@ -6606,25 +6658,51 @@
                 </a:r>
                 <a:r>
                   <a:rPr lang="es-ES" sz="1400" dirty="0"/>
-                  <a:t>/default.xsl</a:t>
+                  <a:t>/general/stakeholder.xsl</a:t>
                 </a:r>
               </a:p>
               <a:p>
                 <a:pPr algn="ctr"/>
                 <a:r>
-                  <a:rPr lang="es-ES" sz="1400" dirty="0">
-                    <a:latin typeface="+mj-lt"/>
-                  </a:rPr>
-                  <a:t>(HTML para arquetipos generales)</a:t>
+                  <a:rPr lang="es-ES" sz="1400" dirty="0" err="1"/>
+                  <a:t>archetypes</a:t>
+                </a:r>
+                <a:r>
+                  <a:rPr lang="es-ES" sz="1400" dirty="0"/>
+                  <a:t>/general/meeting.xsl</a:t>
                 </a:r>
               </a:p>
               <a:p>
                 <a:pPr algn="ctr"/>
                 <a:r>
-                  <a:rPr lang="es-ES" sz="1400" b="1" dirty="0">
-                    <a:latin typeface="+mj-lt"/>
-                  </a:rPr>
-                  <a:t>Falta la matriz de trazabilidad</a:t>
+                  <a:rPr lang="es-ES" sz="1400" dirty="0" err="1"/>
+                  <a:t>archetypes</a:t>
+                </a:r>
+                <a:r>
+                  <a:rPr lang="es-ES" sz="1400" dirty="0"/>
+                  <a:t>/general/traceability_matrix.xsl</a:t>
+                </a:r>
+              </a:p>
+              <a:p>
+                <a:pPr algn="ctr"/>
+                <a:r>
+                  <a:rPr lang="es-ES" sz="1400" dirty="0" err="1"/>
+                  <a:t>archetypes</a:t>
+                </a:r>
+                <a:r>
+                  <a:rPr lang="es-ES" sz="1400" dirty="0"/>
+                  <a:t>/general/symbolic_link.xsl</a:t>
+                </a:r>
+              </a:p>
+              <a:p>
+                <a:pPr algn="ctr"/>
+                <a:r>
+                  <a:rPr lang="es-ES" sz="1400" dirty="0" err="1"/>
+                  <a:t>archetypes</a:t>
+                </a:r>
+                <a:r>
+                  <a:rPr lang="es-ES" sz="1400" dirty="0"/>
+                  <a:t>/any_archetype.xsl</a:t>
                 </a:r>
               </a:p>
             </p:txBody>
@@ -6645,10 +6723,10 @@
         </p:nvGrpSpPr>
         <p:grpSpPr>
           <a:xfrm>
-            <a:off x="6872532" y="2152180"/>
-            <a:ext cx="344771" cy="984565"/>
-            <a:chOff x="3630531" y="3106613"/>
-            <a:chExt cx="366962" cy="859309"/>
+            <a:off x="6837828" y="2152180"/>
+            <a:ext cx="379448" cy="1076005"/>
+            <a:chOff x="3593621" y="3106617"/>
+            <a:chExt cx="403874" cy="939117"/>
           </a:xfrm>
         </p:grpSpPr>
         <p:cxnSp>
@@ -6669,8 +6747,8 @@
           </p:nvCxnSpPr>
           <p:spPr>
             <a:xfrm flipH="1">
-              <a:off x="3909236" y="3106613"/>
-              <a:ext cx="88257" cy="859309"/>
+              <a:off x="3782715" y="3106617"/>
+              <a:ext cx="214780" cy="939117"/>
             </a:xfrm>
             <a:prstGeom prst="straightConnector1">
               <a:avLst/>
@@ -6714,9 +6792,9 @@
             <p:nvPr/>
           </p:nvSpPr>
           <p:spPr>
-            <a:xfrm rot="16438953">
-              <a:off x="3423359" y="3382945"/>
-              <a:ext cx="752144" cy="337799"/>
+            <a:xfrm rot="16770414">
+              <a:off x="3290395" y="3444334"/>
+              <a:ext cx="901281" cy="294829"/>
             </a:xfrm>
             <a:prstGeom prst="rect">
               <a:avLst/>
@@ -6739,7 +6817,7 @@
               </a:r>
               <a:r>
                 <a:rPr lang="es-ES" sz="1200" dirty="0"/>
-                <a:t>»</a:t>
+                <a:t>» ②</a:t>
               </a:r>
             </a:p>
           </p:txBody>
@@ -6759,10 +6837,10 @@
         </p:nvGrpSpPr>
         <p:grpSpPr>
           <a:xfrm>
-            <a:off x="7217301" y="2152181"/>
-            <a:ext cx="2319378" cy="989475"/>
-            <a:chOff x="2303215" y="3192852"/>
-            <a:chExt cx="2468655" cy="863594"/>
+            <a:off x="7217301" y="2152179"/>
+            <a:ext cx="1938088" cy="1196149"/>
+            <a:chOff x="2303215" y="3192851"/>
+            <a:chExt cx="2062826" cy="1043975"/>
           </a:xfrm>
         </p:grpSpPr>
         <p:cxnSp>
@@ -6777,14 +6855,14 @@
             <p:cNvCxnSpPr>
               <a:cxnSpLocks/>
               <a:stCxn id="21" idx="2"/>
-              <a:endCxn id="75" idx="0"/>
+              <a:endCxn id="82" idx="1"/>
             </p:cNvCxnSpPr>
             <p:nvPr/>
           </p:nvCxnSpPr>
           <p:spPr>
             <a:xfrm>
-              <a:off x="2303215" y="3192852"/>
-              <a:ext cx="2468655" cy="863594"/>
+              <a:off x="2303215" y="3192851"/>
+              <a:ext cx="2062826" cy="1043975"/>
             </a:xfrm>
             <a:prstGeom prst="straightConnector1">
               <a:avLst/>
@@ -6828,9 +6906,9 @@
             <p:nvPr/>
           </p:nvSpPr>
           <p:spPr>
-            <a:xfrm rot="1403111">
-              <a:off x="3141104" y="3361681"/>
-              <a:ext cx="917244" cy="276997"/>
+            <a:xfrm rot="1875661">
+              <a:off x="2962574" y="3514971"/>
+              <a:ext cx="1099117" cy="241759"/>
             </a:xfrm>
             <a:prstGeom prst="rect">
               <a:avLst/>
@@ -6853,7 +6931,7 @@
               </a:r>
               <a:r>
                 <a:rPr lang="es-ES" sz="1200" dirty="0"/>
-                <a:t>»</a:t>
+                <a:t>» ③</a:t>
               </a:r>
             </a:p>
           </p:txBody>
@@ -11071,6 +11149,371 @@
 </p:sld>
 </file>
 
+<file path=ppt/slides/slide5.xml><?xml version="1.0" encoding="utf-8"?>
+<p:sld xmlns:a="http://schemas.openxmlformats.org/drawingml/2006/main" xmlns:r="http://schemas.openxmlformats.org/officeDocument/2006/relationships" xmlns:p="http://schemas.openxmlformats.org/presentationml/2006/main">
+  <p:cSld>
+    <p:spTree>
+      <p:nvGrpSpPr>
+        <p:cNvPr id="1" name=""/>
+        <p:cNvGrpSpPr/>
+        <p:nvPr/>
+      </p:nvGrpSpPr>
+      <p:grpSpPr>
+        <a:xfrm>
+          <a:off x="0" y="0"/>
+          <a:ext cx="0" cy="0"/>
+          <a:chOff x="0" y="0"/>
+          <a:chExt cx="0" cy="0"/>
+        </a:xfrm>
+      </p:grpSpPr>
+      <p:sp>
+        <p:nvSpPr>
+          <p:cNvPr id="13" name="Elipse 12">
+            <a:extLst>
+              <a:ext uri="{FF2B5EF4-FFF2-40B4-BE49-F238E27FC236}">
+                <a16:creationId xmlns:a16="http://schemas.microsoft.com/office/drawing/2014/main" id="{DD1F338A-52ED-F531-9B34-E3DBF79F475C}"/>
+              </a:ext>
+            </a:extLst>
+          </p:cNvPr>
+          <p:cNvSpPr/>
+          <p:nvPr/>
+        </p:nvSpPr>
+        <p:spPr>
+          <a:xfrm>
+            <a:off x="5752499" y="3076032"/>
+            <a:ext cx="687003" cy="687003"/>
+          </a:xfrm>
+          <a:prstGeom prst="ellipse">
+            <a:avLst/>
+          </a:prstGeom>
+          <a:solidFill>
+            <a:srgbClr val="FFC000"/>
+          </a:solidFill>
+          <a:ln>
+            <a:noFill/>
+          </a:ln>
+        </p:spPr>
+        <p:style>
+          <a:lnRef idx="2">
+            <a:schemeClr val="accent1">
+              <a:shade val="15000"/>
+            </a:schemeClr>
+          </a:lnRef>
+          <a:fillRef idx="1">
+            <a:schemeClr val="accent1"/>
+          </a:fillRef>
+          <a:effectRef idx="0">
+            <a:schemeClr val="accent1"/>
+          </a:effectRef>
+          <a:fontRef idx="minor">
+            <a:schemeClr val="lt1"/>
+          </a:fontRef>
+        </p:style>
+        <p:txBody>
+          <a:bodyPr rtlCol="0" anchor="ctr"/>
+          <a:lstStyle/>
+          <a:p>
+            <a:pPr algn="ctr"/>
+            <a:endParaRPr lang="es-ES"/>
+          </a:p>
+        </p:txBody>
+      </p:sp>
+      <p:pic>
+        <p:nvPicPr>
+          <p:cNvPr id="3" name="Imagen 2">
+            <a:extLst>
+              <a:ext uri="{FF2B5EF4-FFF2-40B4-BE49-F238E27FC236}">
+                <a16:creationId xmlns:a16="http://schemas.microsoft.com/office/drawing/2014/main" id="{A81D8D0D-F127-EDF4-179E-8739ADFA4EEC}"/>
+              </a:ext>
+            </a:extLst>
+          </p:cNvPr>
+          <p:cNvPicPr>
+            <a:picLocks noChangeAspect="1"/>
+          </p:cNvPicPr>
+          <p:nvPr/>
+        </p:nvPicPr>
+        <p:blipFill>
+          <a:blip r:embed="rId2">
+            <a:extLst>
+              <a:ext uri="{28A0092B-C50C-407E-A947-70E740481C1C}">
+                <a14:useLocalDpi xmlns:a14="http://schemas.microsoft.com/office/drawing/2010/main" val="0"/>
+              </a:ext>
+            </a:extLst>
+          </a:blip>
+          <a:stretch>
+            <a:fillRect/>
+          </a:stretch>
+        </p:blipFill>
+        <p:spPr>
+          <a:xfrm>
+            <a:off x="5782002" y="3114771"/>
+            <a:ext cx="609524" cy="609524"/>
+          </a:xfrm>
+          <a:prstGeom prst="rect">
+            <a:avLst/>
+          </a:prstGeom>
+        </p:spPr>
+      </p:pic>
+      <p:pic>
+        <p:nvPicPr>
+          <p:cNvPr id="5" name="Imagen 4">
+            <a:extLst>
+              <a:ext uri="{FF2B5EF4-FFF2-40B4-BE49-F238E27FC236}">
+                <a16:creationId xmlns:a16="http://schemas.microsoft.com/office/drawing/2014/main" id="{B50BD451-E336-0E66-D3DC-99E9E69AE20B}"/>
+              </a:ext>
+            </a:extLst>
+          </p:cNvPr>
+          <p:cNvPicPr>
+            <a:picLocks noChangeAspect="1"/>
+          </p:cNvPicPr>
+          <p:nvPr/>
+        </p:nvPicPr>
+        <p:blipFill>
+          <a:blip r:embed="rId3">
+            <a:extLst>
+              <a:ext uri="{28A0092B-C50C-407E-A947-70E740481C1C}">
+                <a14:useLocalDpi xmlns:a14="http://schemas.microsoft.com/office/drawing/2010/main" val="0"/>
+              </a:ext>
+            </a:extLst>
+          </a:blip>
+          <a:stretch>
+            <a:fillRect/>
+          </a:stretch>
+        </p:blipFill>
+        <p:spPr>
+          <a:xfrm>
+            <a:off x="4623816" y="2286000"/>
+            <a:ext cx="457200" cy="457200"/>
+          </a:xfrm>
+          <a:prstGeom prst="rect">
+            <a:avLst/>
+          </a:prstGeom>
+        </p:spPr>
+      </p:pic>
+      <p:pic>
+        <p:nvPicPr>
+          <p:cNvPr id="7" name="Imagen 6">
+            <a:extLst>
+              <a:ext uri="{FF2B5EF4-FFF2-40B4-BE49-F238E27FC236}">
+                <a16:creationId xmlns:a16="http://schemas.microsoft.com/office/drawing/2014/main" id="{9FC83CCA-2666-E39A-15D7-F74178653A69}"/>
+              </a:ext>
+            </a:extLst>
+          </p:cNvPr>
+          <p:cNvPicPr>
+            <a:picLocks noChangeAspect="1"/>
+          </p:cNvPicPr>
+          <p:nvPr/>
+        </p:nvPicPr>
+        <p:blipFill>
+          <a:blip r:embed="rId4">
+            <a:extLst>
+              <a:ext uri="{28A0092B-C50C-407E-A947-70E740481C1C}">
+                <a14:useLocalDpi xmlns:a14="http://schemas.microsoft.com/office/drawing/2010/main" val="0"/>
+              </a:ext>
+            </a:extLst>
+          </a:blip>
+          <a:stretch>
+            <a:fillRect/>
+          </a:stretch>
+        </p:blipFill>
+        <p:spPr>
+          <a:xfrm>
+            <a:off x="9098356" y="954100"/>
+            <a:ext cx="608400" cy="608400"/>
+          </a:xfrm>
+          <a:prstGeom prst="rect">
+            <a:avLst/>
+          </a:prstGeom>
+        </p:spPr>
+      </p:pic>
+      <p:pic>
+        <p:nvPicPr>
+          <p:cNvPr id="9" name="Imagen 8">
+            <a:extLst>
+              <a:ext uri="{FF2B5EF4-FFF2-40B4-BE49-F238E27FC236}">
+                <a16:creationId xmlns:a16="http://schemas.microsoft.com/office/drawing/2014/main" id="{E03FBA85-7AFD-EF2D-779B-AF7823EF5D61}"/>
+              </a:ext>
+            </a:extLst>
+          </p:cNvPr>
+          <p:cNvPicPr>
+            <a:picLocks noChangeAspect="1"/>
+          </p:cNvPicPr>
+          <p:nvPr/>
+        </p:nvPicPr>
+        <p:blipFill>
+          <a:blip r:embed="rId5">
+            <a:extLst>
+              <a:ext uri="{28A0092B-C50C-407E-A947-70E740481C1C}">
+                <a14:useLocalDpi xmlns:a14="http://schemas.microsoft.com/office/drawing/2010/main" val="0"/>
+              </a:ext>
+            </a:extLst>
+          </a:blip>
+          <a:stretch>
+            <a:fillRect/>
+          </a:stretch>
+        </p:blipFill>
+        <p:spPr>
+          <a:xfrm>
+            <a:off x="9183662" y="2054390"/>
+            <a:ext cx="609524" cy="609524"/>
+          </a:xfrm>
+          <a:prstGeom prst="rect">
+            <a:avLst/>
+          </a:prstGeom>
+        </p:spPr>
+      </p:pic>
+      <p:pic>
+        <p:nvPicPr>
+          <p:cNvPr id="12" name="Imagen 11" descr="Imágenes de Lexicon Icon: descubre bancos de fotos, ilustraciones, vectores  y vídeos de 31,485 | Adobe Stock">
+            <a:extLst>
+              <a:ext uri="{FF2B5EF4-FFF2-40B4-BE49-F238E27FC236}">
+                <a16:creationId xmlns:a16="http://schemas.microsoft.com/office/drawing/2014/main" id="{829BEA07-C01A-615F-F916-F89E2D2E612E}"/>
+              </a:ext>
+            </a:extLst>
+          </p:cNvPr>
+          <p:cNvPicPr>
+            <a:picLocks noChangeAspect="1"/>
+          </p:cNvPicPr>
+          <p:nvPr/>
+        </p:nvPicPr>
+        <p:blipFill>
+          <a:blip r:embed="rId6"/>
+          <a:srcRect l="59482" t="24182" r="13550" b="24671"/>
+          <a:stretch>
+            <a:fillRect/>
+          </a:stretch>
+        </p:blipFill>
+        <p:spPr>
+          <a:xfrm>
+            <a:off x="2235993" y="2002629"/>
+            <a:ext cx="608400" cy="644028"/>
+          </a:xfrm>
+          <a:prstGeom prst="rect">
+            <a:avLst/>
+          </a:prstGeom>
+        </p:spPr>
+      </p:pic>
+      <p:pic>
+        <p:nvPicPr>
+          <p:cNvPr id="15" name="Imagen 14">
+            <a:extLst>
+              <a:ext uri="{FF2B5EF4-FFF2-40B4-BE49-F238E27FC236}">
+                <a16:creationId xmlns:a16="http://schemas.microsoft.com/office/drawing/2014/main" id="{ABE1D1ED-6BC6-5390-D923-5093CAA8836A}"/>
+              </a:ext>
+            </a:extLst>
+          </p:cNvPr>
+          <p:cNvPicPr>
+            <a:picLocks noChangeAspect="1"/>
+          </p:cNvPicPr>
+          <p:nvPr/>
+        </p:nvPicPr>
+        <p:blipFill>
+          <a:blip r:embed="rId7">
+            <a:extLst>
+              <a:ext uri="{28A0092B-C50C-407E-A947-70E740481C1C}">
+                <a14:useLocalDpi xmlns:a14="http://schemas.microsoft.com/office/drawing/2010/main" val="0"/>
+              </a:ext>
+            </a:extLst>
+          </a:blip>
+          <a:stretch>
+            <a:fillRect/>
+          </a:stretch>
+        </p:blipFill>
+        <p:spPr>
+          <a:xfrm>
+            <a:off x="8510561" y="3521363"/>
+            <a:ext cx="608400" cy="608400"/>
+          </a:xfrm>
+          <a:prstGeom prst="rect">
+            <a:avLst/>
+          </a:prstGeom>
+        </p:spPr>
+      </p:pic>
+      <p:pic>
+        <p:nvPicPr>
+          <p:cNvPr id="17" name="Imagen 16">
+            <a:extLst>
+              <a:ext uri="{FF2B5EF4-FFF2-40B4-BE49-F238E27FC236}">
+                <a16:creationId xmlns:a16="http://schemas.microsoft.com/office/drawing/2014/main" id="{E96634AB-D6CD-A32F-102E-CC0651C9908D}"/>
+              </a:ext>
+            </a:extLst>
+          </p:cNvPr>
+          <p:cNvPicPr>
+            <a:picLocks noChangeAspect="1"/>
+          </p:cNvPicPr>
+          <p:nvPr/>
+        </p:nvPicPr>
+        <p:blipFill>
+          <a:blip r:embed="rId2">
+            <a:extLst>
+              <a:ext uri="{28A0092B-C50C-407E-A947-70E740481C1C}">
+                <a14:useLocalDpi xmlns:a14="http://schemas.microsoft.com/office/drawing/2010/main" val="0"/>
+              </a:ext>
+            </a:extLst>
+          </a:blip>
+          <a:stretch>
+            <a:fillRect/>
+          </a:stretch>
+        </p:blipFill>
+        <p:spPr>
+          <a:xfrm>
+            <a:off x="7712401" y="3520239"/>
+            <a:ext cx="609524" cy="609524"/>
+          </a:xfrm>
+          <a:prstGeom prst="rect">
+            <a:avLst/>
+          </a:prstGeom>
+        </p:spPr>
+      </p:pic>
+      <p:pic>
+        <p:nvPicPr>
+          <p:cNvPr id="11" name="Imagen 10">
+            <a:extLst>
+              <a:ext uri="{FF2B5EF4-FFF2-40B4-BE49-F238E27FC236}">
+                <a16:creationId xmlns:a16="http://schemas.microsoft.com/office/drawing/2014/main" id="{D1DC5D30-9F2E-487B-2F6F-60DE3579B341}"/>
+              </a:ext>
+            </a:extLst>
+          </p:cNvPr>
+          <p:cNvPicPr>
+            <a:picLocks noChangeAspect="1"/>
+          </p:cNvPicPr>
+          <p:nvPr/>
+        </p:nvPicPr>
+        <p:blipFill>
+          <a:blip r:embed="rId8">
+            <a:extLst>
+              <a:ext uri="{28A0092B-C50C-407E-A947-70E740481C1C}">
+                <a14:useLocalDpi xmlns:a14="http://schemas.microsoft.com/office/drawing/2010/main" val="0"/>
+              </a:ext>
+            </a:extLst>
+          </a:blip>
+          <a:stretch>
+            <a:fillRect/>
+          </a:stretch>
+        </p:blipFill>
+        <p:spPr>
+          <a:xfrm>
+            <a:off x="2407703" y="2074305"/>
+            <a:ext cx="378868" cy="378868"/>
+          </a:xfrm>
+          <a:prstGeom prst="rect">
+            <a:avLst/>
+          </a:prstGeom>
+        </p:spPr>
+      </p:pic>
+    </p:spTree>
+    <p:extLst>
+      <p:ext uri="{BB962C8B-B14F-4D97-AF65-F5344CB8AC3E}">
+        <p14:creationId xmlns:p14="http://schemas.microsoft.com/office/powerpoint/2010/main" val="1027079573"/>
+      </p:ext>
+    </p:extLst>
+  </p:cSld>
+  <p:clrMapOvr>
+    <a:masterClrMapping/>
+  </p:clrMapOvr>
+</p:sld>
+</file>
+
 <file path=ppt/theme/theme1.xml><?xml version="1.0" encoding="utf-8"?>
 <a:theme xmlns:a="http://schemas.openxmlformats.org/drawingml/2006/main" name="Tema de Office">
   <a:themeElements>

--- a/documentation/Refactorización XLST.pptx
+++ b/documentation/Refactorización XLST.pptx
@@ -8,11 +8,12 @@
     <p:sldId id="257" r:id="rId2"/>
     <p:sldId id="258" r:id="rId3"/>
     <p:sldId id="259" r:id="rId4"/>
-    <p:sldId id="260" r:id="rId5"/>
-    <p:sldId id="261" r:id="rId6"/>
+    <p:sldId id="262" r:id="rId5"/>
+    <p:sldId id="260" r:id="rId6"/>
+    <p:sldId id="261" r:id="rId7"/>
   </p:sldIdLst>
   <p:sldSz cx="12192000" cy="6858000"/>
-  <p:notesSz cx="6797675" cy="9872663"/>
+  <p:notesSz cx="6797675" cy="9926638"/>
   <p:defaultTextStyle>
     <a:defPPr>
       <a:defRPr lang="es-ES"/>
@@ -828,7 +829,7 @@
           <a:p>
             <a:fld id="{93065D2E-367D-4F9D-9E24-4F44260CE426}" type="datetimeFigureOut">
               <a:rPr lang="es-ES" smtClean="0"/>
-              <a:t>14/09/2026</a:t>
+              <a:t>17/09/2026</a:t>
             </a:fld>
             <a:endParaRPr lang="es-ES"/>
           </a:p>
@@ -1026,7 +1027,7 @@
           <a:p>
             <a:fld id="{93065D2E-367D-4F9D-9E24-4F44260CE426}" type="datetimeFigureOut">
               <a:rPr lang="es-ES" smtClean="0"/>
-              <a:t>14/09/2026</a:t>
+              <a:t>17/09/2026</a:t>
             </a:fld>
             <a:endParaRPr lang="es-ES"/>
           </a:p>
@@ -1234,7 +1235,7 @@
           <a:p>
             <a:fld id="{93065D2E-367D-4F9D-9E24-4F44260CE426}" type="datetimeFigureOut">
               <a:rPr lang="es-ES" smtClean="0"/>
-              <a:t>14/09/2026</a:t>
+              <a:t>17/09/2026</a:t>
             </a:fld>
             <a:endParaRPr lang="es-ES"/>
           </a:p>
@@ -1432,7 +1433,7 @@
           <a:p>
             <a:fld id="{93065D2E-367D-4F9D-9E24-4F44260CE426}" type="datetimeFigureOut">
               <a:rPr lang="es-ES" smtClean="0"/>
-              <a:t>14/09/2026</a:t>
+              <a:t>17/09/2026</a:t>
             </a:fld>
             <a:endParaRPr lang="es-ES"/>
           </a:p>
@@ -1707,7 +1708,7 @@
           <a:p>
             <a:fld id="{93065D2E-367D-4F9D-9E24-4F44260CE426}" type="datetimeFigureOut">
               <a:rPr lang="es-ES" smtClean="0"/>
-              <a:t>14/09/2026</a:t>
+              <a:t>17/09/2026</a:t>
             </a:fld>
             <a:endParaRPr lang="es-ES"/>
           </a:p>
@@ -1972,7 +1973,7 @@
           <a:p>
             <a:fld id="{93065D2E-367D-4F9D-9E24-4F44260CE426}" type="datetimeFigureOut">
               <a:rPr lang="es-ES" smtClean="0"/>
-              <a:t>14/09/2026</a:t>
+              <a:t>17/09/2026</a:t>
             </a:fld>
             <a:endParaRPr lang="es-ES"/>
           </a:p>
@@ -2384,7 +2385,7 @@
           <a:p>
             <a:fld id="{93065D2E-367D-4F9D-9E24-4F44260CE426}" type="datetimeFigureOut">
               <a:rPr lang="es-ES" smtClean="0"/>
-              <a:t>14/09/2026</a:t>
+              <a:t>17/09/2026</a:t>
             </a:fld>
             <a:endParaRPr lang="es-ES"/>
           </a:p>
@@ -2525,7 +2526,7 @@
           <a:p>
             <a:fld id="{93065D2E-367D-4F9D-9E24-4F44260CE426}" type="datetimeFigureOut">
               <a:rPr lang="es-ES" smtClean="0"/>
-              <a:t>14/09/2026</a:t>
+              <a:t>17/09/2026</a:t>
             </a:fld>
             <a:endParaRPr lang="es-ES"/>
           </a:p>
@@ -2638,7 +2639,7 @@
           <a:p>
             <a:fld id="{93065D2E-367D-4F9D-9E24-4F44260CE426}" type="datetimeFigureOut">
               <a:rPr lang="es-ES" smtClean="0"/>
-              <a:t>14/09/2026</a:t>
+              <a:t>17/09/2026</a:t>
             </a:fld>
             <a:endParaRPr lang="es-ES"/>
           </a:p>
@@ -2949,7 +2950,7 @@
           <a:p>
             <a:fld id="{93065D2E-367D-4F9D-9E24-4F44260CE426}" type="datetimeFigureOut">
               <a:rPr lang="es-ES" smtClean="0"/>
-              <a:t>14/09/2026</a:t>
+              <a:t>17/09/2026</a:t>
             </a:fld>
             <a:endParaRPr lang="es-ES"/>
           </a:p>
@@ -3237,7 +3238,7 @@
           <a:p>
             <a:fld id="{93065D2E-367D-4F9D-9E24-4F44260CE426}" type="datetimeFigureOut">
               <a:rPr lang="es-ES" smtClean="0"/>
-              <a:t>14/09/2026</a:t>
+              <a:t>17/09/2026</a:t>
             </a:fld>
             <a:endParaRPr lang="es-ES"/>
           </a:p>
@@ -3478,7 +3479,7 @@
           <a:p>
             <a:fld id="{93065D2E-367D-4F9D-9E24-4F44260CE426}" type="datetimeFigureOut">
               <a:rPr lang="es-ES" smtClean="0"/>
-              <a:t>14/09/2026</a:t>
+              <a:t>17/09/2026</a:t>
             </a:fld>
             <a:endParaRPr lang="es-ES"/>
           </a:p>
@@ -11000,6 +11001,2198 @@
   <p:cSld>
     <p:spTree>
       <p:nvGrpSpPr>
+        <p:cNvPr id="1" name="">
+          <a:extLst>
+            <a:ext uri="{FF2B5EF4-FFF2-40B4-BE49-F238E27FC236}">
+              <a16:creationId xmlns:a16="http://schemas.microsoft.com/office/drawing/2014/main" id="{D5C71C02-4C4F-BEAD-244C-9E5149737A81}"/>
+            </a:ext>
+          </a:extLst>
+        </p:cNvPr>
+        <p:cNvGrpSpPr/>
+        <p:nvPr/>
+      </p:nvGrpSpPr>
+      <p:grpSpPr>
+        <a:xfrm>
+          <a:off x="0" y="0"/>
+          <a:ext cx="0" cy="0"/>
+          <a:chOff x="0" y="0"/>
+          <a:chExt cx="0" cy="0"/>
+        </a:xfrm>
+      </p:grpSpPr>
+      <p:grpSp>
+        <p:nvGrpSpPr>
+          <p:cNvPr id="19" name="Grupo 18">
+            <a:extLst>
+              <a:ext uri="{FF2B5EF4-FFF2-40B4-BE49-F238E27FC236}">
+                <a16:creationId xmlns:a16="http://schemas.microsoft.com/office/drawing/2014/main" id="{59E0911B-D3CB-8E42-B804-F5E9D91056BC}"/>
+              </a:ext>
+            </a:extLst>
+          </p:cNvPr>
+          <p:cNvGrpSpPr/>
+          <p:nvPr/>
+        </p:nvGrpSpPr>
+        <p:grpSpPr>
+          <a:xfrm>
+            <a:off x="7923769" y="683475"/>
+            <a:ext cx="1953996" cy="1426190"/>
+            <a:chOff x="1713879" y="1307911"/>
+            <a:chExt cx="1953996" cy="1426190"/>
+          </a:xfrm>
+        </p:grpSpPr>
+        <p:grpSp>
+          <p:nvGrpSpPr>
+            <p:cNvPr id="20" name="Grupo 19">
+              <a:extLst>
+                <a:ext uri="{FF2B5EF4-FFF2-40B4-BE49-F238E27FC236}">
+                  <a16:creationId xmlns:a16="http://schemas.microsoft.com/office/drawing/2014/main" id="{C6CBC92C-6EEF-1FCE-6980-BAFF71421728}"/>
+                </a:ext>
+              </a:extLst>
+            </p:cNvPr>
+            <p:cNvGrpSpPr/>
+            <p:nvPr/>
+          </p:nvGrpSpPr>
+          <p:grpSpPr>
+            <a:xfrm>
+              <a:off x="2288562" y="1307911"/>
+              <a:ext cx="804605" cy="882387"/>
+              <a:chOff x="2100116" y="1161875"/>
+              <a:chExt cx="1070929" cy="1174458"/>
+            </a:xfrm>
+          </p:grpSpPr>
+          <p:sp>
+            <p:nvSpPr>
+              <p:cNvPr id="22" name="Rectángulo 21">
+                <a:extLst>
+                  <a:ext uri="{FF2B5EF4-FFF2-40B4-BE49-F238E27FC236}">
+                    <a16:creationId xmlns:a16="http://schemas.microsoft.com/office/drawing/2014/main" id="{FC11EBC6-4A24-3782-99C5-079779AAC4DE}"/>
+                  </a:ext>
+                </a:extLst>
+              </p:cNvPr>
+              <p:cNvSpPr/>
+              <p:nvPr/>
+            </p:nvSpPr>
+            <p:spPr>
+              <a:xfrm>
+                <a:off x="2336341" y="1161875"/>
+                <a:ext cx="834704" cy="1174458"/>
+              </a:xfrm>
+              <a:prstGeom prst="rect">
+                <a:avLst/>
+              </a:prstGeom>
+              <a:solidFill>
+                <a:schemeClr val="bg2">
+                  <a:lumMod val="90000"/>
+                </a:schemeClr>
+              </a:solidFill>
+            </p:spPr>
+            <p:style>
+              <a:lnRef idx="2">
+                <a:schemeClr val="accent1">
+                  <a:shade val="15000"/>
+                </a:schemeClr>
+              </a:lnRef>
+              <a:fillRef idx="1">
+                <a:schemeClr val="accent1"/>
+              </a:fillRef>
+              <a:effectRef idx="0">
+                <a:schemeClr val="accent1"/>
+              </a:effectRef>
+              <a:fontRef idx="minor">
+                <a:schemeClr val="lt1"/>
+              </a:fontRef>
+            </p:style>
+            <p:txBody>
+              <a:bodyPr rtlCol="0" anchor="ctr"/>
+              <a:lstStyle/>
+              <a:p>
+                <a:pPr algn="ctr"/>
+                <a:endParaRPr lang="es-ES"/>
+              </a:p>
+            </p:txBody>
+          </p:sp>
+          <p:sp>
+            <p:nvSpPr>
+              <p:cNvPr id="23" name="Elipse 22">
+                <a:extLst>
+                  <a:ext uri="{FF2B5EF4-FFF2-40B4-BE49-F238E27FC236}">
+                    <a16:creationId xmlns:a16="http://schemas.microsoft.com/office/drawing/2014/main" id="{9FAEAC6B-160B-B272-1746-91D156DEAFFD}"/>
+                  </a:ext>
+                </a:extLst>
+              </p:cNvPr>
+              <p:cNvSpPr/>
+              <p:nvPr/>
+            </p:nvSpPr>
+            <p:spPr>
+              <a:xfrm>
+                <a:off x="2100116" y="1305718"/>
+                <a:ext cx="644427" cy="211459"/>
+              </a:xfrm>
+              <a:prstGeom prst="ellipse">
+                <a:avLst/>
+              </a:prstGeom>
+              <a:solidFill>
+                <a:schemeClr val="bg1"/>
+              </a:solidFill>
+            </p:spPr>
+            <p:style>
+              <a:lnRef idx="2">
+                <a:schemeClr val="accent1">
+                  <a:shade val="15000"/>
+                </a:schemeClr>
+              </a:lnRef>
+              <a:fillRef idx="1">
+                <a:schemeClr val="accent1"/>
+              </a:fillRef>
+              <a:effectRef idx="0">
+                <a:schemeClr val="accent1"/>
+              </a:effectRef>
+              <a:fontRef idx="minor">
+                <a:schemeClr val="lt1"/>
+              </a:fontRef>
+            </p:style>
+            <p:txBody>
+              <a:bodyPr rtlCol="0" anchor="ctr"/>
+              <a:lstStyle/>
+              <a:p>
+                <a:pPr algn="ctr"/>
+                <a:endParaRPr lang="es-ES"/>
+              </a:p>
+            </p:txBody>
+          </p:sp>
+          <p:sp>
+            <p:nvSpPr>
+              <p:cNvPr id="24" name="Rectángulo 23">
+                <a:extLst>
+                  <a:ext uri="{FF2B5EF4-FFF2-40B4-BE49-F238E27FC236}">
+                    <a16:creationId xmlns:a16="http://schemas.microsoft.com/office/drawing/2014/main" id="{9DC4398F-FF44-E465-48E6-2E5764AC725C}"/>
+                  </a:ext>
+                </a:extLst>
+              </p:cNvPr>
+              <p:cNvSpPr/>
+              <p:nvPr/>
+            </p:nvSpPr>
+            <p:spPr>
+              <a:xfrm>
+                <a:off x="2100116" y="1639180"/>
+                <a:ext cx="644427" cy="211459"/>
+              </a:xfrm>
+              <a:prstGeom prst="rect">
+                <a:avLst/>
+              </a:prstGeom>
+              <a:solidFill>
+                <a:schemeClr val="bg1"/>
+              </a:solidFill>
+            </p:spPr>
+            <p:style>
+              <a:lnRef idx="2">
+                <a:schemeClr val="accent1">
+                  <a:shade val="15000"/>
+                </a:schemeClr>
+              </a:lnRef>
+              <a:fillRef idx="1">
+                <a:schemeClr val="accent1"/>
+              </a:fillRef>
+              <a:effectRef idx="0">
+                <a:schemeClr val="accent1"/>
+              </a:effectRef>
+              <a:fontRef idx="minor">
+                <a:schemeClr val="lt1"/>
+              </a:fontRef>
+            </p:style>
+            <p:txBody>
+              <a:bodyPr rtlCol="0" anchor="ctr"/>
+              <a:lstStyle/>
+              <a:p>
+                <a:pPr algn="ctr"/>
+                <a:endParaRPr lang="es-ES"/>
+              </a:p>
+            </p:txBody>
+          </p:sp>
+          <p:sp>
+            <p:nvSpPr>
+              <p:cNvPr id="25" name="Rectángulo 24">
+                <a:extLst>
+                  <a:ext uri="{FF2B5EF4-FFF2-40B4-BE49-F238E27FC236}">
+                    <a16:creationId xmlns:a16="http://schemas.microsoft.com/office/drawing/2014/main" id="{9D04F2CF-3A14-7222-84AE-F7FEEA6E04F6}"/>
+                  </a:ext>
+                </a:extLst>
+              </p:cNvPr>
+              <p:cNvSpPr/>
+              <p:nvPr/>
+            </p:nvSpPr>
+            <p:spPr>
+              <a:xfrm>
+                <a:off x="2100116" y="1972642"/>
+                <a:ext cx="644427" cy="211459"/>
+              </a:xfrm>
+              <a:prstGeom prst="rect">
+                <a:avLst/>
+              </a:prstGeom>
+              <a:solidFill>
+                <a:schemeClr val="bg1"/>
+              </a:solidFill>
+            </p:spPr>
+            <p:style>
+              <a:lnRef idx="2">
+                <a:schemeClr val="accent1">
+                  <a:shade val="15000"/>
+                </a:schemeClr>
+              </a:lnRef>
+              <a:fillRef idx="1">
+                <a:schemeClr val="accent1"/>
+              </a:fillRef>
+              <a:effectRef idx="0">
+                <a:schemeClr val="accent1"/>
+              </a:effectRef>
+              <a:fontRef idx="minor">
+                <a:schemeClr val="lt1"/>
+              </a:fontRef>
+            </p:style>
+            <p:txBody>
+              <a:bodyPr rtlCol="0" anchor="ctr"/>
+              <a:lstStyle/>
+              <a:p>
+                <a:pPr algn="ctr"/>
+                <a:endParaRPr lang="es-ES"/>
+              </a:p>
+            </p:txBody>
+          </p:sp>
+        </p:grpSp>
+        <p:sp>
+          <p:nvSpPr>
+            <p:cNvPr id="21" name="CuadroTexto 20">
+              <a:extLst>
+                <a:ext uri="{FF2B5EF4-FFF2-40B4-BE49-F238E27FC236}">
+                  <a16:creationId xmlns:a16="http://schemas.microsoft.com/office/drawing/2014/main" id="{FDEB384F-F068-ACA5-2B9E-F6703B5214C7}"/>
+                </a:ext>
+              </a:extLst>
+            </p:cNvPr>
+            <p:cNvSpPr txBox="1"/>
+            <p:nvPr/>
+          </p:nvSpPr>
+          <p:spPr>
+            <a:xfrm>
+              <a:off x="1713879" y="2210881"/>
+              <a:ext cx="1953996" cy="523220"/>
+            </a:xfrm>
+            <a:prstGeom prst="rect">
+              <a:avLst/>
+            </a:prstGeom>
+            <a:noFill/>
+          </p:spPr>
+          <p:txBody>
+            <a:bodyPr wrap="none" rtlCol="0">
+              <a:spAutoFit/>
+            </a:bodyPr>
+            <a:lstStyle/>
+            <a:p>
+              <a:pPr algn="ctr"/>
+              <a:r>
+                <a:rPr lang="es-ES" sz="1400" dirty="0">
+                  <a:latin typeface="+mj-lt"/>
+                </a:rPr>
+                <a:t>default.xsl</a:t>
+              </a:r>
+            </a:p>
+            <a:p>
+              <a:pPr algn="ctr"/>
+              <a:r>
+                <a:rPr lang="es-ES" sz="1400" dirty="0">
+                  <a:latin typeface="+mj-lt"/>
+                </a:rPr>
+                <a:t>(punto de entrada único)</a:t>
+              </a:r>
+            </a:p>
+          </p:txBody>
+        </p:sp>
+      </p:grpSp>
+      <p:cxnSp>
+        <p:nvCxnSpPr>
+          <p:cNvPr id="49" name="Conector: curvado 48">
+            <a:extLst>
+              <a:ext uri="{FF2B5EF4-FFF2-40B4-BE49-F238E27FC236}">
+                <a16:creationId xmlns:a16="http://schemas.microsoft.com/office/drawing/2014/main" id="{821F5E23-8539-9202-CA98-0CC8ADAEF0C8}"/>
+              </a:ext>
+            </a:extLst>
+          </p:cNvPr>
+          <p:cNvCxnSpPr>
+            <a:cxnSpLocks/>
+            <a:stCxn id="72" idx="1"/>
+            <a:endCxn id="38" idx="3"/>
+          </p:cNvCxnSpPr>
+          <p:nvPr/>
+        </p:nvCxnSpPr>
+        <p:spPr>
+          <a:xfrm rot="10800000">
+            <a:off x="4094367" y="2736059"/>
+            <a:ext cx="1986899" cy="1817862"/>
+          </a:xfrm>
+          <a:prstGeom prst="curvedConnector3">
+            <a:avLst>
+              <a:gd name="adj1" fmla="val 50000"/>
+            </a:avLst>
+          </a:prstGeom>
+          <a:ln>
+            <a:solidFill>
+              <a:schemeClr val="tx1">
+                <a:lumMod val="65000"/>
+                <a:lumOff val="35000"/>
+              </a:schemeClr>
+            </a:solidFill>
+            <a:prstDash val="dash"/>
+            <a:tailEnd type="triangle" w="lg" len="lg"/>
+          </a:ln>
+        </p:spPr>
+        <p:style>
+          <a:lnRef idx="2">
+            <a:schemeClr val="accent1"/>
+          </a:lnRef>
+          <a:fillRef idx="0">
+            <a:schemeClr val="accent1"/>
+          </a:fillRef>
+          <a:effectRef idx="1">
+            <a:schemeClr val="accent1"/>
+          </a:effectRef>
+          <a:fontRef idx="minor">
+            <a:schemeClr val="tx1"/>
+          </a:fontRef>
+        </p:style>
+      </p:cxnSp>
+      <p:grpSp>
+        <p:nvGrpSpPr>
+          <p:cNvPr id="54" name="Grupo 53">
+            <a:extLst>
+              <a:ext uri="{FF2B5EF4-FFF2-40B4-BE49-F238E27FC236}">
+                <a16:creationId xmlns:a16="http://schemas.microsoft.com/office/drawing/2014/main" id="{5889B6F9-1AEC-B0D9-D16F-34AA5FBECC6E}"/>
+              </a:ext>
+            </a:extLst>
+          </p:cNvPr>
+          <p:cNvGrpSpPr/>
+          <p:nvPr/>
+        </p:nvGrpSpPr>
+        <p:grpSpPr>
+          <a:xfrm>
+            <a:off x="6166148" y="2662621"/>
+            <a:ext cx="1872629" cy="2301269"/>
+            <a:chOff x="5159691" y="3311364"/>
+            <a:chExt cx="1872629" cy="2301269"/>
+          </a:xfrm>
+        </p:grpSpPr>
+        <p:sp>
+          <p:nvSpPr>
+            <p:cNvPr id="55" name="Rectángulo 54">
+              <a:extLst>
+                <a:ext uri="{FF2B5EF4-FFF2-40B4-BE49-F238E27FC236}">
+                  <a16:creationId xmlns:a16="http://schemas.microsoft.com/office/drawing/2014/main" id="{4D7A53B8-C44B-B9DE-BFBE-1CB4FF56D8AF}"/>
+                </a:ext>
+              </a:extLst>
+            </p:cNvPr>
+            <p:cNvSpPr/>
+            <p:nvPr/>
+          </p:nvSpPr>
+          <p:spPr>
+            <a:xfrm>
+              <a:off x="6164551" y="3311364"/>
+              <a:ext cx="627126" cy="882387"/>
+            </a:xfrm>
+            <a:prstGeom prst="rect">
+              <a:avLst/>
+            </a:prstGeom>
+            <a:solidFill>
+              <a:schemeClr val="bg2">
+                <a:lumMod val="90000"/>
+              </a:schemeClr>
+            </a:solidFill>
+          </p:spPr>
+          <p:style>
+            <a:lnRef idx="2">
+              <a:schemeClr val="accent1">
+                <a:shade val="15000"/>
+              </a:schemeClr>
+            </a:lnRef>
+            <a:fillRef idx="1">
+              <a:schemeClr val="accent1"/>
+            </a:fillRef>
+            <a:effectRef idx="0">
+              <a:schemeClr val="accent1"/>
+            </a:effectRef>
+            <a:fontRef idx="minor">
+              <a:schemeClr val="lt1"/>
+            </a:fontRef>
+          </p:style>
+          <p:txBody>
+            <a:bodyPr rtlCol="0" anchor="ctr"/>
+            <a:lstStyle/>
+            <a:p>
+              <a:pPr algn="ctr"/>
+              <a:endParaRPr lang="es-ES" dirty="0"/>
+            </a:p>
+          </p:txBody>
+        </p:sp>
+        <p:sp>
+          <p:nvSpPr>
+            <p:cNvPr id="56" name="Rectángulo 55">
+              <a:extLst>
+                <a:ext uri="{FF2B5EF4-FFF2-40B4-BE49-F238E27FC236}">
+                  <a16:creationId xmlns:a16="http://schemas.microsoft.com/office/drawing/2014/main" id="{FC5A868F-02D4-1A04-5955-6E09493CCEAC}"/>
+                </a:ext>
+              </a:extLst>
+            </p:cNvPr>
+            <p:cNvSpPr/>
+            <p:nvPr/>
+          </p:nvSpPr>
+          <p:spPr>
+            <a:xfrm>
+              <a:off x="6017856" y="3425738"/>
+              <a:ext cx="627126" cy="882387"/>
+            </a:xfrm>
+            <a:prstGeom prst="rect">
+              <a:avLst/>
+            </a:prstGeom>
+            <a:solidFill>
+              <a:schemeClr val="bg2">
+                <a:lumMod val="90000"/>
+              </a:schemeClr>
+            </a:solidFill>
+          </p:spPr>
+          <p:style>
+            <a:lnRef idx="2">
+              <a:schemeClr val="accent1">
+                <a:shade val="15000"/>
+              </a:schemeClr>
+            </a:lnRef>
+            <a:fillRef idx="1">
+              <a:schemeClr val="accent1"/>
+            </a:fillRef>
+            <a:effectRef idx="0">
+              <a:schemeClr val="accent1"/>
+            </a:effectRef>
+            <a:fontRef idx="minor">
+              <a:schemeClr val="lt1"/>
+            </a:fontRef>
+          </p:style>
+          <p:txBody>
+            <a:bodyPr rtlCol="0" anchor="ctr"/>
+            <a:lstStyle/>
+            <a:p>
+              <a:pPr algn="ctr"/>
+              <a:endParaRPr lang="es-ES" dirty="0"/>
+            </a:p>
+          </p:txBody>
+        </p:sp>
+        <p:grpSp>
+          <p:nvGrpSpPr>
+            <p:cNvPr id="57" name="Grupo 56">
+              <a:extLst>
+                <a:ext uri="{FF2B5EF4-FFF2-40B4-BE49-F238E27FC236}">
+                  <a16:creationId xmlns:a16="http://schemas.microsoft.com/office/drawing/2014/main" id="{9572215D-03AB-1E6D-C0A3-78B8F0E4FCB4}"/>
+                </a:ext>
+              </a:extLst>
+            </p:cNvPr>
+            <p:cNvGrpSpPr/>
+            <p:nvPr/>
+          </p:nvGrpSpPr>
+          <p:grpSpPr>
+            <a:xfrm>
+              <a:off x="5159691" y="3540112"/>
+              <a:ext cx="1872629" cy="2072521"/>
+              <a:chOff x="1754571" y="1307911"/>
+              <a:chExt cx="1872629" cy="2072521"/>
+            </a:xfrm>
+          </p:grpSpPr>
+          <p:grpSp>
+            <p:nvGrpSpPr>
+              <p:cNvPr id="58" name="Grupo 57">
+                <a:extLst>
+                  <a:ext uri="{FF2B5EF4-FFF2-40B4-BE49-F238E27FC236}">
+                    <a16:creationId xmlns:a16="http://schemas.microsoft.com/office/drawing/2014/main" id="{D9BD73F2-7D61-0FB0-D573-1A87E9E74D74}"/>
+                  </a:ext>
+                </a:extLst>
+              </p:cNvPr>
+              <p:cNvGrpSpPr/>
+              <p:nvPr/>
+            </p:nvGrpSpPr>
+            <p:grpSpPr>
+              <a:xfrm>
+                <a:off x="2288562" y="1307911"/>
+                <a:ext cx="804605" cy="882387"/>
+                <a:chOff x="2100116" y="1161875"/>
+                <a:chExt cx="1070929" cy="1174458"/>
+              </a:xfrm>
+            </p:grpSpPr>
+            <p:sp>
+              <p:nvSpPr>
+                <p:cNvPr id="60" name="Rectángulo 59">
+                  <a:extLst>
+                    <a:ext uri="{FF2B5EF4-FFF2-40B4-BE49-F238E27FC236}">
+                      <a16:creationId xmlns:a16="http://schemas.microsoft.com/office/drawing/2014/main" id="{65740583-2C14-FDAD-E131-4452ACEB7BF3}"/>
+                    </a:ext>
+                  </a:extLst>
+                </p:cNvPr>
+                <p:cNvSpPr/>
+                <p:nvPr/>
+              </p:nvSpPr>
+              <p:spPr>
+                <a:xfrm>
+                  <a:off x="2336341" y="1161875"/>
+                  <a:ext cx="834704" cy="1174458"/>
+                </a:xfrm>
+                <a:prstGeom prst="rect">
+                  <a:avLst/>
+                </a:prstGeom>
+                <a:solidFill>
+                  <a:schemeClr val="bg2">
+                    <a:lumMod val="90000"/>
+                  </a:schemeClr>
+                </a:solidFill>
+              </p:spPr>
+              <p:style>
+                <a:lnRef idx="2">
+                  <a:schemeClr val="accent1">
+                    <a:shade val="15000"/>
+                  </a:schemeClr>
+                </a:lnRef>
+                <a:fillRef idx="1">
+                  <a:schemeClr val="accent1"/>
+                </a:fillRef>
+                <a:effectRef idx="0">
+                  <a:schemeClr val="accent1"/>
+                </a:effectRef>
+                <a:fontRef idx="minor">
+                  <a:schemeClr val="lt1"/>
+                </a:fontRef>
+              </p:style>
+              <p:txBody>
+                <a:bodyPr rtlCol="0" anchor="ctr"/>
+                <a:lstStyle/>
+                <a:p>
+                  <a:pPr algn="ctr"/>
+                  <a:endParaRPr lang="es-ES"/>
+                </a:p>
+              </p:txBody>
+            </p:sp>
+            <p:sp>
+              <p:nvSpPr>
+                <p:cNvPr id="61" name="Elipse 60">
+                  <a:extLst>
+                    <a:ext uri="{FF2B5EF4-FFF2-40B4-BE49-F238E27FC236}">
+                      <a16:creationId xmlns:a16="http://schemas.microsoft.com/office/drawing/2014/main" id="{B6BD0955-0356-7677-1C57-F5EDF099E473}"/>
+                    </a:ext>
+                  </a:extLst>
+                </p:cNvPr>
+                <p:cNvSpPr/>
+                <p:nvPr/>
+              </p:nvSpPr>
+              <p:spPr>
+                <a:xfrm>
+                  <a:off x="2100116" y="1305718"/>
+                  <a:ext cx="644427" cy="211459"/>
+                </a:xfrm>
+                <a:prstGeom prst="ellipse">
+                  <a:avLst/>
+                </a:prstGeom>
+                <a:solidFill>
+                  <a:schemeClr val="bg1"/>
+                </a:solidFill>
+              </p:spPr>
+              <p:style>
+                <a:lnRef idx="2">
+                  <a:schemeClr val="accent1">
+                    <a:shade val="15000"/>
+                  </a:schemeClr>
+                </a:lnRef>
+                <a:fillRef idx="1">
+                  <a:schemeClr val="accent1"/>
+                </a:fillRef>
+                <a:effectRef idx="0">
+                  <a:schemeClr val="accent1"/>
+                </a:effectRef>
+                <a:fontRef idx="minor">
+                  <a:schemeClr val="lt1"/>
+                </a:fontRef>
+              </p:style>
+              <p:txBody>
+                <a:bodyPr rtlCol="0" anchor="ctr"/>
+                <a:lstStyle/>
+                <a:p>
+                  <a:pPr algn="ctr"/>
+                  <a:endParaRPr lang="es-ES"/>
+                </a:p>
+              </p:txBody>
+            </p:sp>
+            <p:sp>
+              <p:nvSpPr>
+                <p:cNvPr id="62" name="Rectángulo 61">
+                  <a:extLst>
+                    <a:ext uri="{FF2B5EF4-FFF2-40B4-BE49-F238E27FC236}">
+                      <a16:creationId xmlns:a16="http://schemas.microsoft.com/office/drawing/2014/main" id="{968CDFE7-3551-2098-2873-81A2723B2C49}"/>
+                    </a:ext>
+                  </a:extLst>
+                </p:cNvPr>
+                <p:cNvSpPr/>
+                <p:nvPr/>
+              </p:nvSpPr>
+              <p:spPr>
+                <a:xfrm>
+                  <a:off x="2100116" y="1639180"/>
+                  <a:ext cx="644427" cy="211459"/>
+                </a:xfrm>
+                <a:prstGeom prst="rect">
+                  <a:avLst/>
+                </a:prstGeom>
+                <a:solidFill>
+                  <a:schemeClr val="bg1"/>
+                </a:solidFill>
+              </p:spPr>
+              <p:style>
+                <a:lnRef idx="2">
+                  <a:schemeClr val="accent1">
+                    <a:shade val="15000"/>
+                  </a:schemeClr>
+                </a:lnRef>
+                <a:fillRef idx="1">
+                  <a:schemeClr val="accent1"/>
+                </a:fillRef>
+                <a:effectRef idx="0">
+                  <a:schemeClr val="accent1"/>
+                </a:effectRef>
+                <a:fontRef idx="minor">
+                  <a:schemeClr val="lt1"/>
+                </a:fontRef>
+              </p:style>
+              <p:txBody>
+                <a:bodyPr rtlCol="0" anchor="ctr"/>
+                <a:lstStyle/>
+                <a:p>
+                  <a:pPr algn="ctr"/>
+                  <a:endParaRPr lang="es-ES"/>
+                </a:p>
+              </p:txBody>
+            </p:sp>
+            <p:sp>
+              <p:nvSpPr>
+                <p:cNvPr id="63" name="Rectángulo 62">
+                  <a:extLst>
+                    <a:ext uri="{FF2B5EF4-FFF2-40B4-BE49-F238E27FC236}">
+                      <a16:creationId xmlns:a16="http://schemas.microsoft.com/office/drawing/2014/main" id="{6EBAA2FE-C677-0368-C2EB-670E8AE7E8BF}"/>
+                    </a:ext>
+                  </a:extLst>
+                </p:cNvPr>
+                <p:cNvSpPr/>
+                <p:nvPr/>
+              </p:nvSpPr>
+              <p:spPr>
+                <a:xfrm>
+                  <a:off x="2100116" y="1972642"/>
+                  <a:ext cx="644427" cy="211459"/>
+                </a:xfrm>
+                <a:prstGeom prst="rect">
+                  <a:avLst/>
+                </a:prstGeom>
+                <a:solidFill>
+                  <a:schemeClr val="bg1"/>
+                </a:solidFill>
+              </p:spPr>
+              <p:style>
+                <a:lnRef idx="2">
+                  <a:schemeClr val="accent1">
+                    <a:shade val="15000"/>
+                  </a:schemeClr>
+                </a:lnRef>
+                <a:fillRef idx="1">
+                  <a:schemeClr val="accent1"/>
+                </a:fillRef>
+                <a:effectRef idx="0">
+                  <a:schemeClr val="accent1"/>
+                </a:effectRef>
+                <a:fontRef idx="minor">
+                  <a:schemeClr val="lt1"/>
+                </a:fontRef>
+              </p:style>
+              <p:txBody>
+                <a:bodyPr rtlCol="0" anchor="ctr"/>
+                <a:lstStyle/>
+                <a:p>
+                  <a:pPr algn="ctr"/>
+                  <a:endParaRPr lang="es-ES"/>
+                </a:p>
+              </p:txBody>
+            </p:sp>
+          </p:grpSp>
+          <p:sp>
+            <p:nvSpPr>
+              <p:cNvPr id="59" name="CuadroTexto 58">
+                <a:extLst>
+                  <a:ext uri="{FF2B5EF4-FFF2-40B4-BE49-F238E27FC236}">
+                    <a16:creationId xmlns:a16="http://schemas.microsoft.com/office/drawing/2014/main" id="{221FABC8-F7D3-E0FB-07D6-878A5224B8A9}"/>
+                  </a:ext>
+                </a:extLst>
+              </p:cNvPr>
+              <p:cNvSpPr txBox="1"/>
+              <p:nvPr/>
+            </p:nvSpPr>
+            <p:spPr>
+              <a:xfrm>
+                <a:off x="1754571" y="2210881"/>
+                <a:ext cx="1872629" cy="1169551"/>
+              </a:xfrm>
+              <a:prstGeom prst="rect">
+                <a:avLst/>
+              </a:prstGeom>
+              <a:noFill/>
+            </p:spPr>
+            <p:txBody>
+              <a:bodyPr wrap="none" rtlCol="0">
+                <a:spAutoFit/>
+              </a:bodyPr>
+              <a:lstStyle/>
+              <a:p>
+                <a:pPr algn="ctr"/>
+                <a:r>
+                  <a:rPr lang="es-ES" sz="1400" dirty="0" err="1">
+                    <a:latin typeface="+mj-lt"/>
+                  </a:rPr>
+                  <a:t>core</a:t>
+                </a:r>
+                <a:r>
+                  <a:rPr lang="es-ES" sz="1400" dirty="0">
+                    <a:latin typeface="+mj-lt"/>
+                  </a:rPr>
+                  <a:t>/utilities.xsl</a:t>
+                </a:r>
+              </a:p>
+              <a:p>
+                <a:pPr algn="ctr"/>
+                <a:r>
+                  <a:rPr lang="es-ES" sz="1400" dirty="0" err="1">
+                    <a:latin typeface="+mj-lt"/>
+                  </a:rPr>
+                  <a:t>core</a:t>
+                </a:r>
+                <a:r>
+                  <a:rPr lang="es-ES" sz="1400" dirty="0">
+                    <a:latin typeface="+mj-lt"/>
+                  </a:rPr>
+                  <a:t>/properties.xsl</a:t>
+                </a:r>
+              </a:p>
+              <a:p>
+                <a:pPr algn="ctr"/>
+                <a:r>
+                  <a:rPr lang="es-ES" sz="1400" dirty="0" err="1">
+                    <a:latin typeface="+mj-lt"/>
+                  </a:rPr>
+                  <a:t>core</a:t>
+                </a:r>
+                <a:r>
+                  <a:rPr lang="es-ES" sz="1400" dirty="0">
+                    <a:latin typeface="+mj-lt"/>
+                  </a:rPr>
+                  <a:t>/document.xsl</a:t>
+                </a:r>
+              </a:p>
+              <a:p>
+                <a:pPr algn="ctr"/>
+                <a:r>
+                  <a:rPr lang="es-ES" sz="1400" dirty="0" err="1">
+                    <a:latin typeface="+mj-lt"/>
+                  </a:rPr>
+                  <a:t>core</a:t>
+                </a:r>
+                <a:r>
+                  <a:rPr lang="es-ES" sz="1400" dirty="0">
+                    <a:latin typeface="+mj-lt"/>
+                  </a:rPr>
+                  <a:t>/cover.xsl</a:t>
+                </a:r>
+              </a:p>
+              <a:p>
+                <a:pPr algn="ctr"/>
+                <a:r>
+                  <a:rPr lang="es-ES" sz="1400" dirty="0" err="1">
+                    <a:latin typeface="+mj-lt"/>
+                  </a:rPr>
+                  <a:t>core</a:t>
+                </a:r>
+                <a:r>
+                  <a:rPr lang="es-ES" sz="1400" dirty="0">
+                    <a:latin typeface="+mj-lt"/>
+                  </a:rPr>
+                  <a:t>/generate_table.xsl</a:t>
+                </a:r>
+              </a:p>
+            </p:txBody>
+          </p:sp>
+        </p:grpSp>
+      </p:grpSp>
+      <p:grpSp>
+        <p:nvGrpSpPr>
+          <p:cNvPr id="71" name="Grupo 70">
+            <a:extLst>
+              <a:ext uri="{FF2B5EF4-FFF2-40B4-BE49-F238E27FC236}">
+                <a16:creationId xmlns:a16="http://schemas.microsoft.com/office/drawing/2014/main" id="{C917BE6F-E08E-A67C-CB89-C79481764C32}"/>
+              </a:ext>
+            </a:extLst>
+          </p:cNvPr>
+          <p:cNvGrpSpPr/>
+          <p:nvPr/>
+        </p:nvGrpSpPr>
+        <p:grpSpPr>
+          <a:xfrm>
+            <a:off x="7484571" y="2109665"/>
+            <a:ext cx="1416196" cy="552956"/>
+            <a:chOff x="7484571" y="2109665"/>
+            <a:chExt cx="1416196" cy="552956"/>
+          </a:xfrm>
+        </p:grpSpPr>
+        <p:cxnSp>
+          <p:nvCxnSpPr>
+            <p:cNvPr id="50" name="Conector recto de flecha 49">
+              <a:extLst>
+                <a:ext uri="{FF2B5EF4-FFF2-40B4-BE49-F238E27FC236}">
+                  <a16:creationId xmlns:a16="http://schemas.microsoft.com/office/drawing/2014/main" id="{328DDAB2-92C6-A9F9-3215-93E3D4B3644C}"/>
+                </a:ext>
+              </a:extLst>
+            </p:cNvPr>
+            <p:cNvCxnSpPr>
+              <a:cxnSpLocks/>
+              <a:stCxn id="21" idx="2"/>
+              <a:endCxn id="55" idx="0"/>
+            </p:cNvCxnSpPr>
+            <p:nvPr/>
+          </p:nvCxnSpPr>
+          <p:spPr>
+            <a:xfrm flipH="1">
+              <a:off x="7484571" y="2109665"/>
+              <a:ext cx="1416196" cy="552956"/>
+            </a:xfrm>
+            <a:prstGeom prst="straightConnector1">
+              <a:avLst/>
+            </a:prstGeom>
+            <a:ln>
+              <a:solidFill>
+                <a:schemeClr val="tx1">
+                  <a:lumMod val="65000"/>
+                  <a:lumOff val="35000"/>
+                </a:schemeClr>
+              </a:solidFill>
+              <a:prstDash val="solid"/>
+              <a:tailEnd type="triangle" w="lg" len="lg"/>
+            </a:ln>
+          </p:spPr>
+          <p:style>
+            <a:lnRef idx="2">
+              <a:schemeClr val="accent1"/>
+            </a:lnRef>
+            <a:fillRef idx="0">
+              <a:schemeClr val="accent1"/>
+            </a:fillRef>
+            <a:effectRef idx="1">
+              <a:schemeClr val="accent1"/>
+            </a:effectRef>
+            <a:fontRef idx="minor">
+              <a:schemeClr val="tx1"/>
+            </a:fontRef>
+          </p:style>
+        </p:cxnSp>
+        <p:sp>
+          <p:nvSpPr>
+            <p:cNvPr id="70" name="CuadroTexto 69">
+              <a:extLst>
+                <a:ext uri="{FF2B5EF4-FFF2-40B4-BE49-F238E27FC236}">
+                  <a16:creationId xmlns:a16="http://schemas.microsoft.com/office/drawing/2014/main" id="{BEFB851F-43A8-047E-2157-F87421F9375F}"/>
+                </a:ext>
+              </a:extLst>
+            </p:cNvPr>
+            <p:cNvSpPr txBox="1"/>
+            <p:nvPr/>
+          </p:nvSpPr>
+          <p:spPr>
+            <a:xfrm rot="20315626">
+              <a:off x="7564057" y="2114313"/>
+              <a:ext cx="1032655" cy="276999"/>
+            </a:xfrm>
+            <a:prstGeom prst="rect">
+              <a:avLst/>
+            </a:prstGeom>
+            <a:noFill/>
+          </p:spPr>
+          <p:txBody>
+            <a:bodyPr wrap="none" rtlCol="0">
+              <a:spAutoFit/>
+            </a:bodyPr>
+            <a:lstStyle/>
+            <a:p>
+              <a:r>
+                <a:rPr lang="es-ES" sz="1200" dirty="0"/>
+                <a:t>«</a:t>
+              </a:r>
+              <a:r>
+                <a:rPr lang="es-ES" sz="1200" dirty="0" err="1"/>
+                <a:t>includes</a:t>
+              </a:r>
+              <a:r>
+                <a:rPr lang="es-ES" sz="1200" dirty="0"/>
+                <a:t>» ①</a:t>
+              </a:r>
+            </a:p>
+          </p:txBody>
+        </p:sp>
+      </p:grpSp>
+      <p:sp>
+        <p:nvSpPr>
+          <p:cNvPr id="73" name="CuadroTexto 72">
+            <a:extLst>
+              <a:ext uri="{FF2B5EF4-FFF2-40B4-BE49-F238E27FC236}">
+                <a16:creationId xmlns:a16="http://schemas.microsoft.com/office/drawing/2014/main" id="{9C2827AE-E203-1635-7317-C25AE6890CA5}"/>
+              </a:ext>
+            </a:extLst>
+          </p:cNvPr>
+          <p:cNvSpPr txBox="1"/>
+          <p:nvPr/>
+        </p:nvSpPr>
+        <p:spPr>
+          <a:xfrm rot="3077395">
+            <a:off x="4781436" y="3186393"/>
+            <a:ext cx="928459" cy="276999"/>
+          </a:xfrm>
+          <a:prstGeom prst="rect">
+            <a:avLst/>
+          </a:prstGeom>
+          <a:noFill/>
+        </p:spPr>
+        <p:txBody>
+          <a:bodyPr wrap="none" rtlCol="0">
+            <a:spAutoFit/>
+          </a:bodyPr>
+          <a:lstStyle/>
+          <a:p>
+            <a:r>
+              <a:rPr lang="es-ES" sz="1200" dirty="0"/>
+              <a:t>«</a:t>
+            </a:r>
+            <a:r>
+              <a:rPr lang="es-ES" sz="1200" dirty="0" err="1"/>
+              <a:t>depends</a:t>
+            </a:r>
+            <a:r>
+              <a:rPr lang="es-ES" sz="1200" dirty="0"/>
+              <a:t>»</a:t>
+            </a:r>
+          </a:p>
+        </p:txBody>
+      </p:sp>
+      <p:grpSp>
+        <p:nvGrpSpPr>
+          <p:cNvPr id="74" name="Grupo 73">
+            <a:extLst>
+              <a:ext uri="{FF2B5EF4-FFF2-40B4-BE49-F238E27FC236}">
+                <a16:creationId xmlns:a16="http://schemas.microsoft.com/office/drawing/2014/main" id="{955C6189-4372-F8ED-D1BE-EF699FA5E0C6}"/>
+              </a:ext>
+            </a:extLst>
+          </p:cNvPr>
+          <p:cNvGrpSpPr/>
+          <p:nvPr/>
+        </p:nvGrpSpPr>
+        <p:grpSpPr>
+          <a:xfrm>
+            <a:off x="8566803" y="2681538"/>
+            <a:ext cx="3426579" cy="4024818"/>
+            <a:chOff x="4382720" y="3311364"/>
+            <a:chExt cx="3426579" cy="4024818"/>
+          </a:xfrm>
+        </p:grpSpPr>
+        <p:sp>
+          <p:nvSpPr>
+            <p:cNvPr id="75" name="Rectángulo 74">
+              <a:extLst>
+                <a:ext uri="{FF2B5EF4-FFF2-40B4-BE49-F238E27FC236}">
+                  <a16:creationId xmlns:a16="http://schemas.microsoft.com/office/drawing/2014/main" id="{E19B3048-7FCA-60AE-F534-48EFD4940616}"/>
+                </a:ext>
+              </a:extLst>
+            </p:cNvPr>
+            <p:cNvSpPr/>
+            <p:nvPr/>
+          </p:nvSpPr>
+          <p:spPr>
+            <a:xfrm>
+              <a:off x="6164551" y="3311364"/>
+              <a:ext cx="627126" cy="882387"/>
+            </a:xfrm>
+            <a:prstGeom prst="rect">
+              <a:avLst/>
+            </a:prstGeom>
+            <a:solidFill>
+              <a:schemeClr val="bg2">
+                <a:lumMod val="90000"/>
+              </a:schemeClr>
+            </a:solidFill>
+          </p:spPr>
+          <p:style>
+            <a:lnRef idx="2">
+              <a:schemeClr val="accent1">
+                <a:shade val="15000"/>
+              </a:schemeClr>
+            </a:lnRef>
+            <a:fillRef idx="1">
+              <a:schemeClr val="accent1"/>
+            </a:fillRef>
+            <a:effectRef idx="0">
+              <a:schemeClr val="accent1"/>
+            </a:effectRef>
+            <a:fontRef idx="minor">
+              <a:schemeClr val="lt1"/>
+            </a:fontRef>
+          </p:style>
+          <p:txBody>
+            <a:bodyPr rtlCol="0" anchor="ctr"/>
+            <a:lstStyle/>
+            <a:p>
+              <a:pPr algn="ctr"/>
+              <a:endParaRPr lang="es-ES" dirty="0"/>
+            </a:p>
+          </p:txBody>
+        </p:sp>
+        <p:sp>
+          <p:nvSpPr>
+            <p:cNvPr id="76" name="Rectángulo 75">
+              <a:extLst>
+                <a:ext uri="{FF2B5EF4-FFF2-40B4-BE49-F238E27FC236}">
+                  <a16:creationId xmlns:a16="http://schemas.microsoft.com/office/drawing/2014/main" id="{3E26D2C9-888E-F5CC-3204-D4FABB6B2198}"/>
+                </a:ext>
+              </a:extLst>
+            </p:cNvPr>
+            <p:cNvSpPr/>
+            <p:nvPr/>
+          </p:nvSpPr>
+          <p:spPr>
+            <a:xfrm>
+              <a:off x="6017856" y="3425738"/>
+              <a:ext cx="627126" cy="882387"/>
+            </a:xfrm>
+            <a:prstGeom prst="rect">
+              <a:avLst/>
+            </a:prstGeom>
+            <a:solidFill>
+              <a:schemeClr val="bg2">
+                <a:lumMod val="90000"/>
+              </a:schemeClr>
+            </a:solidFill>
+          </p:spPr>
+          <p:style>
+            <a:lnRef idx="2">
+              <a:schemeClr val="accent1">
+                <a:shade val="15000"/>
+              </a:schemeClr>
+            </a:lnRef>
+            <a:fillRef idx="1">
+              <a:schemeClr val="accent1"/>
+            </a:fillRef>
+            <a:effectRef idx="0">
+              <a:schemeClr val="accent1"/>
+            </a:effectRef>
+            <a:fontRef idx="minor">
+              <a:schemeClr val="lt1"/>
+            </a:fontRef>
+          </p:style>
+          <p:txBody>
+            <a:bodyPr rtlCol="0" anchor="ctr"/>
+            <a:lstStyle/>
+            <a:p>
+              <a:pPr algn="ctr"/>
+              <a:endParaRPr lang="es-ES" dirty="0"/>
+            </a:p>
+          </p:txBody>
+        </p:sp>
+        <p:grpSp>
+          <p:nvGrpSpPr>
+            <p:cNvPr id="77" name="Grupo 76">
+              <a:extLst>
+                <a:ext uri="{FF2B5EF4-FFF2-40B4-BE49-F238E27FC236}">
+                  <a16:creationId xmlns:a16="http://schemas.microsoft.com/office/drawing/2014/main" id="{8483880C-C829-C32F-2776-729626023AD2}"/>
+                </a:ext>
+              </a:extLst>
+            </p:cNvPr>
+            <p:cNvGrpSpPr/>
+            <p:nvPr/>
+          </p:nvGrpSpPr>
+          <p:grpSpPr>
+            <a:xfrm>
+              <a:off x="4382720" y="3540112"/>
+              <a:ext cx="3426579" cy="3796070"/>
+              <a:chOff x="977600" y="1307911"/>
+              <a:chExt cx="3426579" cy="3796070"/>
+            </a:xfrm>
+          </p:grpSpPr>
+          <p:grpSp>
+            <p:nvGrpSpPr>
+              <p:cNvPr id="78" name="Grupo 77">
+                <a:extLst>
+                  <a:ext uri="{FF2B5EF4-FFF2-40B4-BE49-F238E27FC236}">
+                    <a16:creationId xmlns:a16="http://schemas.microsoft.com/office/drawing/2014/main" id="{314BE961-ACEC-EA60-C233-A576F57683F9}"/>
+                  </a:ext>
+                </a:extLst>
+              </p:cNvPr>
+              <p:cNvGrpSpPr/>
+              <p:nvPr/>
+            </p:nvGrpSpPr>
+            <p:grpSpPr>
+              <a:xfrm>
+                <a:off x="2288562" y="1307911"/>
+                <a:ext cx="804605" cy="882387"/>
+                <a:chOff x="2100116" y="1161875"/>
+                <a:chExt cx="1070929" cy="1174458"/>
+              </a:xfrm>
+            </p:grpSpPr>
+            <p:sp>
+              <p:nvSpPr>
+                <p:cNvPr id="80" name="Rectángulo 79">
+                  <a:extLst>
+                    <a:ext uri="{FF2B5EF4-FFF2-40B4-BE49-F238E27FC236}">
+                      <a16:creationId xmlns:a16="http://schemas.microsoft.com/office/drawing/2014/main" id="{9012019E-BAE7-DF73-2FBA-1AC286F824E6}"/>
+                    </a:ext>
+                  </a:extLst>
+                </p:cNvPr>
+                <p:cNvSpPr/>
+                <p:nvPr/>
+              </p:nvSpPr>
+              <p:spPr>
+                <a:xfrm>
+                  <a:off x="2336341" y="1161875"/>
+                  <a:ext cx="834704" cy="1174458"/>
+                </a:xfrm>
+                <a:prstGeom prst="rect">
+                  <a:avLst/>
+                </a:prstGeom>
+                <a:solidFill>
+                  <a:schemeClr val="bg2">
+                    <a:lumMod val="90000"/>
+                  </a:schemeClr>
+                </a:solidFill>
+              </p:spPr>
+              <p:style>
+                <a:lnRef idx="2">
+                  <a:schemeClr val="accent1">
+                    <a:shade val="15000"/>
+                  </a:schemeClr>
+                </a:lnRef>
+                <a:fillRef idx="1">
+                  <a:schemeClr val="accent1"/>
+                </a:fillRef>
+                <a:effectRef idx="0">
+                  <a:schemeClr val="accent1"/>
+                </a:effectRef>
+                <a:fontRef idx="minor">
+                  <a:schemeClr val="lt1"/>
+                </a:fontRef>
+              </p:style>
+              <p:txBody>
+                <a:bodyPr rtlCol="0" anchor="ctr"/>
+                <a:lstStyle/>
+                <a:p>
+                  <a:pPr algn="ctr"/>
+                  <a:endParaRPr lang="es-ES"/>
+                </a:p>
+              </p:txBody>
+            </p:sp>
+            <p:sp>
+              <p:nvSpPr>
+                <p:cNvPr id="81" name="Elipse 80">
+                  <a:extLst>
+                    <a:ext uri="{FF2B5EF4-FFF2-40B4-BE49-F238E27FC236}">
+                      <a16:creationId xmlns:a16="http://schemas.microsoft.com/office/drawing/2014/main" id="{FEE7866C-230B-7483-72E9-5C76973BE031}"/>
+                    </a:ext>
+                  </a:extLst>
+                </p:cNvPr>
+                <p:cNvSpPr/>
+                <p:nvPr/>
+              </p:nvSpPr>
+              <p:spPr>
+                <a:xfrm>
+                  <a:off x="2100116" y="1305718"/>
+                  <a:ext cx="644427" cy="211459"/>
+                </a:xfrm>
+                <a:prstGeom prst="ellipse">
+                  <a:avLst/>
+                </a:prstGeom>
+                <a:solidFill>
+                  <a:schemeClr val="bg1"/>
+                </a:solidFill>
+              </p:spPr>
+              <p:style>
+                <a:lnRef idx="2">
+                  <a:schemeClr val="accent1">
+                    <a:shade val="15000"/>
+                  </a:schemeClr>
+                </a:lnRef>
+                <a:fillRef idx="1">
+                  <a:schemeClr val="accent1"/>
+                </a:fillRef>
+                <a:effectRef idx="0">
+                  <a:schemeClr val="accent1"/>
+                </a:effectRef>
+                <a:fontRef idx="minor">
+                  <a:schemeClr val="lt1"/>
+                </a:fontRef>
+              </p:style>
+              <p:txBody>
+                <a:bodyPr rtlCol="0" anchor="ctr"/>
+                <a:lstStyle/>
+                <a:p>
+                  <a:pPr algn="ctr"/>
+                  <a:endParaRPr lang="es-ES"/>
+                </a:p>
+              </p:txBody>
+            </p:sp>
+            <p:sp>
+              <p:nvSpPr>
+                <p:cNvPr id="82" name="Rectángulo 81">
+                  <a:extLst>
+                    <a:ext uri="{FF2B5EF4-FFF2-40B4-BE49-F238E27FC236}">
+                      <a16:creationId xmlns:a16="http://schemas.microsoft.com/office/drawing/2014/main" id="{35E089A1-1513-F172-0FFC-BDE820D20B82}"/>
+                    </a:ext>
+                  </a:extLst>
+                </p:cNvPr>
+                <p:cNvSpPr/>
+                <p:nvPr/>
+              </p:nvSpPr>
+              <p:spPr>
+                <a:xfrm>
+                  <a:off x="2100116" y="1639180"/>
+                  <a:ext cx="644427" cy="211459"/>
+                </a:xfrm>
+                <a:prstGeom prst="rect">
+                  <a:avLst/>
+                </a:prstGeom>
+                <a:solidFill>
+                  <a:schemeClr val="bg1"/>
+                </a:solidFill>
+              </p:spPr>
+              <p:style>
+                <a:lnRef idx="2">
+                  <a:schemeClr val="accent1">
+                    <a:shade val="15000"/>
+                  </a:schemeClr>
+                </a:lnRef>
+                <a:fillRef idx="1">
+                  <a:schemeClr val="accent1"/>
+                </a:fillRef>
+                <a:effectRef idx="0">
+                  <a:schemeClr val="accent1"/>
+                </a:effectRef>
+                <a:fontRef idx="minor">
+                  <a:schemeClr val="lt1"/>
+                </a:fontRef>
+              </p:style>
+              <p:txBody>
+                <a:bodyPr rtlCol="0" anchor="ctr"/>
+                <a:lstStyle/>
+                <a:p>
+                  <a:pPr algn="ctr"/>
+                  <a:endParaRPr lang="es-ES"/>
+                </a:p>
+              </p:txBody>
+            </p:sp>
+            <p:sp>
+              <p:nvSpPr>
+                <p:cNvPr id="83" name="Rectángulo 82">
+                  <a:extLst>
+                    <a:ext uri="{FF2B5EF4-FFF2-40B4-BE49-F238E27FC236}">
+                      <a16:creationId xmlns:a16="http://schemas.microsoft.com/office/drawing/2014/main" id="{255093A2-491E-1A4F-A91F-985BE636CD2C}"/>
+                    </a:ext>
+                  </a:extLst>
+                </p:cNvPr>
+                <p:cNvSpPr/>
+                <p:nvPr/>
+              </p:nvSpPr>
+              <p:spPr>
+                <a:xfrm>
+                  <a:off x="2100116" y="1972642"/>
+                  <a:ext cx="644427" cy="211459"/>
+                </a:xfrm>
+                <a:prstGeom prst="rect">
+                  <a:avLst/>
+                </a:prstGeom>
+                <a:solidFill>
+                  <a:schemeClr val="bg1"/>
+                </a:solidFill>
+              </p:spPr>
+              <p:style>
+                <a:lnRef idx="2">
+                  <a:schemeClr val="accent1">
+                    <a:shade val="15000"/>
+                  </a:schemeClr>
+                </a:lnRef>
+                <a:fillRef idx="1">
+                  <a:schemeClr val="accent1"/>
+                </a:fillRef>
+                <a:effectRef idx="0">
+                  <a:schemeClr val="accent1"/>
+                </a:effectRef>
+                <a:fontRef idx="minor">
+                  <a:schemeClr val="lt1"/>
+                </a:fontRef>
+              </p:style>
+              <p:txBody>
+                <a:bodyPr rtlCol="0" anchor="ctr"/>
+                <a:lstStyle/>
+                <a:p>
+                  <a:pPr algn="ctr"/>
+                  <a:endParaRPr lang="es-ES"/>
+                </a:p>
+              </p:txBody>
+            </p:sp>
+          </p:grpSp>
+          <p:sp>
+            <p:nvSpPr>
+              <p:cNvPr id="79" name="CuadroTexto 78">
+                <a:extLst>
+                  <a:ext uri="{FF2B5EF4-FFF2-40B4-BE49-F238E27FC236}">
+                    <a16:creationId xmlns:a16="http://schemas.microsoft.com/office/drawing/2014/main" id="{71FEEEF7-E5AD-5BCC-DECF-20E88DA101D0}"/>
+                  </a:ext>
+                </a:extLst>
+              </p:cNvPr>
+              <p:cNvSpPr txBox="1"/>
+              <p:nvPr/>
+            </p:nvSpPr>
+            <p:spPr>
+              <a:xfrm>
+                <a:off x="977600" y="2210881"/>
+                <a:ext cx="3426579" cy="2893100"/>
+              </a:xfrm>
+              <a:prstGeom prst="rect">
+                <a:avLst/>
+              </a:prstGeom>
+              <a:noFill/>
+            </p:spPr>
+            <p:txBody>
+              <a:bodyPr wrap="none" rtlCol="0">
+                <a:spAutoFit/>
+              </a:bodyPr>
+              <a:lstStyle/>
+              <a:p>
+                <a:pPr algn="ctr"/>
+                <a:r>
+                  <a:rPr lang="es-ES" sz="1400" dirty="0" err="1">
+                    <a:latin typeface="+mj-lt"/>
+                  </a:rPr>
+                  <a:t>archetypes</a:t>
+                </a:r>
+                <a:r>
+                  <a:rPr lang="es-ES" sz="1400" dirty="0">
+                    <a:latin typeface="+mj-lt"/>
+                  </a:rPr>
+                  <a:t>/general/section.xsl</a:t>
+                </a:r>
+              </a:p>
+              <a:p>
+                <a:pPr algn="ctr"/>
+                <a:r>
+                  <a:rPr lang="es-ES" sz="1400" dirty="0" err="1"/>
+                  <a:t>archetypes</a:t>
+                </a:r>
+                <a:r>
+                  <a:rPr lang="es-ES" sz="1400" dirty="0"/>
+                  <a:t>/general</a:t>
+                </a:r>
+                <a:r>
+                  <a:rPr lang="es-ES" sz="1400" dirty="0">
+                    <a:latin typeface="+mj-lt"/>
+                  </a:rPr>
+                  <a:t>/appendix.xsl</a:t>
+                </a:r>
+              </a:p>
+              <a:p>
+                <a:pPr algn="ctr"/>
+                <a:r>
+                  <a:rPr lang="es-ES" sz="1400" dirty="0" err="1"/>
+                  <a:t>archetypes</a:t>
+                </a:r>
+                <a:r>
+                  <a:rPr lang="es-ES" sz="1400" dirty="0"/>
+                  <a:t>/general/</a:t>
+                </a:r>
+                <a:r>
+                  <a:rPr lang="es-ES" sz="1400" dirty="0">
+                    <a:latin typeface="+mj-lt"/>
+                  </a:rPr>
+                  <a:t>paragraph.xsl</a:t>
+                </a:r>
+              </a:p>
+              <a:p>
+                <a:pPr algn="ctr"/>
+                <a:r>
+                  <a:rPr lang="es-ES" sz="1400" dirty="0" err="1"/>
+                  <a:t>archetypes</a:t>
+                </a:r>
+                <a:r>
+                  <a:rPr lang="es-ES" sz="1400" dirty="0"/>
+                  <a:t>/general/comment.xsl</a:t>
+                </a:r>
+                <a:endParaRPr lang="es-ES" sz="1400" dirty="0">
+                  <a:latin typeface="+mj-lt"/>
+                </a:endParaRPr>
+              </a:p>
+              <a:p>
+                <a:pPr algn="ctr"/>
+                <a:r>
+                  <a:rPr lang="es-ES" sz="1400" dirty="0" err="1"/>
+                  <a:t>archetypes</a:t>
+                </a:r>
+                <a:r>
+                  <a:rPr lang="es-ES" sz="1400" dirty="0"/>
+                  <a:t>/general/</a:t>
+                </a:r>
+                <a:r>
+                  <a:rPr lang="es-ES" sz="1400" dirty="0">
+                    <a:latin typeface="+mj-lt"/>
+                  </a:rPr>
+                  <a:t>glossary_item.xsl</a:t>
+                </a:r>
+              </a:p>
+              <a:p>
+                <a:pPr algn="ctr"/>
+                <a:r>
+                  <a:rPr lang="es-ES" sz="1400" dirty="0" err="1"/>
+                  <a:t>archetypes</a:t>
+                </a:r>
+                <a:r>
+                  <a:rPr lang="es-ES" sz="1400" dirty="0"/>
+                  <a:t>/general/bibliography_item.xsl</a:t>
+                </a:r>
+              </a:p>
+              <a:p>
+                <a:pPr algn="ctr"/>
+                <a:r>
+                  <a:rPr lang="es-ES" sz="1400" dirty="0" err="1"/>
+                  <a:t>archetypes</a:t>
+                </a:r>
+                <a:r>
+                  <a:rPr lang="es-ES" sz="1400" dirty="0"/>
+                  <a:t>/general/figure.xsl</a:t>
+                </a:r>
+              </a:p>
+              <a:p>
+                <a:pPr algn="ctr"/>
+                <a:r>
+                  <a:rPr lang="es-ES" sz="1400" dirty="0" err="1"/>
+                  <a:t>archetypes</a:t>
+                </a:r>
+                <a:r>
+                  <a:rPr lang="es-ES" sz="1400" dirty="0"/>
+                  <a:t>/general/organization.xsl</a:t>
+                </a:r>
+              </a:p>
+              <a:p>
+                <a:pPr algn="ctr"/>
+                <a:r>
+                  <a:rPr lang="es-ES" sz="1400" dirty="0" err="1"/>
+                  <a:t>archetypes</a:t>
+                </a:r>
+                <a:r>
+                  <a:rPr lang="es-ES" sz="1400" dirty="0"/>
+                  <a:t>/general/stakeholder.xsl</a:t>
+                </a:r>
+              </a:p>
+              <a:p>
+                <a:pPr algn="ctr"/>
+                <a:r>
+                  <a:rPr lang="es-ES" sz="1400" dirty="0" err="1"/>
+                  <a:t>archetypes</a:t>
+                </a:r>
+                <a:r>
+                  <a:rPr lang="es-ES" sz="1400" dirty="0"/>
+                  <a:t>/general/meeting.xsl</a:t>
+                </a:r>
+              </a:p>
+              <a:p>
+                <a:pPr algn="ctr"/>
+                <a:r>
+                  <a:rPr lang="es-ES" sz="1400" dirty="0" err="1"/>
+                  <a:t>archetypes</a:t>
+                </a:r>
+                <a:r>
+                  <a:rPr lang="es-ES" sz="1400" dirty="0"/>
+                  <a:t>/general/traceability_matrix.xsl</a:t>
+                </a:r>
+              </a:p>
+              <a:p>
+                <a:pPr algn="ctr"/>
+                <a:r>
+                  <a:rPr lang="es-ES" sz="1400" dirty="0" err="1"/>
+                  <a:t>archetypes</a:t>
+                </a:r>
+                <a:r>
+                  <a:rPr lang="es-ES" sz="1400" dirty="0"/>
+                  <a:t>/general/symbolic_link.xsl</a:t>
+                </a:r>
+              </a:p>
+              <a:p>
+                <a:pPr algn="ctr"/>
+                <a:r>
+                  <a:rPr lang="es-ES" sz="1400" dirty="0" err="1"/>
+                  <a:t>archetypes</a:t>
+                </a:r>
+                <a:r>
+                  <a:rPr lang="es-ES" sz="1400" dirty="0"/>
+                  <a:t>/any_archetype.xsl</a:t>
+                </a:r>
+              </a:p>
+            </p:txBody>
+          </p:sp>
+        </p:grpSp>
+      </p:grpSp>
+      <p:sp>
+        <p:nvSpPr>
+          <p:cNvPr id="5" name="CuadroTexto 4">
+            <a:extLst>
+              <a:ext uri="{FF2B5EF4-FFF2-40B4-BE49-F238E27FC236}">
+                <a16:creationId xmlns:a16="http://schemas.microsoft.com/office/drawing/2014/main" id="{207BB250-4867-7F69-1018-FE4FF574B2AE}"/>
+              </a:ext>
+            </a:extLst>
+          </p:cNvPr>
+          <p:cNvSpPr txBox="1"/>
+          <p:nvPr/>
+        </p:nvSpPr>
+        <p:spPr>
+          <a:xfrm>
+            <a:off x="9287148" y="64832"/>
+            <a:ext cx="2849113" cy="369332"/>
+          </a:xfrm>
+          <a:prstGeom prst="rect">
+            <a:avLst/>
+          </a:prstGeom>
+          <a:noFill/>
+        </p:spPr>
+        <p:txBody>
+          <a:bodyPr wrap="none" rtlCol="0">
+            <a:spAutoFit/>
+          </a:bodyPr>
+          <a:lstStyle/>
+          <a:p>
+            <a:r>
+              <a:rPr lang="es-ES" b="1" dirty="0"/>
+              <a:t>Refactorizado por Claude</a:t>
+            </a:r>
+          </a:p>
+        </p:txBody>
+      </p:sp>
+      <p:grpSp>
+        <p:nvGrpSpPr>
+          <p:cNvPr id="17" name="Grupo 16">
+            <a:extLst>
+              <a:ext uri="{FF2B5EF4-FFF2-40B4-BE49-F238E27FC236}">
+                <a16:creationId xmlns:a16="http://schemas.microsoft.com/office/drawing/2014/main" id="{E4E2688F-7E16-8204-9668-A82E964A7BD2}"/>
+              </a:ext>
+            </a:extLst>
+          </p:cNvPr>
+          <p:cNvGrpSpPr/>
+          <p:nvPr/>
+        </p:nvGrpSpPr>
+        <p:grpSpPr>
+          <a:xfrm>
+            <a:off x="335515" y="1019565"/>
+            <a:ext cx="3758851" cy="2301269"/>
+            <a:chOff x="4216582" y="3311364"/>
+            <a:chExt cx="3758851" cy="2301269"/>
+          </a:xfrm>
+        </p:grpSpPr>
+        <p:sp>
+          <p:nvSpPr>
+            <p:cNvPr id="27" name="Rectángulo 26">
+              <a:extLst>
+                <a:ext uri="{FF2B5EF4-FFF2-40B4-BE49-F238E27FC236}">
+                  <a16:creationId xmlns:a16="http://schemas.microsoft.com/office/drawing/2014/main" id="{CA818AD5-7816-FADA-004B-6DE21B339E95}"/>
+                </a:ext>
+              </a:extLst>
+            </p:cNvPr>
+            <p:cNvSpPr/>
+            <p:nvPr/>
+          </p:nvSpPr>
+          <p:spPr>
+            <a:xfrm>
+              <a:off x="6164551" y="3311364"/>
+              <a:ext cx="627126" cy="882387"/>
+            </a:xfrm>
+            <a:prstGeom prst="rect">
+              <a:avLst/>
+            </a:prstGeom>
+            <a:solidFill>
+              <a:schemeClr val="bg2">
+                <a:lumMod val="90000"/>
+              </a:schemeClr>
+            </a:solidFill>
+          </p:spPr>
+          <p:style>
+            <a:lnRef idx="2">
+              <a:schemeClr val="accent1">
+                <a:shade val="15000"/>
+              </a:schemeClr>
+            </a:lnRef>
+            <a:fillRef idx="1">
+              <a:schemeClr val="accent1"/>
+            </a:fillRef>
+            <a:effectRef idx="0">
+              <a:schemeClr val="accent1"/>
+            </a:effectRef>
+            <a:fontRef idx="minor">
+              <a:schemeClr val="lt1"/>
+            </a:fontRef>
+          </p:style>
+          <p:txBody>
+            <a:bodyPr rtlCol="0" anchor="ctr"/>
+            <a:lstStyle/>
+            <a:p>
+              <a:pPr algn="ctr"/>
+              <a:endParaRPr lang="es-ES" dirty="0"/>
+            </a:p>
+          </p:txBody>
+        </p:sp>
+        <p:sp>
+          <p:nvSpPr>
+            <p:cNvPr id="28" name="Rectángulo 27">
+              <a:extLst>
+                <a:ext uri="{FF2B5EF4-FFF2-40B4-BE49-F238E27FC236}">
+                  <a16:creationId xmlns:a16="http://schemas.microsoft.com/office/drawing/2014/main" id="{B3609B64-684E-7F2F-028B-3A22E535A19D}"/>
+                </a:ext>
+              </a:extLst>
+            </p:cNvPr>
+            <p:cNvSpPr/>
+            <p:nvPr/>
+          </p:nvSpPr>
+          <p:spPr>
+            <a:xfrm>
+              <a:off x="6017856" y="3425738"/>
+              <a:ext cx="627126" cy="882387"/>
+            </a:xfrm>
+            <a:prstGeom prst="rect">
+              <a:avLst/>
+            </a:prstGeom>
+            <a:solidFill>
+              <a:schemeClr val="bg2">
+                <a:lumMod val="90000"/>
+              </a:schemeClr>
+            </a:solidFill>
+          </p:spPr>
+          <p:style>
+            <a:lnRef idx="2">
+              <a:schemeClr val="accent1">
+                <a:shade val="15000"/>
+              </a:schemeClr>
+            </a:lnRef>
+            <a:fillRef idx="1">
+              <a:schemeClr val="accent1"/>
+            </a:fillRef>
+            <a:effectRef idx="0">
+              <a:schemeClr val="accent1"/>
+            </a:effectRef>
+            <a:fontRef idx="minor">
+              <a:schemeClr val="lt1"/>
+            </a:fontRef>
+          </p:style>
+          <p:txBody>
+            <a:bodyPr rtlCol="0" anchor="ctr"/>
+            <a:lstStyle/>
+            <a:p>
+              <a:pPr algn="ctr"/>
+              <a:endParaRPr lang="es-ES" dirty="0"/>
+            </a:p>
+          </p:txBody>
+        </p:sp>
+        <p:grpSp>
+          <p:nvGrpSpPr>
+            <p:cNvPr id="29" name="Grupo 28">
+              <a:extLst>
+                <a:ext uri="{FF2B5EF4-FFF2-40B4-BE49-F238E27FC236}">
+                  <a16:creationId xmlns:a16="http://schemas.microsoft.com/office/drawing/2014/main" id="{133A2CB4-5002-D484-0EE4-408F2781E9BB}"/>
+                </a:ext>
+              </a:extLst>
+            </p:cNvPr>
+            <p:cNvGrpSpPr/>
+            <p:nvPr/>
+          </p:nvGrpSpPr>
+          <p:grpSpPr>
+            <a:xfrm>
+              <a:off x="4216582" y="3540112"/>
+              <a:ext cx="3758851" cy="2072521"/>
+              <a:chOff x="811462" y="1307911"/>
+              <a:chExt cx="3758851" cy="2072521"/>
+            </a:xfrm>
+          </p:grpSpPr>
+          <p:grpSp>
+            <p:nvGrpSpPr>
+              <p:cNvPr id="30" name="Grupo 29">
+                <a:extLst>
+                  <a:ext uri="{FF2B5EF4-FFF2-40B4-BE49-F238E27FC236}">
+                    <a16:creationId xmlns:a16="http://schemas.microsoft.com/office/drawing/2014/main" id="{18E5C1D7-8FCD-3428-8BF3-9A74712883DA}"/>
+                  </a:ext>
+                </a:extLst>
+              </p:cNvPr>
+              <p:cNvGrpSpPr/>
+              <p:nvPr/>
+            </p:nvGrpSpPr>
+            <p:grpSpPr>
+              <a:xfrm>
+                <a:off x="2288562" y="1307911"/>
+                <a:ext cx="804605" cy="882387"/>
+                <a:chOff x="2100116" y="1161875"/>
+                <a:chExt cx="1070929" cy="1174458"/>
+              </a:xfrm>
+            </p:grpSpPr>
+            <p:sp>
+              <p:nvSpPr>
+                <p:cNvPr id="39" name="Rectángulo 38">
+                  <a:extLst>
+                    <a:ext uri="{FF2B5EF4-FFF2-40B4-BE49-F238E27FC236}">
+                      <a16:creationId xmlns:a16="http://schemas.microsoft.com/office/drawing/2014/main" id="{0E9489EA-68F6-32EE-E16D-4AA1A35360BA}"/>
+                    </a:ext>
+                  </a:extLst>
+                </p:cNvPr>
+                <p:cNvSpPr/>
+                <p:nvPr/>
+              </p:nvSpPr>
+              <p:spPr>
+                <a:xfrm>
+                  <a:off x="2336341" y="1161875"/>
+                  <a:ext cx="834704" cy="1174458"/>
+                </a:xfrm>
+                <a:prstGeom prst="rect">
+                  <a:avLst/>
+                </a:prstGeom>
+                <a:solidFill>
+                  <a:schemeClr val="bg2">
+                    <a:lumMod val="90000"/>
+                  </a:schemeClr>
+                </a:solidFill>
+              </p:spPr>
+              <p:style>
+                <a:lnRef idx="2">
+                  <a:schemeClr val="accent1">
+                    <a:shade val="15000"/>
+                  </a:schemeClr>
+                </a:lnRef>
+                <a:fillRef idx="1">
+                  <a:schemeClr val="accent1"/>
+                </a:fillRef>
+                <a:effectRef idx="0">
+                  <a:schemeClr val="accent1"/>
+                </a:effectRef>
+                <a:fontRef idx="minor">
+                  <a:schemeClr val="lt1"/>
+                </a:fontRef>
+              </p:style>
+              <p:txBody>
+                <a:bodyPr rtlCol="0" anchor="ctr"/>
+                <a:lstStyle/>
+                <a:p>
+                  <a:pPr algn="ctr"/>
+                  <a:endParaRPr lang="es-ES"/>
+                </a:p>
+              </p:txBody>
+            </p:sp>
+            <p:sp>
+              <p:nvSpPr>
+                <p:cNvPr id="40" name="Elipse 39">
+                  <a:extLst>
+                    <a:ext uri="{FF2B5EF4-FFF2-40B4-BE49-F238E27FC236}">
+                      <a16:creationId xmlns:a16="http://schemas.microsoft.com/office/drawing/2014/main" id="{049C6249-890F-6A4B-0144-8C9D88688992}"/>
+                    </a:ext>
+                  </a:extLst>
+                </p:cNvPr>
+                <p:cNvSpPr/>
+                <p:nvPr/>
+              </p:nvSpPr>
+              <p:spPr>
+                <a:xfrm>
+                  <a:off x="2100116" y="1305718"/>
+                  <a:ext cx="644427" cy="211459"/>
+                </a:xfrm>
+                <a:prstGeom prst="ellipse">
+                  <a:avLst/>
+                </a:prstGeom>
+                <a:solidFill>
+                  <a:schemeClr val="bg1"/>
+                </a:solidFill>
+              </p:spPr>
+              <p:style>
+                <a:lnRef idx="2">
+                  <a:schemeClr val="accent1">
+                    <a:shade val="15000"/>
+                  </a:schemeClr>
+                </a:lnRef>
+                <a:fillRef idx="1">
+                  <a:schemeClr val="accent1"/>
+                </a:fillRef>
+                <a:effectRef idx="0">
+                  <a:schemeClr val="accent1"/>
+                </a:effectRef>
+                <a:fontRef idx="minor">
+                  <a:schemeClr val="lt1"/>
+                </a:fontRef>
+              </p:style>
+              <p:txBody>
+                <a:bodyPr rtlCol="0" anchor="ctr"/>
+                <a:lstStyle/>
+                <a:p>
+                  <a:pPr algn="ctr"/>
+                  <a:endParaRPr lang="es-ES"/>
+                </a:p>
+              </p:txBody>
+            </p:sp>
+            <p:sp>
+              <p:nvSpPr>
+                <p:cNvPr id="42" name="Rectángulo 41">
+                  <a:extLst>
+                    <a:ext uri="{FF2B5EF4-FFF2-40B4-BE49-F238E27FC236}">
+                      <a16:creationId xmlns:a16="http://schemas.microsoft.com/office/drawing/2014/main" id="{324F74EB-7ADA-AD10-635F-157EB082047B}"/>
+                    </a:ext>
+                  </a:extLst>
+                </p:cNvPr>
+                <p:cNvSpPr/>
+                <p:nvPr/>
+              </p:nvSpPr>
+              <p:spPr>
+                <a:xfrm>
+                  <a:off x="2100116" y="1639180"/>
+                  <a:ext cx="644427" cy="211459"/>
+                </a:xfrm>
+                <a:prstGeom prst="rect">
+                  <a:avLst/>
+                </a:prstGeom>
+                <a:solidFill>
+                  <a:schemeClr val="bg1"/>
+                </a:solidFill>
+              </p:spPr>
+              <p:style>
+                <a:lnRef idx="2">
+                  <a:schemeClr val="accent1">
+                    <a:shade val="15000"/>
+                  </a:schemeClr>
+                </a:lnRef>
+                <a:fillRef idx="1">
+                  <a:schemeClr val="accent1"/>
+                </a:fillRef>
+                <a:effectRef idx="0">
+                  <a:schemeClr val="accent1"/>
+                </a:effectRef>
+                <a:fontRef idx="minor">
+                  <a:schemeClr val="lt1"/>
+                </a:fontRef>
+              </p:style>
+              <p:txBody>
+                <a:bodyPr rtlCol="0" anchor="ctr"/>
+                <a:lstStyle/>
+                <a:p>
+                  <a:pPr algn="ctr"/>
+                  <a:endParaRPr lang="es-ES"/>
+                </a:p>
+              </p:txBody>
+            </p:sp>
+            <p:sp>
+              <p:nvSpPr>
+                <p:cNvPr id="43" name="Rectángulo 42">
+                  <a:extLst>
+                    <a:ext uri="{FF2B5EF4-FFF2-40B4-BE49-F238E27FC236}">
+                      <a16:creationId xmlns:a16="http://schemas.microsoft.com/office/drawing/2014/main" id="{1DA2D820-4EAA-4831-4D46-8842579F86FC}"/>
+                    </a:ext>
+                  </a:extLst>
+                </p:cNvPr>
+                <p:cNvSpPr/>
+                <p:nvPr/>
+              </p:nvSpPr>
+              <p:spPr>
+                <a:xfrm>
+                  <a:off x="2100116" y="1972642"/>
+                  <a:ext cx="644427" cy="211459"/>
+                </a:xfrm>
+                <a:prstGeom prst="rect">
+                  <a:avLst/>
+                </a:prstGeom>
+                <a:solidFill>
+                  <a:schemeClr val="bg1"/>
+                </a:solidFill>
+              </p:spPr>
+              <p:style>
+                <a:lnRef idx="2">
+                  <a:schemeClr val="accent1">
+                    <a:shade val="15000"/>
+                  </a:schemeClr>
+                </a:lnRef>
+                <a:fillRef idx="1">
+                  <a:schemeClr val="accent1"/>
+                </a:fillRef>
+                <a:effectRef idx="0">
+                  <a:schemeClr val="accent1"/>
+                </a:effectRef>
+                <a:fontRef idx="minor">
+                  <a:schemeClr val="lt1"/>
+                </a:fontRef>
+              </p:style>
+              <p:txBody>
+                <a:bodyPr rtlCol="0" anchor="ctr"/>
+                <a:lstStyle/>
+                <a:p>
+                  <a:pPr algn="ctr"/>
+                  <a:endParaRPr lang="es-ES"/>
+                </a:p>
+              </p:txBody>
+            </p:sp>
+          </p:grpSp>
+          <p:sp>
+            <p:nvSpPr>
+              <p:cNvPr id="38" name="CuadroTexto 37">
+                <a:extLst>
+                  <a:ext uri="{FF2B5EF4-FFF2-40B4-BE49-F238E27FC236}">
+                    <a16:creationId xmlns:a16="http://schemas.microsoft.com/office/drawing/2014/main" id="{AE43DAA6-324A-0394-3056-2A2EAB0D1BCB}"/>
+                  </a:ext>
+                </a:extLst>
+              </p:cNvPr>
+              <p:cNvSpPr txBox="1"/>
+              <p:nvPr/>
+            </p:nvSpPr>
+            <p:spPr>
+              <a:xfrm>
+                <a:off x="811462" y="2210881"/>
+                <a:ext cx="3758851" cy="1169551"/>
+              </a:xfrm>
+              <a:prstGeom prst="rect">
+                <a:avLst/>
+              </a:prstGeom>
+              <a:noFill/>
+            </p:spPr>
+            <p:txBody>
+              <a:bodyPr wrap="none" rtlCol="0">
+                <a:spAutoFit/>
+              </a:bodyPr>
+              <a:lstStyle/>
+              <a:p>
+                <a:pPr algn="ctr"/>
+                <a:r>
+                  <a:rPr lang="es-ES" sz="1400" dirty="0"/>
+                  <a:t>&lt;perfil&gt;/i18n/&lt;idioma&gt;/archetypes_labels.xml</a:t>
+                </a:r>
+              </a:p>
+              <a:p>
+                <a:pPr algn="ctr"/>
+                <a:r>
+                  <a:rPr lang="es-ES" sz="1400" dirty="0"/>
+                  <a:t>&lt;perfil&gt;/i18n/&lt;idioma&gt;/xslt_labels.xml</a:t>
+                </a:r>
+              </a:p>
+              <a:p>
+                <a:pPr algn="ctr"/>
+                <a:endParaRPr lang="es-ES" sz="1400" dirty="0"/>
+              </a:p>
+              <a:p>
+                <a:pPr algn="ctr"/>
+                <a:r>
+                  <a:rPr lang="es-ES" sz="1400" dirty="0"/>
+                  <a:t>Se accede desde XSLT mediante</a:t>
+                </a:r>
+              </a:p>
+              <a:p>
+                <a:pPr algn="ctr"/>
+                <a:r>
+                  <a:rPr lang="es-ES" sz="1400" b="1" dirty="0"/>
+                  <a:t>proteus-utils:i18n(</a:t>
+                </a:r>
+                <a:r>
+                  <a:rPr lang="es-ES" sz="1400" b="1" dirty="0" err="1"/>
+                  <a:t>key</a:t>
+                </a:r>
+                <a:r>
+                  <a:rPr lang="es-ES" sz="1400" b="1" dirty="0"/>
+                  <a:t>, ...)</a:t>
+                </a:r>
+              </a:p>
+            </p:txBody>
+          </p:sp>
+        </p:grpSp>
+      </p:grpSp>
+      <p:grpSp>
+        <p:nvGrpSpPr>
+          <p:cNvPr id="68" name="Grupo 67">
+            <a:extLst>
+              <a:ext uri="{FF2B5EF4-FFF2-40B4-BE49-F238E27FC236}">
+                <a16:creationId xmlns:a16="http://schemas.microsoft.com/office/drawing/2014/main" id="{A556FE39-E36C-3468-D1D0-8FD5087BC890}"/>
+              </a:ext>
+            </a:extLst>
+          </p:cNvPr>
+          <p:cNvGrpSpPr/>
+          <p:nvPr/>
+        </p:nvGrpSpPr>
+        <p:grpSpPr>
+          <a:xfrm>
+            <a:off x="8900767" y="2109665"/>
+            <a:ext cx="1761430" cy="571873"/>
+            <a:chOff x="6559262" y="455318"/>
+            <a:chExt cx="1761430" cy="571873"/>
+          </a:xfrm>
+        </p:grpSpPr>
+        <p:cxnSp>
+          <p:nvCxnSpPr>
+            <p:cNvPr id="26" name="Conector recto de flecha 25">
+              <a:extLst>
+                <a:ext uri="{FF2B5EF4-FFF2-40B4-BE49-F238E27FC236}">
+                  <a16:creationId xmlns:a16="http://schemas.microsoft.com/office/drawing/2014/main" id="{9C2A3544-575F-4C7E-2639-9CD3B553FB8E}"/>
+                </a:ext>
+              </a:extLst>
+            </p:cNvPr>
+            <p:cNvCxnSpPr>
+              <a:cxnSpLocks/>
+              <a:stCxn id="21" idx="2"/>
+              <a:endCxn id="75" idx="0"/>
+            </p:cNvCxnSpPr>
+            <p:nvPr/>
+          </p:nvCxnSpPr>
+          <p:spPr>
+            <a:xfrm>
+              <a:off x="6559262" y="455318"/>
+              <a:ext cx="1761430" cy="571873"/>
+            </a:xfrm>
+            <a:prstGeom prst="straightConnector1">
+              <a:avLst/>
+            </a:prstGeom>
+            <a:ln>
+              <a:solidFill>
+                <a:schemeClr val="tx1">
+                  <a:lumMod val="65000"/>
+                  <a:lumOff val="35000"/>
+                </a:schemeClr>
+              </a:solidFill>
+              <a:prstDash val="solid"/>
+              <a:tailEnd type="triangle" w="lg" len="lg"/>
+            </a:ln>
+          </p:spPr>
+          <p:style>
+            <a:lnRef idx="2">
+              <a:schemeClr val="accent1"/>
+            </a:lnRef>
+            <a:fillRef idx="0">
+              <a:schemeClr val="accent1"/>
+            </a:fillRef>
+            <a:effectRef idx="1">
+              <a:schemeClr val="accent1"/>
+            </a:effectRef>
+            <a:fontRef idx="minor">
+              <a:schemeClr val="tx1"/>
+            </a:fontRef>
+          </p:style>
+        </p:cxnSp>
+        <p:sp>
+          <p:nvSpPr>
+            <p:cNvPr id="67" name="CuadroTexto 66">
+              <a:extLst>
+                <a:ext uri="{FF2B5EF4-FFF2-40B4-BE49-F238E27FC236}">
+                  <a16:creationId xmlns:a16="http://schemas.microsoft.com/office/drawing/2014/main" id="{C2E214D1-DD2C-AEDF-C4C1-84AA0414140E}"/>
+                </a:ext>
+              </a:extLst>
+            </p:cNvPr>
+            <p:cNvSpPr txBox="1"/>
+            <p:nvPr/>
+          </p:nvSpPr>
+          <p:spPr>
+            <a:xfrm rot="1070032">
+              <a:off x="7169556" y="493809"/>
+              <a:ext cx="1032655" cy="276999"/>
+            </a:xfrm>
+            <a:prstGeom prst="rect">
+              <a:avLst/>
+            </a:prstGeom>
+            <a:noFill/>
+          </p:spPr>
+          <p:txBody>
+            <a:bodyPr wrap="none" rtlCol="0">
+              <a:spAutoFit/>
+            </a:bodyPr>
+            <a:lstStyle/>
+            <a:p>
+              <a:r>
+                <a:rPr lang="es-ES" sz="1200" dirty="0"/>
+                <a:t>«</a:t>
+              </a:r>
+              <a:r>
+                <a:rPr lang="es-ES" sz="1200" dirty="0" err="1"/>
+                <a:t>includes</a:t>
+              </a:r>
+              <a:r>
+                <a:rPr lang="es-ES" sz="1200" dirty="0"/>
+                <a:t>» ②</a:t>
+              </a:r>
+            </a:p>
+          </p:txBody>
+        </p:sp>
+      </p:grpSp>
+      <p:sp>
+        <p:nvSpPr>
+          <p:cNvPr id="72" name="Abrir llave 71">
+            <a:extLst>
+              <a:ext uri="{FF2B5EF4-FFF2-40B4-BE49-F238E27FC236}">
+                <a16:creationId xmlns:a16="http://schemas.microsoft.com/office/drawing/2014/main" id="{222AB1E0-62E7-D93F-BA3A-CDF668E85FEB}"/>
+              </a:ext>
+            </a:extLst>
+          </p:cNvPr>
+          <p:cNvSpPr/>
+          <p:nvPr/>
+        </p:nvSpPr>
+        <p:spPr>
+          <a:xfrm>
+            <a:off x="6081265" y="2453098"/>
+            <a:ext cx="227591" cy="4201645"/>
+          </a:xfrm>
+          <a:prstGeom prst="leftBrace">
+            <a:avLst/>
+          </a:prstGeom>
+          <a:ln>
+            <a:solidFill>
+              <a:schemeClr val="tx1">
+                <a:lumMod val="65000"/>
+                <a:lumOff val="35000"/>
+              </a:schemeClr>
+            </a:solidFill>
+          </a:ln>
+        </p:spPr>
+        <p:style>
+          <a:lnRef idx="2">
+            <a:schemeClr val="accent1"/>
+          </a:lnRef>
+          <a:fillRef idx="0">
+            <a:schemeClr val="accent1"/>
+          </a:fillRef>
+          <a:effectRef idx="1">
+            <a:schemeClr val="accent1"/>
+          </a:effectRef>
+          <a:fontRef idx="minor">
+            <a:schemeClr val="tx1"/>
+          </a:fontRef>
+        </p:style>
+        <p:txBody>
+          <a:bodyPr rtlCol="0" anchor="ctr"/>
+          <a:lstStyle/>
+          <a:p>
+            <a:pPr algn="ctr"/>
+            <a:endParaRPr lang="es-ES"/>
+          </a:p>
+        </p:txBody>
+      </p:sp>
+    </p:spTree>
+    <p:extLst>
+      <p:ext uri="{BB962C8B-B14F-4D97-AF65-F5344CB8AC3E}">
+        <p14:creationId xmlns:p14="http://schemas.microsoft.com/office/powerpoint/2010/main" val="3163924095"/>
+      </p:ext>
+    </p:extLst>
+  </p:cSld>
+  <p:clrMapOvr>
+    <a:masterClrMapping/>
+  </p:clrMapOvr>
+</p:sld>
+</file>
+
+<file path=ppt/slides/slide5.xml><?xml version="1.0" encoding="utf-8"?>
+<p:sld xmlns:a="http://schemas.openxmlformats.org/drawingml/2006/main" xmlns:r="http://schemas.openxmlformats.org/officeDocument/2006/relationships" xmlns:p="http://schemas.openxmlformats.org/presentationml/2006/main">
+  <p:cSld>
+    <p:spTree>
+      <p:nvGrpSpPr>
         <p:cNvPr id="1" name=""/>
         <p:cNvGrpSpPr/>
         <p:nvPr/>
@@ -11149,7 +13342,7 @@
 </p:sld>
 </file>
 
-<file path=ppt/slides/slide5.xml><?xml version="1.0" encoding="utf-8"?>
+<file path=ppt/slides/slide6.xml><?xml version="1.0" encoding="utf-8"?>
 <p:sld xmlns:a="http://schemas.openxmlformats.org/drawingml/2006/main" xmlns:r="http://schemas.openxmlformats.org/officeDocument/2006/relationships" xmlns:p="http://schemas.openxmlformats.org/presentationml/2006/main">
   <p:cSld>
     <p:spTree>

--- a/documentation/Refactorización XLST.pptx
+++ b/documentation/Refactorización XLST.pptx
@@ -10,7 +10,8 @@
     <p:sldId id="259" r:id="rId4"/>
     <p:sldId id="262" r:id="rId5"/>
     <p:sldId id="260" r:id="rId6"/>
-    <p:sldId id="261" r:id="rId7"/>
+    <p:sldId id="263" r:id="rId7"/>
+    <p:sldId id="261" r:id="rId8"/>
   </p:sldIdLst>
   <p:sldSz cx="12192000" cy="6858000"/>
   <p:notesSz cx="6797675" cy="9926638"/>
@@ -829,7 +830,7 @@
           <a:p>
             <a:fld id="{93065D2E-367D-4F9D-9E24-4F44260CE426}" type="datetimeFigureOut">
               <a:rPr lang="es-ES" smtClean="0"/>
-              <a:t>17/09/2026</a:t>
+              <a:t>20/09/2026</a:t>
             </a:fld>
             <a:endParaRPr lang="es-ES"/>
           </a:p>
@@ -1027,7 +1028,7 @@
           <a:p>
             <a:fld id="{93065D2E-367D-4F9D-9E24-4F44260CE426}" type="datetimeFigureOut">
               <a:rPr lang="es-ES" smtClean="0"/>
-              <a:t>17/09/2026</a:t>
+              <a:t>20/09/2026</a:t>
             </a:fld>
             <a:endParaRPr lang="es-ES"/>
           </a:p>
@@ -1235,7 +1236,7 @@
           <a:p>
             <a:fld id="{93065D2E-367D-4F9D-9E24-4F44260CE426}" type="datetimeFigureOut">
               <a:rPr lang="es-ES" smtClean="0"/>
-              <a:t>17/09/2026</a:t>
+              <a:t>20/09/2026</a:t>
             </a:fld>
             <a:endParaRPr lang="es-ES"/>
           </a:p>
@@ -1433,7 +1434,7 @@
           <a:p>
             <a:fld id="{93065D2E-367D-4F9D-9E24-4F44260CE426}" type="datetimeFigureOut">
               <a:rPr lang="es-ES" smtClean="0"/>
-              <a:t>17/09/2026</a:t>
+              <a:t>20/09/2026</a:t>
             </a:fld>
             <a:endParaRPr lang="es-ES"/>
           </a:p>
@@ -1708,7 +1709,7 @@
           <a:p>
             <a:fld id="{93065D2E-367D-4F9D-9E24-4F44260CE426}" type="datetimeFigureOut">
               <a:rPr lang="es-ES" smtClean="0"/>
-              <a:t>17/09/2026</a:t>
+              <a:t>20/09/2026</a:t>
             </a:fld>
             <a:endParaRPr lang="es-ES"/>
           </a:p>
@@ -1973,7 +1974,7 @@
           <a:p>
             <a:fld id="{93065D2E-367D-4F9D-9E24-4F44260CE426}" type="datetimeFigureOut">
               <a:rPr lang="es-ES" smtClean="0"/>
-              <a:t>17/09/2026</a:t>
+              <a:t>20/09/2026</a:t>
             </a:fld>
             <a:endParaRPr lang="es-ES"/>
           </a:p>
@@ -2385,7 +2386,7 @@
           <a:p>
             <a:fld id="{93065D2E-367D-4F9D-9E24-4F44260CE426}" type="datetimeFigureOut">
               <a:rPr lang="es-ES" smtClean="0"/>
-              <a:t>17/09/2026</a:t>
+              <a:t>20/09/2026</a:t>
             </a:fld>
             <a:endParaRPr lang="es-ES"/>
           </a:p>
@@ -2526,7 +2527,7 @@
           <a:p>
             <a:fld id="{93065D2E-367D-4F9D-9E24-4F44260CE426}" type="datetimeFigureOut">
               <a:rPr lang="es-ES" smtClean="0"/>
-              <a:t>17/09/2026</a:t>
+              <a:t>20/09/2026</a:t>
             </a:fld>
             <a:endParaRPr lang="es-ES"/>
           </a:p>
@@ -2639,7 +2640,7 @@
           <a:p>
             <a:fld id="{93065D2E-367D-4F9D-9E24-4F44260CE426}" type="datetimeFigureOut">
               <a:rPr lang="es-ES" smtClean="0"/>
-              <a:t>17/09/2026</a:t>
+              <a:t>20/09/2026</a:t>
             </a:fld>
             <a:endParaRPr lang="es-ES"/>
           </a:p>
@@ -2950,7 +2951,7 @@
           <a:p>
             <a:fld id="{93065D2E-367D-4F9D-9E24-4F44260CE426}" type="datetimeFigureOut">
               <a:rPr lang="es-ES" smtClean="0"/>
-              <a:t>17/09/2026</a:t>
+              <a:t>20/09/2026</a:t>
             </a:fld>
             <a:endParaRPr lang="es-ES"/>
           </a:p>
@@ -3238,7 +3239,7 @@
           <a:p>
             <a:fld id="{93065D2E-367D-4F9D-9E24-4F44260CE426}" type="datetimeFigureOut">
               <a:rPr lang="es-ES" smtClean="0"/>
-              <a:t>17/09/2026</a:t>
+              <a:t>20/09/2026</a:t>
             </a:fld>
             <a:endParaRPr lang="es-ES"/>
           </a:p>
@@ -3479,7 +3480,7 @@
           <a:p>
             <a:fld id="{93065D2E-367D-4F9D-9E24-4F44260CE426}" type="datetimeFigureOut">
               <a:rPr lang="es-ES" smtClean="0"/>
-              <a:t>17/09/2026</a:t>
+              <a:t>20/09/2026</a:t>
             </a:fld>
             <a:endParaRPr lang="es-ES"/>
           </a:p>
@@ -13347,6 +13348,72 @@
   <p:cSld>
     <p:spTree>
       <p:nvGrpSpPr>
+        <p:cNvPr id="1" name="">
+          <a:extLst>
+            <a:ext uri="{FF2B5EF4-FFF2-40B4-BE49-F238E27FC236}">
+              <a16:creationId xmlns:a16="http://schemas.microsoft.com/office/drawing/2014/main" id="{9F1630CE-D883-96C3-C3F5-AD72995000EA}"/>
+            </a:ext>
+          </a:extLst>
+        </p:cNvPr>
+        <p:cNvGrpSpPr/>
+        <p:nvPr/>
+      </p:nvGrpSpPr>
+      <p:grpSpPr>
+        <a:xfrm>
+          <a:off x="0" y="0"/>
+          <a:ext cx="0" cy="0"/>
+          <a:chOff x="0" y="0"/>
+          <a:chExt cx="0" cy="0"/>
+        </a:xfrm>
+      </p:grpSpPr>
+      <p:pic>
+        <p:nvPicPr>
+          <p:cNvPr id="8" name="Imagen 7">
+            <a:extLst>
+              <a:ext uri="{FF2B5EF4-FFF2-40B4-BE49-F238E27FC236}">
+                <a16:creationId xmlns:a16="http://schemas.microsoft.com/office/drawing/2014/main" id="{442E89C4-8430-BD5D-7505-B26A2E74E936}"/>
+              </a:ext>
+            </a:extLst>
+          </p:cNvPr>
+          <p:cNvPicPr>
+            <a:picLocks noChangeAspect="1"/>
+          </p:cNvPicPr>
+          <p:nvPr/>
+        </p:nvPicPr>
+        <p:blipFill>
+          <a:blip r:embed="rId2"/>
+          <a:stretch>
+            <a:fillRect/>
+          </a:stretch>
+        </p:blipFill>
+        <p:spPr>
+          <a:xfrm>
+            <a:off x="987259" y="1002218"/>
+            <a:ext cx="6925642" cy="1619476"/>
+          </a:xfrm>
+          <a:prstGeom prst="rect">
+            <a:avLst/>
+          </a:prstGeom>
+        </p:spPr>
+      </p:pic>
+    </p:spTree>
+    <p:extLst>
+      <p:ext uri="{BB962C8B-B14F-4D97-AF65-F5344CB8AC3E}">
+        <p14:creationId xmlns:p14="http://schemas.microsoft.com/office/powerpoint/2010/main" val="4122364074"/>
+      </p:ext>
+    </p:extLst>
+  </p:cSld>
+  <p:clrMapOvr>
+    <a:masterClrMapping/>
+  </p:clrMapOvr>
+</p:sld>
+</file>
+
+<file path=ppt/slides/slide7.xml><?xml version="1.0" encoding="utf-8"?>
+<p:sld xmlns:a="http://schemas.openxmlformats.org/drawingml/2006/main" xmlns:r="http://schemas.openxmlformats.org/officeDocument/2006/relationships" xmlns:p="http://schemas.openxmlformats.org/presentationml/2006/main">
+  <p:cSld>
+    <p:spTree>
+      <p:nvGrpSpPr>
         <p:cNvPr id="1" name=""/>
         <p:cNvGrpSpPr/>
         <p:nvPr/>
